--- a/DTC2026赛道二参赛作品-含个人简介.pptx
+++ b/DTC2026赛道二参赛作品-含个人简介.pptx
@@ -18,6 +18,9 @@
     <p:sldId id="260" r:id="rId6"/>
     <p:sldId id="264" r:id="rId10"/>
     <p:sldId id="269" r:id="rId15"/>
+    <p:sldId id="273" r:id="rId4"/>
+    <p:sldId id="274" r:id="rId22"/>
+    <p:sldId id="275" r:id="rId23"/>
     <p:sldId id="271" r:id="rId21"/>
     <p:sldId id="270" r:id="rId16"/>
   </p:sldIdLst>
@@ -3605,6 +3608,791 @@
       </p:grpSpPr>
       <p:sp>
         <p:nvSpPr>
+          <p:cNvPr id="2" name="AutoShape 2"/>
+          <p:cNvSpPr/>
+          <p:nvPr/>
+        </p:nvSpPr>
+        <p:spPr>
+          <a:xfrm>
+            <a:off x="4487245" y="1423716"/>
+            <a:ext cx="3186474" cy="3186474"/>
+          </a:xfrm>
+          <a:prstGeom prst="ellipse">
+            <a:avLst/>
+          </a:prstGeom>
+          <a:solidFill>
+            <a:schemeClr val="accent2">
+              <a:alpha val="20000"/>
+            </a:schemeClr>
+          </a:solidFill>
+          <a:ln/>
+        </p:spPr>
+        <p:txBody>
+          <a:bodyPr/>
+          <a:lstStyle/>
+          <a:p>
+            <a:endParaRPr lang="zh-CN" altLang="en-US"/>
+          </a:p>
+        </p:txBody>
+        <p:extLst>
+          <p:ext uri="http://schemas.baidu.com/office/drawing/2023/templateData">
+            <bd:templateData xmlns="" xmlns:bd="http://schemas.baidu.com/office/drawing/2023/templateData">eyJ0YWciOiJub0VkaXQifQ==</bd:templateData>
+          </p:ext>
+        </p:extLst>
+      </p:sp>
+      <p:sp>
+        <p:nvSpPr>
+          <p:cNvPr id="3" name="AutoShape 3"/>
+          <p:cNvSpPr/>
+          <p:nvPr/>
+        </p:nvSpPr>
+        <p:spPr>
+          <a:xfrm>
+            <a:off x="4173203" y="1109673"/>
+            <a:ext cx="3814560" cy="3814560"/>
+          </a:xfrm>
+          <a:prstGeom prst="ellipse">
+            <a:avLst/>
+          </a:prstGeom>
+          <a:solidFill>
+            <a:schemeClr val="accent2">
+              <a:alpha val="20000"/>
+            </a:schemeClr>
+          </a:solidFill>
+          <a:ln/>
+        </p:spPr>
+        <p:txBody>
+          <a:bodyPr/>
+          <a:lstStyle/>
+          <a:p>
+            <a:endParaRPr lang="zh-CN" altLang="en-US"/>
+          </a:p>
+        </p:txBody>
+        <p:extLst>
+          <p:ext uri="http://schemas.baidu.com/office/drawing/2023/templateData">
+            <bd:templateData xmlns="" xmlns:bd="http://schemas.baidu.com/office/drawing/2023/templateData">eyJ0YWciOiJub0VkaXQifQ==</bd:templateData>
+          </p:ext>
+        </p:extLst>
+      </p:sp>
+      <p:sp>
+        <p:nvSpPr>
+          <p:cNvPr id="4" name="AutoShape 4"/>
+          <p:cNvSpPr/>
+          <p:nvPr/>
+        </p:nvSpPr>
+        <p:spPr>
+          <a:xfrm>
+            <a:off x="3495828" y="2017416"/>
+            <a:ext cx="1999074" cy="1999074"/>
+          </a:xfrm>
+          <a:prstGeom prst="ellipse">
+            <a:avLst/>
+          </a:prstGeom>
+          <a:solidFill>
+            <a:schemeClr val="accent1">
+              <a:alpha val="100000"/>
+              <a:lumMod val="75000"/>
+            </a:schemeClr>
+          </a:solidFill>
+          <a:ln/>
+        </p:spPr>
+        <p:txBody>
+          <a:bodyPr/>
+          <a:lstStyle/>
+          <a:p>
+            <a:endParaRPr lang="zh-CN" altLang="en-US"/>
+          </a:p>
+        </p:txBody>
+        <p:extLst>
+          <p:ext uri="http://schemas.baidu.com/office/drawing/2023/templateData">
+            <bd:templateData xmlns="" xmlns:bd="http://schemas.baidu.com/office/drawing/2023/templateData">eyJ0YWciOiJub0VkaXQifQ==</bd:templateData>
+          </p:ext>
+        </p:extLst>
+      </p:sp>
+      <p:sp>
+        <p:nvSpPr>
+          <p:cNvPr id="5" name="AutoShape 5"/>
+          <p:cNvSpPr/>
+          <p:nvPr/>
+        </p:nvSpPr>
+        <p:spPr>
+          <a:xfrm>
+            <a:off x="6686299" y="2017209"/>
+            <a:ext cx="1999488" cy="1999488"/>
+          </a:xfrm>
+          <a:prstGeom prst="ellipse">
+            <a:avLst/>
+          </a:prstGeom>
+          <a:solidFill>
+            <a:schemeClr val="accent1">
+              <a:alpha val="100000"/>
+              <a:lumMod val="75000"/>
+            </a:schemeClr>
+          </a:solidFill>
+          <a:ln/>
+        </p:spPr>
+        <p:txBody>
+          <a:bodyPr/>
+          <a:lstStyle/>
+          <a:p>
+            <a:endParaRPr lang="zh-CN" altLang="en-US"/>
+          </a:p>
+        </p:txBody>
+        <p:extLst>
+          <p:ext uri="http://schemas.baidu.com/office/drawing/2023/templateData">
+            <bd:templateData xmlns="" xmlns:bd="http://schemas.baidu.com/office/drawing/2023/templateData">eyJ0YWciOiJub0VkaXQifQ==</bd:templateData>
+          </p:ext>
+        </p:extLst>
+      </p:sp>
+      <p:sp>
+        <p:nvSpPr>
+          <p:cNvPr id="6" name="AutoShape 6"/>
+          <p:cNvSpPr/>
+          <p:nvPr/>
+        </p:nvSpPr>
+        <p:spPr>
+          <a:xfrm>
+            <a:off x="4732087" y="1668558"/>
+            <a:ext cx="2696790" cy="2696790"/>
+          </a:xfrm>
+          <a:prstGeom prst="ellipse">
+            <a:avLst/>
+          </a:prstGeom>
+          <a:solidFill>
+            <a:schemeClr val="accent1">
+              <a:alpha val="100000"/>
+            </a:schemeClr>
+          </a:solidFill>
+          <a:ln/>
+        </p:spPr>
+        <p:txBody>
+          <a:bodyPr/>
+          <a:lstStyle/>
+          <a:p>
+            <a:endParaRPr lang="zh-CN" altLang="en-US"/>
+          </a:p>
+        </p:txBody>
+        <p:extLst>
+          <p:ext uri="http://schemas.baidu.com/office/drawing/2023/templateData">
+            <bd:templateData xmlns="" xmlns:bd="http://schemas.baidu.com/office/drawing/2023/templateData">eyJ0YWciOiJub0VkaXQifQ==</bd:templateData>
+          </p:ext>
+        </p:extLst>
+      </p:sp>
+      <p:sp>
+        <p:nvSpPr>
+          <p:cNvPr id="7" name="TextBox 7"/>
+          <p:cNvSpPr txBox="1"/>
+          <p:nvPr/>
+        </p:nvSpPr>
+        <p:spPr>
+          <a:xfrm>
+            <a:off x="384641" y="2117702"/>
+            <a:ext cx="2934861" cy="2120494"/>
+          </a:xfrm>
+          <a:prstGeom prst="rect">
+            <a:avLst/>
+          </a:prstGeom>
+          <a:ln/>
+        </p:spPr>
+        <p:txBody>
+          <a:bodyPr vert="horz" wrap="square" lIns="114300" tIns="57150" rIns="114300" bIns="57150" rtlCol="0" anchor="ctr" anchorCtr="0">
+            <a:normAutofit/>
+          </a:bodyPr>
+          <a:lstStyle/>
+          <a:p>
+            <a:pPr algn="r">
+              <a:lnSpc>
+                <a:spcPct val="140000"/>
+              </a:lnSpc>
+            </a:pPr>
+            <a:r>
+              <a:rPr lang="en-US" sz="1425">
+                <a:solidFill>
+                  <a:schemeClr val="dk1">
+                    <a:alpha val="100000"/>
+                  </a:schemeClr>
+                </a:solidFill>
+                <a:latin typeface="Noto Sans SC"/>
+                <a:ea typeface="Noto Sans SC"/>
+                <a:cs typeface="Noto Sans SC"/>
+              </a:rPr>
+              <a:t>行动 执行部署与转移命令 触发对手响应释放信号 感知 战斗网络采集信号更新战场态势</a:t>
+            </a:r>
+          </a:p>
+        </p:txBody>
+        <p:extLst>
+          <p:ext uri="http://schemas.baidu.com/office/drawing/2023/templateData">
+            <bd:templateData xmlns="" xmlns:bd="http://schemas.baidu.com/office/drawing/2023/templateData">eyJfdGVtcGxhdGVEYXRhIjp7ImNvbnRlbnRUeXBlIjoiJGl0ZW0xX2MiLCJsaW5lQ291bnQiOiI2Iiwid29yZENvdW50IjoiMTMifSwidGFnIjoiJGl0ZW0xX2MifQ==</bd:templateData>
+          </p:ext>
+        </p:extLst>
+      </p:sp>
+      <p:sp>
+        <p:nvSpPr>
+          <p:cNvPr id="8" name="TextBox 8"/>
+          <p:cNvSpPr txBox="1"/>
+          <p:nvPr/>
+        </p:nvSpPr>
+        <p:spPr>
+          <a:xfrm>
+            <a:off x="8861907" y="2117702"/>
+            <a:ext cx="2934861" cy="2120494"/>
+          </a:xfrm>
+          <a:prstGeom prst="rect">
+            <a:avLst/>
+          </a:prstGeom>
+          <a:ln/>
+        </p:spPr>
+        <p:txBody>
+          <a:bodyPr vert="horz" wrap="square" lIns="114300" tIns="57150" rIns="114300" bIns="57150" rtlCol="0" anchor="ctr" anchorCtr="0">
+            <a:normAutofit/>
+          </a:bodyPr>
+          <a:lstStyle/>
+          <a:p>
+            <a:pPr algn="l">
+              <a:lnSpc>
+                <a:spcPct val="140000"/>
+              </a:lnSpc>
+            </a:pPr>
+            <a:r>
+              <a:rPr lang="en-US" sz="1425">
+                <a:solidFill>
+                  <a:schemeClr val="dk1">
+                    <a:alpha val="100000"/>
+                  </a:schemeClr>
+                </a:solidFill>
+                <a:latin typeface="Noto Sans SC"/>
+                <a:ea typeface="Noto Sans SC"/>
+                <a:cs typeface="Noto Sans SC"/>
+              </a:rPr>
+              <a:t>决策 基于更新后的对手模型验证不确定性制定下一步行动 适应 持续调整部署与策略形成闭环</a:t>
+            </a:r>
+          </a:p>
+        </p:txBody>
+        <p:extLst>
+          <p:ext uri="http://schemas.baidu.com/office/drawing/2023/templateData">
+            <bd:templateData xmlns="" xmlns:bd="http://schemas.baidu.com/office/drawing/2023/templateData">eyJfdGVtcGxhdGVEYXRhIjp7ImNvbnRlbnRUeXBlIjoiJGl0ZW0yX2MiLCJsaW5lQ291bnQiOiI2Iiwid29yZENvdW50IjoiMTMifSwidGFnIjoiJGl0ZW0yX2MifQ==</bd:templateData>
+          </p:ext>
+        </p:extLst>
+      </p:sp>
+      <p:sp>
+        <p:nvSpPr>
+          <p:cNvPr id="9" name="Freeform 9"/>
+          <p:cNvSpPr/>
+          <p:nvPr/>
+        </p:nvSpPr>
+        <p:spPr>
+          <a:xfrm>
+            <a:off x="5452470" y="2378719"/>
+            <a:ext cx="1276469" cy="1276469"/>
+          </a:xfrm>
+          <a:custGeom>
+            <a:avLst/>
+            <a:gdLst/>
+            <a:ahLst/>
+            <a:cxnLst/>
+            <a:rect l="l" t="t" r="r" b="b"/>
+            <a:pathLst>
+              <a:path w="304800" h="304800">
+                <a:moveTo>
+                  <a:pt x="257299" y="240773"/>
+                </a:moveTo>
+                <a:lnTo>
+                  <a:pt x="257299" y="258156"/>
+                </a:lnTo>
+                <a:lnTo>
+                  <a:pt x="47501" y="258156"/>
+                </a:lnTo>
+                <a:lnTo>
+                  <a:pt x="47501" y="240773"/>
+                </a:lnTo>
+                <a:cubicBezTo>
+                  <a:pt x="47501" y="240773"/>
+                  <a:pt x="43015" y="231162"/>
+                  <a:pt x="67361" y="208112"/>
+                </a:cubicBezTo>
+                <a:cubicBezTo>
+                  <a:pt x="91688" y="185071"/>
+                  <a:pt x="88487" y="125511"/>
+                  <a:pt x="88487" y="85173"/>
+                </a:cubicBezTo>
+                <a:cubicBezTo>
+                  <a:pt x="88487" y="44834"/>
+                  <a:pt x="145142" y="43977"/>
+                  <a:pt x="145142" y="43977"/>
+                </a:cubicBezTo>
+                <a:lnTo>
+                  <a:pt x="147085" y="43977"/>
+                </a:lnTo>
+                <a:cubicBezTo>
+                  <a:pt x="147085" y="43996"/>
+                  <a:pt x="147085" y="43701"/>
+                  <a:pt x="147085" y="37424"/>
+                </a:cubicBezTo>
+                <a:cubicBezTo>
+                  <a:pt x="147085" y="33395"/>
+                  <a:pt x="133560" y="18802"/>
+                  <a:pt x="133560" y="18802"/>
+                </a:cubicBezTo>
+                <a:lnTo>
+                  <a:pt x="133360" y="9973"/>
+                </a:lnTo>
+                <a:lnTo>
+                  <a:pt x="171555" y="9973"/>
+                </a:lnTo>
+                <a:lnTo>
+                  <a:pt x="171298" y="19136"/>
+                </a:lnTo>
+                <a:cubicBezTo>
+                  <a:pt x="171298" y="19136"/>
+                  <a:pt x="156639" y="33719"/>
+                  <a:pt x="156639" y="38014"/>
+                </a:cubicBezTo>
+                <a:cubicBezTo>
+                  <a:pt x="156639" y="42167"/>
+                  <a:pt x="156639" y="43558"/>
+                  <a:pt x="156639" y="43967"/>
+                </a:cubicBezTo>
+                <a:lnTo>
+                  <a:pt x="159658" y="43967"/>
+                </a:lnTo>
+                <a:cubicBezTo>
+                  <a:pt x="159658" y="43967"/>
+                  <a:pt x="216313" y="44825"/>
+                  <a:pt x="216313" y="85163"/>
+                </a:cubicBezTo>
+                <a:cubicBezTo>
+                  <a:pt x="216313" y="125501"/>
+                  <a:pt x="213112" y="185071"/>
+                  <a:pt x="237449" y="208121"/>
+                </a:cubicBezTo>
+                <a:cubicBezTo>
+                  <a:pt x="261785" y="231172"/>
+                  <a:pt x="257299" y="240773"/>
+                  <a:pt x="257299" y="240773"/>
+                </a:cubicBezTo>
+                <a:close/>
+              </a:path>
+              <a:path w="304800" h="304800">
+                <a:moveTo>
+                  <a:pt x="176327" y="267367"/>
+                </a:moveTo>
+                <a:cubicBezTo>
+                  <a:pt x="176327" y="280559"/>
+                  <a:pt x="165640" y="294827"/>
+                  <a:pt x="152457" y="294827"/>
+                </a:cubicBezTo>
+                <a:cubicBezTo>
+                  <a:pt x="139275" y="294827"/>
+                  <a:pt x="128588" y="280559"/>
+                  <a:pt x="128588" y="267367"/>
+                </a:cubicBezTo>
+                <a:cubicBezTo>
+                  <a:pt x="128588" y="267662"/>
+                  <a:pt x="176327" y="267062"/>
+                  <a:pt x="176327" y="267367"/>
+                </a:cubicBezTo>
+              </a:path>
+            </a:pathLst>
+          </a:custGeom>
+          <a:solidFill>
+            <a:srgbClr val="FFFFFF">
+              <a:alpha val="100000"/>
+            </a:srgbClr>
+          </a:solidFill>
+          <a:ln/>
+        </p:spPr>
+        <p:txBody>
+          <a:bodyPr/>
+          <a:lstStyle/>
+          <a:p>
+            <a:endParaRPr lang="zh-CN" altLang="en-US"/>
+          </a:p>
+        </p:txBody>
+        <p:extLst>
+          <p:ext uri="http://schemas.baidu.com/office/drawing/2023/templateData">
+            <bd:templateData xmlns="" xmlns:bd="http://schemas.baidu.com/office/drawing/2023/templateData">eyJ0YWciOiJub0VkaXQifQ==</bd:templateData>
+          </p:ext>
+        </p:extLst>
+      </p:sp>
+      <p:sp>
+        <p:nvSpPr>
+          <p:cNvPr id="10" name="AutoShape 10"/>
+          <p:cNvSpPr/>
+          <p:nvPr/>
+        </p:nvSpPr>
+        <p:spPr>
+          <a:xfrm>
+            <a:off x="851954" y="5059643"/>
+            <a:ext cx="10477500" cy="1521079"/>
+          </a:xfrm>
+          <a:prstGeom prst="roundRect">
+            <a:avLst>
+              <a:gd name="adj" fmla="val 16667"/>
+            </a:avLst>
+          </a:prstGeom>
+          <a:solidFill>
+            <a:schemeClr val="accent1">
+              <a:alpha val="100000"/>
+            </a:schemeClr>
+          </a:solidFill>
+          <a:ln/>
+        </p:spPr>
+        <p:txBody>
+          <a:bodyPr/>
+          <a:lstStyle/>
+          <a:p>
+            <a:endParaRPr lang="zh-CN" altLang="en-US"/>
+          </a:p>
+        </p:txBody>
+        <p:extLst>
+          <p:ext uri="http://schemas.baidu.com/office/drawing/2023/templateData">
+            <bd:templateData xmlns="" xmlns:bd="http://schemas.baidu.com/office/drawing/2023/templateData">eyJ0YWciOiJub0VkaXQifQ==</bd:templateData>
+          </p:ext>
+        </p:extLst>
+      </p:sp>
+      <p:sp>
+        <p:nvSpPr>
+          <p:cNvPr id="11" name="TextBox 11"/>
+          <p:cNvSpPr txBox="1"/>
+          <p:nvPr/>
+        </p:nvSpPr>
+        <p:spPr>
+          <a:xfrm>
+            <a:off x="1094842" y="5262970"/>
+            <a:ext cx="9952232" cy="1114425"/>
+          </a:xfrm>
+          <a:prstGeom prst="rect">
+            <a:avLst/>
+          </a:prstGeom>
+          <a:ln/>
+        </p:spPr>
+        <p:txBody>
+          <a:bodyPr vert="horz" wrap="square" lIns="114300" tIns="57150" rIns="114300" bIns="57150" rtlCol="0" anchor="ctr" anchorCtr="0">
+            <a:normAutofit/>
+          </a:bodyPr>
+          <a:lstStyle/>
+          <a:p>
+            <a:pPr algn="ctr">
+              <a:lnSpc>
+                <a:spcPct val="140000"/>
+              </a:lnSpc>
+              <a:spcBef>
+                <a:spcPct val="0"/>
+              </a:spcBef>
+            </a:pPr>
+            <a:r>
+              <a:rPr lang="en-US" sz="1425">
+                <a:solidFill>
+                  <a:srgbClr val="FFFFFF">
+                    <a:alpha val="100000"/>
+                  </a:srgbClr>
+                </a:solidFill>
+                <a:latin typeface="Noto Sans SC"/>
+                <a:ea typeface="Noto Sans SC"/>
+                <a:cs typeface="Noto Sans SC"/>
+              </a:rPr>
+              <a:t>不追求一次性摧毁对手 通过持续探索-感知-决策-适应的循环 比对手适应得更快 这是三级任务的核心评审视角</a:t>
+            </a:r>
+          </a:p>
+        </p:txBody>
+        <p:extLst>
+          <p:ext uri="http://schemas.baidu.com/office/drawing/2023/templateData">
+            <bd:templateData xmlns="" xmlns:bd="http://schemas.baidu.com/office/drawing/2023/templateData">eyJfdGVtcGxhdGVEYXRhIjp7ImNvbnRlbnRUeXBlIjoiJHN1bSIsImxpbmVDb3VudCI6IjMiLCJ3b3JkQ291bnQiOiI1MiJ9LCJ0YWciOiIkc3VtIn0=</bd:templateData>
+          </p:ext>
+        </p:extLst>
+      </p:sp>
+      <p:sp>
+        <p:nvSpPr>
+          <p:cNvPr id="12" name="TextBox 12"/>
+          <p:cNvSpPr txBox="1"/>
+          <p:nvPr/>
+        </p:nvSpPr>
+        <p:spPr>
+          <a:xfrm>
+            <a:off x="646786" y="1552223"/>
+            <a:ext cx="2672715" cy="530496"/>
+          </a:xfrm>
+          <a:prstGeom prst="rect">
+            <a:avLst/>
+          </a:prstGeom>
+          <a:ln/>
+        </p:spPr>
+        <p:txBody>
+          <a:bodyPr vert="horz" wrap="square" lIns="114300" tIns="57150" rIns="114300" bIns="57150" rtlCol="0" anchor="ctr" anchorCtr="0">
+            <a:normAutofit/>
+          </a:bodyPr>
+          <a:lstStyle/>
+          <a:p>
+            <a:pPr algn="r">
+              <a:lnSpc>
+                <a:spcPct val="77000"/>
+              </a:lnSpc>
+            </a:pPr>
+            <a:r>
+              <a:rPr lang="en-US" sz="2025" b="1">
+                <a:solidFill>
+                  <a:schemeClr val="accent1">
+                    <a:alpha val="100000"/>
+                  </a:schemeClr>
+                </a:solidFill>
+                <a:latin typeface="Noto Sans SC"/>
+                <a:ea typeface="Noto Sans SC"/>
+                <a:cs typeface="Noto Sans SC"/>
+              </a:rPr>
+              <a:t>行动与感知</a:t>
+            </a:r>
+          </a:p>
+        </p:txBody>
+        <p:extLst>
+          <p:ext uri="http://schemas.baidu.com/office/drawing/2023/templateData">
+            <bd:templateData xmlns="" xmlns:bd="http://schemas.baidu.com/office/drawing/2023/templateData">eyJfdGVtcGxhdGVEYXRhIjp7ImNvbnRlbnRUeXBlIjoiJGl0ZW0xX3RpdGxlIiwibGluZUNvdW50IjoiMSIsIndvcmRDb3VudCI6IjgifSwidGFnIjoiJGl0ZW0xX3RpdGxlIn0=</bd:templateData>
+          </p:ext>
+        </p:extLst>
+      </p:sp>
+      <p:sp>
+        <p:nvSpPr>
+          <p:cNvPr id="13" name="TextBox 13"/>
+          <p:cNvSpPr txBox="1"/>
+          <p:nvPr/>
+        </p:nvSpPr>
+        <p:spPr>
+          <a:xfrm>
+            <a:off x="8866669" y="1552223"/>
+            <a:ext cx="2667000" cy="530496"/>
+          </a:xfrm>
+          <a:prstGeom prst="rect">
+            <a:avLst/>
+          </a:prstGeom>
+          <a:ln/>
+        </p:spPr>
+        <p:txBody>
+          <a:bodyPr vert="horz" wrap="square" lIns="114300" tIns="57150" rIns="114300" bIns="57150" rtlCol="0" anchor="ctr" anchorCtr="0">
+            <a:normAutofit/>
+          </a:bodyPr>
+          <a:lstStyle/>
+          <a:p>
+            <a:pPr algn="l">
+              <a:lnSpc>
+                <a:spcPct val="77000"/>
+              </a:lnSpc>
+            </a:pPr>
+            <a:r>
+              <a:rPr lang="en-US" sz="2025" b="1">
+                <a:solidFill>
+                  <a:schemeClr val="accent1">
+                    <a:alpha val="100000"/>
+                  </a:schemeClr>
+                </a:solidFill>
+                <a:latin typeface="Noto Sans SC"/>
+                <a:ea typeface="Noto Sans SC"/>
+                <a:cs typeface="Noto Sans SC"/>
+              </a:rPr>
+              <a:t>决策与适应</a:t>
+            </a:r>
+          </a:p>
+        </p:txBody>
+        <p:extLst>
+          <p:ext uri="http://schemas.baidu.com/office/drawing/2023/templateData">
+            <bd:templateData xmlns="" xmlns:bd="http://schemas.baidu.com/office/drawing/2023/templateData">eyJfdGVtcGxhdGVEYXRhIjp7ImNvbnRlbnRUeXBlIjoiJGl0ZW0yX3RpdGxlIiwibGluZUNvdW50IjoiMSIsIndvcmRDb3VudCI6IjgifSwidGFnIjoiJGl0ZW0yX3RpdGxlIn0=</bd:templateData>
+          </p:ext>
+        </p:extLst>
+      </p:sp>
+      <p:sp>
+        <p:nvSpPr>
+          <p:cNvPr id="14" name="TextBox 14"/>
+          <p:cNvSpPr txBox="1"/>
+          <p:nvPr/>
+        </p:nvSpPr>
+        <p:spPr>
+          <a:xfrm>
+            <a:off x="3819141" y="2666433"/>
+            <a:ext cx="868680" cy="701040"/>
+          </a:xfrm>
+          <a:prstGeom prst="rect">
+            <a:avLst/>
+          </a:prstGeom>
+          <a:ln/>
+        </p:spPr>
+        <p:txBody>
+          <a:bodyPr vert="horz" wrap="square" lIns="91440" tIns="45720" rIns="91440" bIns="45720" rtlCol="0" anchor="ctr" anchorCtr="0">
+            <a:spAutoFit/>
+          </a:bodyPr>
+          <a:lstStyle/>
+          <a:p>
+            <a:pPr algn="ctr">
+              <a:lnSpc>
+                <a:spcPct val="100000"/>
+              </a:lnSpc>
+              <a:spcBef>
+                <a:spcPts val="375"/>
+              </a:spcBef>
+            </a:pPr>
+            <a:r>
+              <a:rPr lang="en-US" sz="3600" b="1">
+                <a:solidFill>
+                  <a:srgbClr val="FBFBFB">
+                    <a:alpha val="100000"/>
+                  </a:srgbClr>
+                </a:solidFill>
+                <a:latin typeface="Microsoft Yahei"/>
+                <a:ea typeface="Microsoft Yahei"/>
+                <a:cs typeface="Microsoft Yahei"/>
+              </a:rPr>
+              <a:t>01</a:t>
+            </a:r>
+          </a:p>
+        </p:txBody>
+        <p:extLst>
+          <p:ext uri="http://schemas.baidu.com/office/drawing/2023/templateData">
+            <bd:templateData xmlns="" xmlns:bd="http://schemas.baidu.com/office/drawing/2023/templateData">eyJfdGVtcGxhdGVEYXRhIjp7ImxpbmVDb3VudCI6IjEiLCJ3b3JkQ291bnQiOiIxIn0sInRhZyI6Im5vRWRpdCJ9</bd:templateData>
+          </p:ext>
+        </p:extLst>
+      </p:sp>
+      <p:sp>
+        <p:nvSpPr>
+          <p:cNvPr id="15" name="TextBox 15"/>
+          <p:cNvSpPr txBox="1"/>
+          <p:nvPr/>
+        </p:nvSpPr>
+        <p:spPr>
+          <a:xfrm>
+            <a:off x="7473509" y="2666433"/>
+            <a:ext cx="868680" cy="701040"/>
+          </a:xfrm>
+          <a:prstGeom prst="rect">
+            <a:avLst/>
+          </a:prstGeom>
+          <a:ln/>
+        </p:spPr>
+        <p:txBody>
+          <a:bodyPr vert="horz" wrap="square" lIns="91440" tIns="45720" rIns="91440" bIns="45720" rtlCol="0" anchor="ctr" anchorCtr="0">
+            <a:spAutoFit/>
+          </a:bodyPr>
+          <a:lstStyle/>
+          <a:p>
+            <a:pPr algn="ctr">
+              <a:lnSpc>
+                <a:spcPct val="100000"/>
+              </a:lnSpc>
+              <a:spcBef>
+                <a:spcPts val="375"/>
+              </a:spcBef>
+            </a:pPr>
+            <a:r>
+              <a:rPr lang="en-US" sz="3600" b="1">
+                <a:solidFill>
+                  <a:srgbClr val="FBFBFB">
+                    <a:alpha val="100000"/>
+                  </a:srgbClr>
+                </a:solidFill>
+                <a:latin typeface="Microsoft Yahei"/>
+                <a:ea typeface="Microsoft Yahei"/>
+                <a:cs typeface="Microsoft Yahei"/>
+              </a:rPr>
+              <a:t>02</a:t>
+            </a:r>
+          </a:p>
+        </p:txBody>
+        <p:extLst>
+          <p:ext uri="http://schemas.baidu.com/office/drawing/2023/templateData">
+            <bd:templateData xmlns="" xmlns:bd="http://schemas.baidu.com/office/drawing/2023/templateData">eyJfdGVtcGxhdGVEYXRhIjp7ImxpbmVDb3VudCI6IjEiLCJ3b3JkQ291bnQiOiIxIn0sInRhZyI6Im5vRWRpdCJ9</bd:templateData>
+          </p:ext>
+        </p:extLst>
+      </p:sp>
+      <p:sp>
+        <p:nvSpPr>
+          <p:cNvPr id="16" name="TextBox 16"/>
+          <p:cNvSpPr txBox="1"/>
+          <p:nvPr/>
+        </p:nvSpPr>
+        <p:spPr>
+          <a:xfrm>
+            <a:off x="476023" y="265328"/>
+            <a:ext cx="11239500" cy="914400"/>
+          </a:xfrm>
+          <a:prstGeom prst="rect">
+            <a:avLst/>
+          </a:prstGeom>
+          <a:ln/>
+        </p:spPr>
+        <p:txBody>
+          <a:bodyPr vert="horz" wrap="square" lIns="123825" tIns="123825" rIns="57150" bIns="123825" rtlCol="0" anchor="ctr" anchorCtr="0">
+            <a:noAutofit/>
+          </a:bodyPr>
+          <a:lstStyle/>
+          <a:p>
+            <a:pPr>
+              <a:lnSpc>
+                <a:spcPct val="140000"/>
+              </a:lnSpc>
+            </a:pPr>
+            <a:r>
+              <a:rPr lang="en-US" sz="3000" b="1">
+                <a:solidFill>
+                  <a:schemeClr val="dk2">
+                    <a:alpha val="100000"/>
+                  </a:schemeClr>
+                </a:solidFill>
+                <a:latin typeface="Noto Sans SC"/>
+                <a:ea typeface="Noto Sans SC"/>
+                <a:cs typeface="Noto Sans SC"/>
+              </a:rPr>
+              <a:t>ASDA闭环驱动仿真</a:t>
+            </a:r>
+          </a:p>
+        </p:txBody>
+        <p:extLst>
+          <p:ext uri="http://schemas.baidu.com/office/drawing/2023/templateData">
+            <bd:templateData xmlns="" xmlns:bd="http://schemas.baidu.com/office/drawing/2023/templateData">eyJfdGVtcGxhdGVEYXRhIjp7ImNvbnRlbnRUeXBlIjoiJHRpdGxlIiwibGluZUNvdW50IjoiMSIsIndvcmRDb3VudCI6IjI4In0sInRhZyI6IiR0aXRsZSJ9</bd:templateData>
+          </p:ext>
+        </p:extLst>
+      </p:sp>
+    </p:spTree>
+  </p:cSld>
+  <p:clrMapOvr>
+    <a:masterClrMapping/>
+  </p:clrMapOvr>
+  <p:extLst>
+    <p:ext uri="http://schemas.baidu.com/office/drawing/2023/templateData">
+      <bd:templateData xmlns="" xmlns:bd="http://schemas.baidu.com/office/drawing/2023/templateData">eyJtZCI6IiMjIOivt+i+k+WFpeacrOmhteagh+mimFxuIyMjIOivt+i+k+WFpeagh+mimFxu6K+35Zyo5q2k5aSE6L6T5YWl5oKo55qE5q2j5paH5YaF5a6544CC5paH5a2X5Luj6KGo5oKo55qE5Li76aKY5oCd5oOz77yM6K+35Yqb5rGC566A5piO5Zyw6KGo6L6+5oKo55qE6KeC54K544CC5Y+v6YCC5bqm5Yig5YeP5paH5a2X5Lul56Gu5L+d5L+h5oGv55qE5riF5pmw5ZKM57K+56Gu5Lyg6L6+77yM5ZCM5pe25Lmf6KaB5YWz5rOo5paH5a2X55qE6YC76L6R5oCn5ZKM5p2h55CG5oCn77yM5Lul5Yqp5LqOXG4jIyMg6K+36L6T5YWl5qCH6aKYXG7or7flnKjmraTlpITovpPlhaXmgqjnmoTmraPmloflhoXlrrnjgILmloflrZfku6PooajmgqjnmoTkuLvpopjmgJ3mg7PvvIzor7flipvmsYLnroDmmI7lnLDooajovr7mgqjnmoTop4LngrnjgILlj6/pgILluqbliKDlh4/mloflrZfku6Xnoa7kv53kv6Hmga/nmoTmuIXmmbDlkoznsr7noa7kvKDovr7vvIzlkIzml7bkuZ/opoHlhbPms6jmloflrZfnmoTpgLvovpHmgKflkozmnaHnkIbmgKfvvIzku6Xliqnkuo4iLCJ0cGxpZCI6IjY5IiwidHBsTmFtZSI6Imxpc3RTdW0yXzIzMTEyMTkiLCJlZGl0ZWQiOiJmYWxzZSJ9</bd:templateData>
+    </p:ext>
+  </p:extLst>
+</p:sld>
+</file>
+
+<file path=ppt/slides/slide11.xml><?xml version="1.0" encoding="utf-8"?>
+<p:sld xmlns:a="http://schemas.openxmlformats.org/drawingml/2006/main" xmlns:r="http://schemas.openxmlformats.org/officeDocument/2006/relationships" xmlns:p="http://schemas.openxmlformats.org/presentationml/2006/main">
+  <p:cSld>
+    <p:bg>
+      <p:bgPr>
+        <a:blipFill dpi="0" rotWithShape="1">
+          <a:blip r:embed="rId2">
+            <a:alphaModFix/>
+          </a:blip>
+          <a:srcRect/>
+          <a:stretch>
+            <a:fillRect/>
+          </a:stretch>
+        </a:blipFill>
+        <a:effectLst/>
+      </p:bgPr>
+    </p:bg>
+    <p:spTree>
+      <p:nvGrpSpPr>
+        <p:cNvPr id="1" name=""/>
+        <p:cNvGrpSpPr/>
+        <p:nvPr/>
+      </p:nvGrpSpPr>
+      <p:grpSpPr>
+        <a:xfrm>
+          <a:off x="0" y="0"/>
+          <a:ext cx="0" cy="0"/>
+          <a:chOff x="0" y="0"/>
+          <a:chExt cx="0" cy="0"/>
+        </a:xfrm>
+      </p:grpSpPr>
+      <p:sp>
+        <p:nvSpPr>
           <p:cNvPr id="2" name="Freeform 2"/>
           <p:cNvSpPr/>
           <p:nvPr/>
@@ -5146,7 +5934,7 @@
 </p:sld>
 </file>
 
-<file path=ppt/slides/slide11.xml><?xml version="1.0" encoding="utf-8"?>
+<file path=ppt/slides/slide12.xml><?xml version="1.0" encoding="utf-8"?>
 <p:sld xmlns:a="http://schemas.openxmlformats.org/drawingml/2006/main" xmlns:r="http://schemas.openxmlformats.org/officeDocument/2006/relationships" xmlns:p="http://schemas.openxmlformats.org/presentationml/2006/main">
   <p:cSld>
     <p:bg>
@@ -5954,7 +6742,7 @@
 </p:sld>
 </file>
 
-<file path=ppt/slides/slide12.xml><?xml version="1.0" encoding="utf-8"?>
+<file path=ppt/slides/slide13.xml><?xml version="1.0" encoding="utf-8"?>
 <p:sld xmlns:a="http://schemas.openxmlformats.org/drawingml/2006/main" xmlns:r="http://schemas.openxmlformats.org/officeDocument/2006/relationships" xmlns:p="http://schemas.openxmlformats.org/presentationml/2006/main">
   <p:cSld>
     <p:bg>
@@ -7725,7 +8513,7 @@
 </p:sld>
 </file>
 
-<file path=ppt/slides/slide13.xml><?xml version="1.0" encoding="utf-8"?>
+<file path=ppt/slides/slide14.xml><?xml version="1.0" encoding="utf-8"?>
 <p:sld xmlns:a="http://schemas.openxmlformats.org/drawingml/2006/main" xmlns:p="http://schemas.openxmlformats.org/presentationml/2006/main" xmlns:r="http://schemas.openxmlformats.org/officeDocument/2006/relationships">
   <p:cSld>
     <p:bg>
@@ -8702,7 +9490,7 @@
 </p:sld>
 </file>
 
-<file path=ppt/slides/slide14.xml><?xml version="1.0" encoding="utf-8"?>
+<file path=ppt/slides/slide15.xml><?xml version="1.0" encoding="utf-8"?>
 <p:sld xmlns:a="http://schemas.openxmlformats.org/drawingml/2006/main" xmlns:r="http://schemas.openxmlformats.org/officeDocument/2006/relationships" xmlns:p="http://schemas.openxmlformats.org/presentationml/2006/main">
   <p:cSld>
     <p:bg>
@@ -8842,7 +9630,7 @@
 </p:sld>
 </file>
 
-<file path=ppt/slides/slide15.xml><?xml version="1.0" encoding="utf-8"?>
+<file path=ppt/slides/slide16.xml><?xml version="1.0" encoding="utf-8"?>
 <p:sld xmlns:a="http://schemas.openxmlformats.org/drawingml/2006/main" xmlns:p="http://schemas.openxmlformats.org/presentationml/2006/main" xmlns:r="http://schemas.openxmlformats.org/officeDocument/2006/relationships">
   <p:cSld>
     <p:spTree>
@@ -8854,24 +9642,97 @@
       <p:grpSpPr/>
       <p:sp>
         <p:nvSpPr>
-          <p:cNvPr id="2" name="Rectangle 1"/>
-          <p:cNvSpPr/>
-          <p:nvPr/>
-        </p:nvSpPr>
-        <p:spPr>
-          <a:xfrm>
-            <a:off x="0" y="0"/>
-            <a:ext cx="12192000" cy="6858000"/>
+          <p:cNvPr id="2" name="TextBox 1"/>
+          <p:cNvSpPr txBox="1"/>
+          <p:nvPr/>
+        </p:nvSpPr>
+        <p:spPr>
+          <a:xfrm>
+            <a:off x="502920" y="292608"/>
+            <a:ext cx="11155680" cy="685800"/>
           </a:xfrm>
           <a:prstGeom prst="rect">
             <a:avLst/>
           </a:prstGeom>
+          <a:noFill/>
+        </p:spPr>
+        <p:txBody>
+          <a:bodyPr wrap="square" lIns="25400" rIns="25400" tIns="25400" bIns="25400">
+            <a:spAutoFit/>
+          </a:bodyPr>
+          <a:lstStyle/>
+          <a:p>
+            <a:pPr algn="l"/>
+            <a:r>
+              <a:rPr sz="2900" b="1">
+                <a:solidFill>
+                  <a:srgbClr val="1E2761"/>
+                </a:solidFill>
+                <a:latin typeface="Microsoft YaHei"/>
+              </a:rPr>
+              <a:t>权威数据升级（P9-P11）：22 → 67 实体 · 政治准入 · 指挥链</a:t>
+            </a:r>
+          </a:p>
+        </p:txBody>
+      </p:sp>
+      <p:sp>
+        <p:nvSpPr>
+          <p:cNvPr id="3" name="TextBox 2"/>
+          <p:cNvSpPr txBox="1"/>
+          <p:nvPr/>
+        </p:nvSpPr>
+        <p:spPr>
+          <a:xfrm>
+            <a:off x="521207" y="932688"/>
+            <a:ext cx="11155680" cy="365760"/>
+          </a:xfrm>
+          <a:prstGeom prst="rect">
+            <a:avLst/>
+          </a:prstGeom>
+          <a:noFill/>
+        </p:spPr>
+        <p:txBody>
+          <a:bodyPr wrap="square" lIns="25400" rIns="25400" tIns="25400" bIns="25400">
+            <a:spAutoFit/>
+          </a:bodyPr>
+          <a:lstStyle/>
+          <a:p>
+            <a:pPr algn="l"/>
+            <a:r>
+              <a:rPr sz="1300" b="0">
+                <a:solidFill>
+                  <a:srgbClr val="57606A"/>
+                </a:solidFill>
+                <a:latin typeface="Microsoft YaHei"/>
+              </a:rPr>
+              <a:t>全部基地数据可溯源至权威公开报告 —— 「每一颗坐标都有出处」</a:t>
+            </a:r>
+          </a:p>
+        </p:txBody>
+      </p:sp>
+      <p:sp>
+        <p:nvSpPr>
+          <p:cNvPr id="4" name="Rounded Rectangle 3"/>
+          <p:cNvSpPr/>
+          <p:nvPr/>
+        </p:nvSpPr>
+        <p:spPr>
+          <a:xfrm>
+            <a:off x="502920" y="1417320"/>
+            <a:ext cx="2697480" cy="1234440"/>
+          </a:xfrm>
+          <a:prstGeom prst="roundRect">
+            <a:avLst/>
+          </a:prstGeom>
           <a:solidFill>
-            <a:srgbClr val="FFFFFF"/>
+            <a:srgbClr val="F2F6FA"/>
           </a:solidFill>
-          <a:ln>
-            <a:noFill/>
+          <a:ln w="12700">
+            <a:solidFill>
+              <a:srgbClr val="C9D6E4"/>
+            </a:solidFill>
           </a:ln>
+          <a:effectLst/>
         </p:spPr>
         <p:style>
           <a:lnRef idx="1">
@@ -8888,33 +9749,58 @@
           </a:fontRef>
         </p:style>
         <p:txBody>
-          <a:bodyPr rtlCol="0" anchor="ctr"/>
-          <a:lstStyle/>
-          <a:p>
-            <a:pPr algn="ctr"/>
-          </a:p>
-        </p:txBody>
-      </p:sp>
-      <p:sp>
-        <p:nvSpPr>
-          <p:cNvPr id="3" name="Rectangle 2"/>
+          <a:bodyPr rtlCol="0" anchor="t" wrap="square" lIns="127000" rIns="127000" tIns="76200" bIns="76200"/>
+          <a:lstStyle/>
+          <a:p>
+            <a:pPr algn="l"/>
+            <a:r>
+              <a:rPr sz="1500" b="1">
+                <a:solidFill>
+                  <a:srgbClr val="0969DA"/>
+                </a:solidFill>
+                <a:latin typeface="Microsoft YaHei"/>
+              </a:rPr>
+              <a:t>CRS R47589</a:t>
+            </a:r>
+          </a:p>
+          <a:p>
+            <a:pPr algn="l"/>
+            <a:r>
+              <a:rPr sz="1100" b="0">
+                <a:solidFill>
+                  <a:srgbClr val="1F2328"/>
+                </a:solidFill>
+                <a:latin typeface="Microsoft YaHei"/>
+              </a:rPr>
+              <a:t>Table A-1 全量 66 站点清单
++ Tinian 特殊保留 = 67 实体</a:t>
+            </a:r>
+          </a:p>
+        </p:txBody>
+      </p:sp>
+      <p:sp>
+        <p:nvSpPr>
+          <p:cNvPr id="5" name="Rounded Rectangle 4"/>
           <p:cNvSpPr/>
           <p:nvPr/>
         </p:nvSpPr>
         <p:spPr>
           <a:xfrm>
-            <a:off x="0" y="0"/>
-            <a:ext cx="4500000" cy="6858000"/>
-          </a:xfrm>
-          <a:prstGeom prst="rect">
+            <a:off x="3364991" y="1417320"/>
+            <a:ext cx="2697480" cy="1234440"/>
+          </a:xfrm>
+          <a:prstGeom prst="roundRect">
             <a:avLst/>
           </a:prstGeom>
           <a:solidFill>
-            <a:srgbClr val="1F3A5F"/>
+            <a:srgbClr val="F2F6FA"/>
           </a:solidFill>
-          <a:ln>
-            <a:noFill/>
+          <a:ln w="12700">
+            <a:solidFill>
+              <a:srgbClr val="C9D6E4"/>
+            </a:solidFill>
           </a:ln>
+          <a:effectLst/>
         </p:spPr>
         <p:style>
           <a:lnRef idx="1">
@@ -8931,47 +9817,388 @@
           </a:fontRef>
         </p:style>
         <p:txBody>
-          <a:bodyPr rtlCol="0" anchor="ctr"/>
-          <a:lstStyle/>
-          <a:p>
-            <a:pPr algn="ctr"/>
-          </a:p>
-        </p:txBody>
-      </p:sp>
-      <p:pic>
-        <p:nvPicPr>
-          <p:cNvPr id="4" name="Picture 3" descr="profile_photo.jpg"/>
-          <p:cNvPicPr>
-            <a:picLocks noChangeAspect="1"/>
-          </p:cNvPicPr>
-          <p:nvPr/>
-        </p:nvPicPr>
-        <p:blipFill>
-          <a:blip r:embed="rId2"/>
-          <a:stretch>
-            <a:fillRect/>
-          </a:stretch>
-        </p:blipFill>
-        <p:spPr>
-          <a:xfrm>
-            <a:off x="990000" y="1260000"/>
-            <a:ext cx="2520000" cy="3780000"/>
-          </a:xfrm>
-          <a:prstGeom prst="rect">
+          <a:bodyPr rtlCol="0" anchor="t" wrap="square" lIns="127000" rIns="127000" tIns="76200" bIns="76200"/>
+          <a:lstStyle/>
+          <a:p>
+            <a:pPr algn="l"/>
+            <a:r>
+              <a:rPr sz="1500" b="1">
+                <a:solidFill>
+                  <a:srgbClr val="0969DA"/>
+                </a:solidFill>
+                <a:latin typeface="Microsoft YaHei"/>
+              </a:rPr>
+              <a:t>DoD FY2024 BSR</a:t>
+            </a:r>
+          </a:p>
+          <a:p>
+            <a:pPr algn="l"/>
+            <a:r>
+              <a:rPr sz="1100" b="0">
+                <a:solidFill>
+                  <a:srgbClr val="1F2328"/>
+                </a:solidFill>
+                <a:latin typeface="Microsoft YaHei"/>
+              </a:rPr>
+              <a:t>PRV 2.23 万亿 · 四分位分级
+建筑/土地权威数据</a:t>
+            </a:r>
+          </a:p>
+        </p:txBody>
+      </p:sp>
+      <p:sp>
+        <p:nvSpPr>
+          <p:cNvPr id="6" name="Rounded Rectangle 5"/>
+          <p:cNvSpPr/>
+          <p:nvPr/>
+        </p:nvSpPr>
+        <p:spPr>
+          <a:xfrm>
+            <a:off x="6227064" y="1417320"/>
+            <a:ext cx="2697480" cy="1234440"/>
+          </a:xfrm>
+          <a:prstGeom prst="roundRect">
             <a:avLst/>
           </a:prstGeom>
-        </p:spPr>
-      </p:pic>
-      <p:sp>
-        <p:nvSpPr>
-          <p:cNvPr id="5" name="TextBox 4"/>
+          <a:solidFill>
+            <a:srgbClr val="F2F6FA"/>
+          </a:solidFill>
+          <a:ln w="12700">
+            <a:solidFill>
+              <a:srgbClr val="C9D6E4"/>
+            </a:solidFill>
+          </a:ln>
+          <a:effectLst/>
+        </p:spPr>
+        <p:style>
+          <a:lnRef idx="1">
+            <a:schemeClr val="accent1"/>
+          </a:lnRef>
+          <a:fillRef idx="3">
+            <a:schemeClr val="accent1"/>
+          </a:fillRef>
+          <a:effectRef idx="2">
+            <a:schemeClr val="accent1"/>
+          </a:effectRef>
+          <a:fontRef idx="minor">
+            <a:schemeClr val="lt1"/>
+          </a:fontRef>
+        </p:style>
+        <p:txBody>
+          <a:bodyPr rtlCol="0" anchor="t" wrap="square" lIns="127000" rIns="127000" tIns="76200" bIns="76200"/>
+          <a:lstStyle/>
+          <a:p>
+            <a:pPr algn="l"/>
+            <a:r>
+              <a:rPr sz="1500" b="1">
+                <a:solidFill>
+                  <a:srgbClr val="0969DA"/>
+                </a:solidFill>
+                <a:latin typeface="Microsoft YaHei"/>
+              </a:rPr>
+              <a:t>RAND RRA967-2</a:t>
+            </a:r>
+          </a:p>
+          <a:p>
+            <a:pPr algn="l"/>
+            <a:r>
+              <a:rPr sz="1100" b="0">
+                <a:solidFill>
+                  <a:srgbClr val="1F2328"/>
+                </a:solidFill>
+                <a:latin typeface="Microsoft YaHei"/>
+              </a:rPr>
+              <a:t>盟友政治意愿不确定性
+准入建模为随机变量</a:t>
+            </a:r>
+          </a:p>
+        </p:txBody>
+      </p:sp>
+      <p:sp>
+        <p:nvSpPr>
+          <p:cNvPr id="7" name="Rounded Rectangle 6"/>
+          <p:cNvSpPr/>
+          <p:nvPr/>
+        </p:nvSpPr>
+        <p:spPr>
+          <a:xfrm>
+            <a:off x="9089136" y="1417320"/>
+            <a:ext cx="2697480" cy="1234440"/>
+          </a:xfrm>
+          <a:prstGeom prst="roundRect">
+            <a:avLst/>
+          </a:prstGeom>
+          <a:solidFill>
+            <a:srgbClr val="F2F6FA"/>
+          </a:solidFill>
+          <a:ln w="12700">
+            <a:solidFill>
+              <a:srgbClr val="C9D6E4"/>
+            </a:solidFill>
+          </a:ln>
+          <a:effectLst/>
+        </p:spPr>
+        <p:style>
+          <a:lnRef idx="1">
+            <a:schemeClr val="accent1"/>
+          </a:lnRef>
+          <a:fillRef idx="3">
+            <a:schemeClr val="accent1"/>
+          </a:fillRef>
+          <a:effectRef idx="2">
+            <a:schemeClr val="accent1"/>
+          </a:effectRef>
+          <a:fontRef idx="minor">
+            <a:schemeClr val="lt1"/>
+          </a:fontRef>
+        </p:style>
+        <p:txBody>
+          <a:bodyPr rtlCol="0" anchor="t" wrap="square" lIns="127000" rIns="127000" tIns="76200" bIns="76200"/>
+          <a:lstStyle/>
+          <a:p>
+            <a:pPr algn="l"/>
+            <a:r>
+              <a:rPr sz="1500" b="1">
+                <a:solidFill>
+                  <a:srgbClr val="0969DA"/>
+                </a:solidFill>
+                <a:latin typeface="Microsoft YaHei"/>
+              </a:rPr>
+              <a:t>CRS IF12175</a:t>
+            </a:r>
+          </a:p>
+          <a:p>
+            <a:pPr algn="l"/>
+            <a:r>
+              <a:rPr sz="1100" b="0">
+                <a:solidFill>
+                  <a:srgbClr val="1F2328"/>
+                </a:solidFill>
+                <a:latin typeface="Microsoft YaHei"/>
+              </a:rPr>
+              <a:t>INDOPACOM 架构
+5 军种组成 + 3 下属联合</a:t>
+            </a:r>
+          </a:p>
+        </p:txBody>
+      </p:sp>
+      <p:sp>
+        <p:nvSpPr>
+          <p:cNvPr id="8" name="Rounded Rectangle 7"/>
+          <p:cNvSpPr/>
+          <p:nvPr/>
+        </p:nvSpPr>
+        <p:spPr>
+          <a:xfrm>
+            <a:off x="502920" y="2971800"/>
+            <a:ext cx="3657600" cy="1737360"/>
+          </a:xfrm>
+          <a:prstGeom prst="roundRect">
+            <a:avLst/>
+          </a:prstGeom>
+          <a:solidFill>
+            <a:srgbClr val="FFFFFF"/>
+          </a:solidFill>
+          <a:ln w="12700">
+            <a:solidFill>
+              <a:srgbClr val="C9D6E4"/>
+            </a:solidFill>
+          </a:ln>
+          <a:effectLst/>
+        </p:spPr>
+        <p:style>
+          <a:lnRef idx="1">
+            <a:schemeClr val="accent1"/>
+          </a:lnRef>
+          <a:fillRef idx="3">
+            <a:schemeClr val="accent1"/>
+          </a:fillRef>
+          <a:effectRef idx="2">
+            <a:schemeClr val="accent1"/>
+          </a:effectRef>
+          <a:fontRef idx="minor">
+            <a:schemeClr val="lt1"/>
+          </a:fontRef>
+        </p:style>
+        <p:txBody>
+          <a:bodyPr rtlCol="0" anchor="t" wrap="square" lIns="127000" rIns="127000" tIns="76200" bIns="76200"/>
+          <a:lstStyle/>
+          <a:p>
+            <a:pPr algn="l"/>
+            <a:r>
+              <a:rPr sz="1500" b="1">
+                <a:solidFill>
+                  <a:srgbClr val="1E2761"/>
+                </a:solidFill>
+                <a:latin typeface="Microsoft YaHei"/>
+              </a:rPr>
+              <a:t>第一级 · 基地标绘</a:t>
+            </a:r>
+          </a:p>
+          <a:p>
+            <a:pPr algn="l"/>
+            <a:r>
+              <a:rPr sz="1200" b="0">
+                <a:solidFill>
+                  <a:srgbClr val="1F2328"/>
+                </a:solidFill>
+                <a:latin typeface="Microsoft YaHei"/>
+              </a:rPr>
+              <a:t>67 实体 / 33 字段档案
+Tier 四级分层 · QGIS + Leaflet 重生成
+总索引可溯源 CRS 编号</a:t>
+            </a:r>
+          </a:p>
+        </p:txBody>
+      </p:sp>
+      <p:sp>
+        <p:nvSpPr>
+          <p:cNvPr id="9" name="Rounded Rectangle 8"/>
+          <p:cNvSpPr/>
+          <p:nvPr/>
+        </p:nvSpPr>
+        <p:spPr>
+          <a:xfrm>
+            <a:off x="4325112" y="2971800"/>
+            <a:ext cx="3657600" cy="1737360"/>
+          </a:xfrm>
+          <a:prstGeom prst="roundRect">
+            <a:avLst/>
+          </a:prstGeom>
+          <a:solidFill>
+            <a:srgbClr val="FFFFFF"/>
+          </a:solidFill>
+          <a:ln w="12700">
+            <a:solidFill>
+              <a:srgbClr val="C9D6E4"/>
+            </a:solidFill>
+          </a:ln>
+          <a:effectLst/>
+        </p:spPr>
+        <p:style>
+          <a:lnRef idx="1">
+            <a:schemeClr val="accent1"/>
+          </a:lnRef>
+          <a:fillRef idx="3">
+            <a:schemeClr val="accent1"/>
+          </a:fillRef>
+          <a:effectRef idx="2">
+            <a:schemeClr val="accent1"/>
+          </a:effectRef>
+          <a:fontRef idx="minor">
+            <a:schemeClr val="lt1"/>
+          </a:fontRef>
+        </p:style>
+        <p:txBody>
+          <a:bodyPr rtlCol="0" anchor="t" wrap="square" lIns="127000" rIns="127000" tIns="76200" bIns="76200"/>
+          <a:lstStyle/>
+          <a:p>
+            <a:pPr algn="l"/>
+            <a:r>
+              <a:rPr sz="1500" b="1">
+                <a:solidFill>
+                  <a:srgbClr val="1E2761"/>
+                </a:solidFill>
+                <a:latin typeface="Microsoft YaHei"/>
+              </a:rPr>
+              <a:t>第二级 · ACE 引擎</a:t>
+            </a:r>
+          </a:p>
+          <a:p>
+            <a:pPr algn="l"/>
+            <a:r>
+              <a:rPr sz="1200" b="0">
+                <a:solidFill>
+                  <a:srgbClr val="1F2328"/>
+                </a:solidFill>
+                <a:latin typeface="Microsoft YaHei"/>
+              </a:rPr>
+              <a:t>部署优化器排除 DENIED 站点
+Pareto 新增「政治风险敞口」目标
+转移规划过滤政治不可用基地</a:t>
+            </a:r>
+          </a:p>
+        </p:txBody>
+      </p:sp>
+      <p:sp>
+        <p:nvSpPr>
+          <p:cNvPr id="10" name="Rounded Rectangle 9"/>
+          <p:cNvSpPr/>
+          <p:nvPr/>
+        </p:nvSpPr>
+        <p:spPr>
+          <a:xfrm>
+            <a:off x="8147304" y="2971800"/>
+            <a:ext cx="3657600" cy="1737360"/>
+          </a:xfrm>
+          <a:prstGeom prst="roundRect">
+            <a:avLst/>
+          </a:prstGeom>
+          <a:solidFill>
+            <a:srgbClr val="FFFFFF"/>
+          </a:solidFill>
+          <a:ln w="12700">
+            <a:solidFill>
+              <a:srgbClr val="C9D6E4"/>
+            </a:solidFill>
+          </a:ln>
+          <a:effectLst/>
+        </p:spPr>
+        <p:style>
+          <a:lnRef idx="1">
+            <a:schemeClr val="accent1"/>
+          </a:lnRef>
+          <a:fillRef idx="3">
+            <a:schemeClr val="accent1"/>
+          </a:fillRef>
+          <a:effectRef idx="2">
+            <a:schemeClr val="accent1"/>
+          </a:effectRef>
+          <a:fontRef idx="minor">
+            <a:schemeClr val="lt1"/>
+          </a:fontRef>
+        </p:style>
+        <p:txBody>
+          <a:bodyPr rtlCol="0" anchor="t" wrap="square" lIns="127000" rIns="127000" tIns="76200" bIns="76200"/>
+          <a:lstStyle/>
+          <a:p>
+            <a:pPr algn="l"/>
+            <a:r>
+              <a:rPr sz="1500" b="1">
+                <a:solidFill>
+                  <a:srgbClr val="1E2761"/>
+                </a:solidFill>
+                <a:latin typeface="Microsoft YaHei"/>
+              </a:rPr>
+              <a:t>第三级 · PMTEC 系统</a:t>
+            </a:r>
+          </a:p>
+          <a:p>
+            <a:pPr algn="l"/>
+            <a:r>
+              <a:rPr sz="1200" b="0">
+                <a:solidFill>
+                  <a:srgbClr val="1F2328"/>
+                </a:solidFill>
+                <a:latin typeface="Microsoft YaHei"/>
+              </a:rPr>
+              <a:t>指挥链 5+3 司令部建模
+RBAC 军种扩展 + JWT branch claim
+灰色地带事件驱动准入演化</a:t>
+            </a:r>
+          </a:p>
+        </p:txBody>
+      </p:sp>
+      <p:sp>
+        <p:nvSpPr>
+          <p:cNvPr id="11" name="TextBox 10"/>
           <p:cNvSpPr txBox="1"/>
           <p:nvPr/>
         </p:nvSpPr>
         <p:spPr>
           <a:xfrm>
-            <a:off x="540000" y="5328000"/>
-            <a:ext cx="3420000" cy="432000"/>
+            <a:off x="502920" y="4983480"/>
+            <a:ext cx="11155680" cy="822960"/>
           </a:xfrm>
           <a:prstGeom prst="rect">
             <a:avLst/>
@@ -8979,34 +10206,64 @@
           <a:noFill/>
         </p:spPr>
         <p:txBody>
-          <a:bodyPr wrap="square">
+          <a:bodyPr wrap="square" lIns="25400" rIns="25400" tIns="25400" bIns="25400">
             <a:spAutoFit/>
           </a:bodyPr>
           <a:lstStyle/>
           <a:p>
-            <a:pPr algn="ctr"/>
+            <a:pPr algn="l"/>
             <a:r>
-              <a:rPr sz="2800" b="1">
+              <a:rPr sz="1300" b="0">
                 <a:solidFill>
-                  <a:srgbClr val="FFFFFF"/>
+                  <a:srgbClr val="B0770B"/>
                 </a:solidFill>
                 <a:latin typeface="Microsoft YaHei"/>
               </a:rPr>
-              <a:t>冯亦根</a:t>
+              <a:t>政治准入三态状态机：Full（全面准入）/ Restricted（有限准入，容量折损）/ Denied（准入被拒）</a:t>
             </a:r>
           </a:p>
-        </p:txBody>
-      </p:sp>
-      <p:sp>
-        <p:nvSpPr>
-          <p:cNvPr id="6" name="TextBox 5"/>
+          <a:p>
+            <a:pPr algn="l"/>
+            <a:r>
+              <a:rPr sz="1300" b="0">
+                <a:solidFill>
+                  <a:srgbClr val="B0770B"/>
+                </a:solidFill>
+                <a:latin typeface="Microsoft YaHei"/>
+              </a:rPr>
+              <a:t>四类政治事件驱动演化：灰色地带 · 冲突升级 · 主权打击 · 再保证外交</a:t>
+            </a:r>
+          </a:p>
+        </p:txBody>
+      </p:sp>
+    </p:spTree>
+  </p:cSld>
+  <p:clrMapOvr>
+    <a:masterClrMapping/>
+  </p:clrMapOvr>
+</p:sld>
+</file>
+
+<file path=ppt/slides/slide17.xml><?xml version="1.0" encoding="utf-8"?>
+<p:sld xmlns:a="http://schemas.openxmlformats.org/drawingml/2006/main" xmlns:p="http://schemas.openxmlformats.org/presentationml/2006/main" xmlns:r="http://schemas.openxmlformats.org/officeDocument/2006/relationships">
+  <p:cSld>
+    <p:spTree>
+      <p:nvGrpSpPr>
+        <p:cNvPr id="1" name=""/>
+        <p:cNvGrpSpPr/>
+        <p:nvPr/>
+      </p:nvGrpSpPr>
+      <p:grpSpPr/>
+      <p:sp>
+        <p:nvSpPr>
+          <p:cNvPr id="2" name="TextBox 1"/>
           <p:cNvSpPr txBox="1"/>
           <p:nvPr/>
         </p:nvSpPr>
         <p:spPr>
           <a:xfrm>
-            <a:off x="360000" y="144000"/>
-            <a:ext cx="3780000" cy="360000"/>
+            <a:off x="502920" y="292608"/>
+            <a:ext cx="11155680" cy="685800"/>
           </a:xfrm>
           <a:prstGeom prst="rect">
             <a:avLst/>
@@ -9014,34 +10271,34 @@
           <a:noFill/>
         </p:spPr>
         <p:txBody>
-          <a:bodyPr wrap="none">
+          <a:bodyPr wrap="square" lIns="25400" rIns="25400" tIns="25400" bIns="25400">
             <a:spAutoFit/>
           </a:bodyPr>
           <a:lstStyle/>
           <a:p>
-            <a:pPr algn="ctr"/>
+            <a:pPr algn="l"/>
             <a:r>
-              <a:rPr sz="2600" b="1">
+              <a:rPr sz="2900" b="1">
                 <a:solidFill>
-                  <a:srgbClr val="FFFFFF"/>
+                  <a:srgbClr val="1E2761"/>
                 </a:solidFill>
                 <a:latin typeface="Microsoft YaHei"/>
               </a:rPr>
-              <a:t>个人简介</a:t>
+              <a:t>P12 系统升级：219 维政治观测 · 实时态势 · 服务契约</a:t>
             </a:r>
           </a:p>
         </p:txBody>
       </p:sp>
       <p:sp>
         <p:nvSpPr>
-          <p:cNvPr id="7" name="TextBox 6"/>
+          <p:cNvPr id="3" name="TextBox 2"/>
           <p:cNvSpPr txBox="1"/>
           <p:nvPr/>
         </p:nvSpPr>
         <p:spPr>
           <a:xfrm>
-            <a:off x="4860000" y="288000"/>
-            <a:ext cx="7020000" cy="6300000"/>
+            <a:off x="521207" y="932688"/>
+            <a:ext cx="11155680" cy="365760"/>
           </a:xfrm>
           <a:prstGeom prst="rect">
             <a:avLst/>
@@ -9049,362 +10306,1036 @@
           <a:noFill/>
         </p:spPr>
         <p:txBody>
-          <a:bodyPr wrap="square">
+          <a:bodyPr wrap="square" lIns="25400" rIns="25400" tIns="25400" bIns="25400">
             <a:spAutoFit/>
           </a:bodyPr>
           <a:lstStyle/>
           <a:p>
-            <a:pPr>
-              <a:spcBef>
-                <a:spcPts val="800"/>
-              </a:spcBef>
-              <a:spcAft>
-                <a:spcPts val="200"/>
-              </a:spcAft>
-            </a:pPr>
+            <a:pPr algn="l"/>
+            <a:r>
+              <a:rPr sz="1300" b="0">
+                <a:solidFill>
+                  <a:srgbClr val="57606A"/>
+                </a:solidFill>
+                <a:latin typeface="Microsoft YaHei"/>
+              </a:rPr>
+              <a:t>对手策略库扩展至 6 项（RAND 风格：多轴协同饱和 / 政治分化压制）</a:t>
+            </a:r>
+          </a:p>
+        </p:txBody>
+      </p:sp>
+      <p:sp>
+        <p:nvSpPr>
+          <p:cNvPr id="4" name="Rounded Rectangle 3"/>
+          <p:cNvSpPr/>
+          <p:nvPr/>
+        </p:nvSpPr>
+        <p:spPr>
+          <a:xfrm>
+            <a:off x="502920" y="1417320"/>
+            <a:ext cx="6035040" cy="960120"/>
+          </a:xfrm>
+          <a:prstGeom prst="roundRect">
+            <a:avLst/>
+          </a:prstGeom>
+          <a:solidFill>
+            <a:srgbClr val="FFFFFF"/>
+          </a:solidFill>
+          <a:ln w="12700">
+            <a:solidFill>
+              <a:srgbClr val="C9D6E4"/>
+            </a:solidFill>
+          </a:ln>
+          <a:effectLst/>
+        </p:spPr>
+        <p:style>
+          <a:lnRef idx="1">
+            <a:schemeClr val="accent1"/>
+          </a:lnRef>
+          <a:fillRef idx="3">
+            <a:schemeClr val="accent1"/>
+          </a:fillRef>
+          <a:effectRef idx="2">
+            <a:schemeClr val="accent1"/>
+          </a:effectRef>
+          <a:fontRef idx="minor">
+            <a:schemeClr val="lt1"/>
+          </a:fontRef>
+        </p:style>
+        <p:txBody>
+          <a:bodyPr rtlCol="0" anchor="t" wrap="square" lIns="127000" rIns="127000" tIns="76200" bIns="76200"/>
+          <a:lstStyle/>
+          <a:p>
+            <a:pPr algn="l"/>
             <a:r>
               <a:rPr sz="1400" b="1">
                 <a:solidFill>
-                  <a:srgbClr val="2E5C8A"/>
+                  <a:srgbClr val="0969DA"/>
                 </a:solidFill>
                 <a:latin typeface="Microsoft YaHei"/>
               </a:rPr>
-              <a:t>教育背景</a:t>
+              <a:t>观测空间 182 → 219 维</a:t>
             </a:r>
           </a:p>
           <a:p>
-            <a:pPr lvl="1">
-              <a:spcAft>
-                <a:spcPts val="100"/>
-              </a:spcAft>
-            </a:pPr>
+            <a:pPr algn="l"/>
             <a:r>
-              <a:rPr sz="1100">
+              <a:rPr sz="1150" b="0">
                 <a:solidFill>
-                  <a:srgbClr val="2D2D2D"/>
+                  <a:srgbClr val="1F2328"/>
                 </a:solidFill>
                 <a:latin typeface="Microsoft YaHei"/>
               </a:rPr>
-              <a:t>浙江大学 计算机通信工程 本科</a:t>
+              <a:t>36 盟友站点准入容量因子
++ 全局冲突升级度（每 ASDA 周期演化）</a:t>
             </a:r>
           </a:p>
-          <a:p>
-            <a:pPr>
-              <a:spcBef>
-                <a:spcPts val="800"/>
-              </a:spcBef>
-              <a:spcAft>
-                <a:spcPts val="200"/>
-              </a:spcAft>
-            </a:pPr>
+        </p:txBody>
+      </p:sp>
+      <p:sp>
+        <p:nvSpPr>
+          <p:cNvPr id="5" name="Rounded Rectangle 4"/>
+          <p:cNvSpPr/>
+          <p:nvPr/>
+        </p:nvSpPr>
+        <p:spPr>
+          <a:xfrm>
+            <a:off x="502920" y="2496312"/>
+            <a:ext cx="6035040" cy="960120"/>
+          </a:xfrm>
+          <a:prstGeom prst="roundRect">
+            <a:avLst/>
+          </a:prstGeom>
+          <a:solidFill>
+            <a:srgbClr val="FFFFFF"/>
+          </a:solidFill>
+          <a:ln w="12700">
+            <a:solidFill>
+              <a:srgbClr val="C9D6E4"/>
+            </a:solidFill>
+          </a:ln>
+          <a:effectLst/>
+        </p:spPr>
+        <p:style>
+          <a:lnRef idx="1">
+            <a:schemeClr val="accent1"/>
+          </a:lnRef>
+          <a:fillRef idx="3">
+            <a:schemeClr val="accent1"/>
+          </a:fillRef>
+          <a:effectRef idx="2">
+            <a:schemeClr val="accent1"/>
+          </a:effectRef>
+          <a:fontRef idx="minor">
+            <a:schemeClr val="lt1"/>
+          </a:fontRef>
+        </p:style>
+        <p:txBody>
+          <a:bodyPr rtlCol="0" anchor="t" wrap="square" lIns="127000" rIns="127000" tIns="76200" bIns="76200"/>
+          <a:lstStyle/>
+          <a:p>
+            <a:pPr algn="l"/>
             <a:r>
               <a:rPr sz="1400" b="1">
                 <a:solidFill>
-                  <a:srgbClr val="2E5C8A"/>
+                  <a:srgbClr val="0969DA"/>
                 </a:solidFill>
                 <a:latin typeface="Microsoft YaHei"/>
               </a:rPr>
-              <a:t>学术任职</a:t>
+              <a:t>DQN 219 维重训练</a:t>
             </a:r>
           </a:p>
           <a:p>
-            <a:pPr lvl="1">
-              <a:spcAft>
-                <a:spcPts val="100"/>
-              </a:spcAft>
-            </a:pPr>
+            <a:pPr algn="l"/>
             <a:r>
-              <a:rPr sz="1100">
+              <a:rPr sz="1150" b="0">
                 <a:solidFill>
-                  <a:srgbClr val="2D2D2D"/>
+                  <a:srgbClr val="1F2328"/>
                 </a:solidFill>
                 <a:latin typeface="Microsoft YaHei"/>
               </a:rPr>
-              <a:t>浙江邮电职业技术学院 人工智能学术委员会主任</a:t>
+              <a:t>Intel Arc XPU 加速 · 200K 步三阶段课程学习
+全新建网 + 阶段链式（94.0% → 65.4% → 82.2%）</a:t>
             </a:r>
           </a:p>
-          <a:p>
-            <a:pPr lvl="1">
-              <a:spcAft>
-                <a:spcPts val="100"/>
-              </a:spcAft>
-            </a:pPr>
+        </p:txBody>
+      </p:sp>
+      <p:sp>
+        <p:nvSpPr>
+          <p:cNvPr id="6" name="Rounded Rectangle 5"/>
+          <p:cNvSpPr/>
+          <p:nvPr/>
+        </p:nvSpPr>
+        <p:spPr>
+          <a:xfrm>
+            <a:off x="502920" y="3575304"/>
+            <a:ext cx="6035040" cy="960120"/>
+          </a:xfrm>
+          <a:prstGeom prst="roundRect">
+            <a:avLst/>
+          </a:prstGeom>
+          <a:solidFill>
+            <a:srgbClr val="FFFFFF"/>
+          </a:solidFill>
+          <a:ln w="12700">
+            <a:solidFill>
+              <a:srgbClr val="C9D6E4"/>
+            </a:solidFill>
+          </a:ln>
+          <a:effectLst/>
+        </p:spPr>
+        <p:style>
+          <a:lnRef idx="1">
+            <a:schemeClr val="accent1"/>
+          </a:lnRef>
+          <a:fillRef idx="3">
+            <a:schemeClr val="accent1"/>
+          </a:fillRef>
+          <a:effectRef idx="2">
+            <a:schemeClr val="accent1"/>
+          </a:effectRef>
+          <a:fontRef idx="minor">
+            <a:schemeClr val="lt1"/>
+          </a:fontRef>
+        </p:style>
+        <p:txBody>
+          <a:bodyPr rtlCol="0" anchor="t" wrap="square" lIns="127000" rIns="127000" tIns="76200" bIns="76200"/>
+          <a:lstStyle/>
+          <a:p>
+            <a:pPr algn="l"/>
             <a:r>
-              <a:rPr sz="1100">
+              <a:rPr sz="1400" b="1">
                 <a:solidFill>
-                  <a:srgbClr val="2D2D2D"/>
+                  <a:srgbClr val="0969DA"/>
                 </a:solidFill>
                 <a:latin typeface="Microsoft YaHei"/>
               </a:rPr>
-              <a:t>浙江省首批产业教授</a:t>
+              <a:t>实时态势与回放</a:t>
             </a:r>
           </a:p>
           <a:p>
-            <a:pPr>
-              <a:spcBef>
-                <a:spcPts val="800"/>
-              </a:spcBef>
-              <a:spcAft>
-                <a:spcPts val="200"/>
-              </a:spcAft>
-            </a:pPr>
+            <a:pPr algn="l"/>
+            <a:r>
+              <a:rPr sz="1150" b="0">
+                <a:solidFill>
+                  <a:srgbClr val="1F2328"/>
+                </a:solidFill>
+                <a:latin typeface="Microsoft YaHei"/>
+              </a:rPr>
+              <a:t>WebSocket 10 并发 · 暂停/恢复/逐周期回溯
+SPEAR 四泳道时间轴（政治准入泳道）</a:t>
+            </a:r>
+          </a:p>
+        </p:txBody>
+      </p:sp>
+      <p:sp>
+        <p:nvSpPr>
+          <p:cNvPr id="7" name="Rounded Rectangle 6"/>
+          <p:cNvSpPr/>
+          <p:nvPr/>
+        </p:nvSpPr>
+        <p:spPr>
+          <a:xfrm>
+            <a:off x="502920" y="4654296"/>
+            <a:ext cx="6035040" cy="960120"/>
+          </a:xfrm>
+          <a:prstGeom prst="roundRect">
+            <a:avLst/>
+          </a:prstGeom>
+          <a:solidFill>
+            <a:srgbClr val="FFFFFF"/>
+          </a:solidFill>
+          <a:ln w="12700">
+            <a:solidFill>
+              <a:srgbClr val="C9D6E4"/>
+            </a:solidFill>
+          </a:ln>
+          <a:effectLst/>
+        </p:spPr>
+        <p:style>
+          <a:lnRef idx="1">
+            <a:schemeClr val="accent1"/>
+          </a:lnRef>
+          <a:fillRef idx="3">
+            <a:schemeClr val="accent1"/>
+          </a:fillRef>
+          <a:effectRef idx="2">
+            <a:schemeClr val="accent1"/>
+          </a:effectRef>
+          <a:fontRef idx="minor">
+            <a:schemeClr val="lt1"/>
+          </a:fontRef>
+        </p:style>
+        <p:txBody>
+          <a:bodyPr rtlCol="0" anchor="t" wrap="square" lIns="127000" rIns="127000" tIns="76200" bIns="76200"/>
+          <a:lstStyle/>
+          <a:p>
+            <a:pPr algn="l"/>
             <a:r>
               <a:rPr sz="1400" b="1">
                 <a:solidFill>
-                  <a:srgbClr val="2E5C8A"/>
+                  <a:srgbClr val="0969DA"/>
                 </a:solidFill>
                 <a:latin typeface="Microsoft YaHei"/>
               </a:rPr>
-              <a:t>专家库入库</a:t>
+              <a:t>平台化与契约</a:t>
             </a:r>
           </a:p>
           <a:p>
-            <a:pPr lvl="1">
-              <a:spcAft>
-                <a:spcPts val="100"/>
-              </a:spcAft>
-            </a:pPr>
+            <a:pPr algn="l"/>
             <a:r>
-              <a:rPr sz="1100">
+              <a:rPr sz="1150" b="0">
                 <a:solidFill>
-                  <a:srgbClr val="2D2D2D"/>
+                  <a:srgbClr val="1F2328"/>
                 </a:solidFill>
                 <a:latin typeface="Microsoft YaHei"/>
               </a:rPr>
-              <a:t>浙江省科技厅入库科技专家</a:t>
+              <a:t>Maven 契约补全四大 DTB 服务
+REST + gRPC 双栈 · 指挥链/政治准入端点</a:t>
             </a:r>
           </a:p>
-          <a:p>
-            <a:pPr lvl="1">
-              <a:spcAft>
-                <a:spcPts val="100"/>
-              </a:spcAft>
-            </a:pPr>
+        </p:txBody>
+      </p:sp>
+      <p:sp>
+        <p:nvSpPr>
+          <p:cNvPr id="8" name="Rounded Rectangle 7"/>
+          <p:cNvSpPr/>
+          <p:nvPr/>
+        </p:nvSpPr>
+        <p:spPr>
+          <a:xfrm>
+            <a:off x="6766560" y="1417320"/>
+            <a:ext cx="4892040" cy="4224528"/>
+          </a:xfrm>
+          <a:prstGeom prst="roundRect">
+            <a:avLst/>
+          </a:prstGeom>
+          <a:solidFill>
+            <a:srgbClr val="F2F6FA"/>
+          </a:solidFill>
+          <a:ln w="12700">
+            <a:solidFill>
+              <a:srgbClr val="C9D6E4"/>
+            </a:solidFill>
+          </a:ln>
+          <a:effectLst/>
+        </p:spPr>
+        <p:style>
+          <a:lnRef idx="1">
+            <a:schemeClr val="accent1"/>
+          </a:lnRef>
+          <a:fillRef idx="3">
+            <a:schemeClr val="accent1"/>
+          </a:fillRef>
+          <a:effectRef idx="2">
+            <a:schemeClr val="accent1"/>
+          </a:effectRef>
+          <a:fontRef idx="minor">
+            <a:schemeClr val="lt1"/>
+          </a:fontRef>
+        </p:style>
+        <p:txBody>
+          <a:bodyPr rtlCol="0" anchor="t" wrap="square" lIns="127000" rIns="127000" tIns="76200" bIns="76200"/>
+          <a:lstStyle/>
+          <a:p>
+            <a:pPr algn="l"/>
             <a:r>
-              <a:rPr sz="1100">
+              <a:rPr sz="1500" b="1">
                 <a:solidFill>
-                  <a:srgbClr val="2D2D2D"/>
+                  <a:srgbClr val="1E2761"/>
                 </a:solidFill>
                 <a:latin typeface="Microsoft YaHei"/>
               </a:rPr>
-              <a:t>浙江省经信厅新一代通信技术入库专家</a:t>
+              <a:t>对手策略库（6 项）</a:t>
             </a:r>
           </a:p>
           <a:p>
-            <a:pPr lvl="1">
-              <a:spcAft>
-                <a:spcPts val="100"/>
-              </a:spcAft>
-            </a:pPr>
+            <a:pPr algn="l"/>
             <a:r>
-              <a:rPr sz="1100">
+              <a:rPr sz="1200" b="0">
                 <a:solidFill>
-                  <a:srgbClr val="2D2D2D"/>
+                  <a:srgbClr val="1F2328"/>
                 </a:solidFill>
                 <a:latin typeface="Microsoft YaHei"/>
               </a:rPr>
-              <a:t>杭州市科技局入库专家</a:t>
+              <a:t>1. 饱和攻击        8-12 弹混编压制</a:t>
             </a:r>
           </a:p>
           <a:p>
-            <a:pPr lvl="1">
-              <a:spcAft>
-                <a:spcPts val="100"/>
-              </a:spcAft>
-            </a:pPr>
+            <a:pPr algn="l"/>
             <a:r>
-              <a:rPr sz="1100">
+              <a:rPr sz="1200" b="0">
                 <a:solidFill>
-                  <a:srgbClr val="2D2D2D"/>
+                  <a:srgbClr val="1F2328"/>
                 </a:solidFill>
                 <a:latin typeface="Microsoft YaHei"/>
               </a:rPr>
-              <a:t>浙江省人工智能专家服务团专家</a:t>
+              <a:t>2. 隐身突防        高超音速 + 极端天气</a:t>
             </a:r>
           </a:p>
           <a:p>
-            <a:pPr lvl="1">
-              <a:spcAft>
-                <a:spcPts val="100"/>
-              </a:spcAft>
-            </a:pPr>
+            <a:pPr algn="l"/>
             <a:r>
-              <a:rPr sz="1100">
+              <a:rPr sz="1200" b="0">
                 <a:solidFill>
-                  <a:srgbClr val="2D2D2D"/>
+                  <a:srgbClr val="1F2328"/>
                 </a:solidFill>
                 <a:latin typeface="Microsoft YaHei"/>
               </a:rPr>
-              <a:t>浙江省智慧城市产业智库专家</a:t>
+              <a:t>3. 电子战          重干扰 + 网攻致盲</a:t>
             </a:r>
           </a:p>
           <a:p>
-            <a:pPr>
-              <a:spcBef>
-                <a:spcPts val="800"/>
-              </a:spcBef>
-              <a:spcAft>
-                <a:spcPts val="200"/>
-              </a:spcAft>
-            </a:pPr>
+            <a:pPr algn="l"/>
             <a:r>
-              <a:rPr sz="1400" b="1">
+              <a:rPr sz="1200" b="0">
                 <a:solidFill>
-                  <a:srgbClr val="2E5C8A"/>
+                  <a:srgbClr val="1F2328"/>
                 </a:solidFill>
                 <a:latin typeface="Microsoft YaHei"/>
               </a:rPr>
-              <a:t>专业资质</a:t>
+              <a:t>4. 诱饵群          低价值弹耗尽拦截资源</a:t>
             </a:r>
           </a:p>
           <a:p>
-            <a:pPr lvl="1">
-              <a:spcAft>
-                <a:spcPts val="100"/>
-              </a:spcAft>
-            </a:pPr>
+            <a:pPr algn="l"/>
             <a:r>
-              <a:rPr sz="1100">
+              <a:rPr sz="1200" b="1">
                 <a:solidFill>
-                  <a:srgbClr val="2D2D2D"/>
+                  <a:srgbClr val="B0770B"/>
                 </a:solidFill>
                 <a:latin typeface="Microsoft YaHei"/>
               </a:rPr>
-              <a:t>工信部认证首席数据官</a:t>
+              <a:t>5. 多轴协同饱和    单波 10+ 基地分散打击
+    （覆盖第二岛链纵深新增节点）</a:t>
             </a:r>
           </a:p>
           <a:p>
-            <a:pPr lvl="1">
-              <a:spcAft>
-                <a:spcPts val="100"/>
-              </a:spcAft>
-            </a:pPr>
+            <a:pPr algn="l"/>
             <a:r>
-              <a:rPr sz="1100">
+              <a:rPr sz="1200" b="1">
                 <a:solidFill>
-                  <a:srgbClr val="2D2D2D"/>
+                  <a:srgbClr val="B0770B"/>
                 </a:solidFill>
                 <a:latin typeface="Microsoft YaHei"/>
               </a:rPr>
-              <a:t>首席数据资产运营官</a:t>
+              <a:t>6. 政治分化压制    持续打击 + 重 EW/网攻
+    触发准入降级（RAND 对手分化策略）</a:t>
             </a:r>
           </a:p>
-          <a:p>
-            <a:pPr lvl="1">
-              <a:spcAft>
-                <a:spcPts val="100"/>
-              </a:spcAft>
-            </a:pPr>
+        </p:txBody>
+      </p:sp>
+    </p:spTree>
+  </p:cSld>
+  <p:clrMapOvr>
+    <a:masterClrMapping/>
+  </p:clrMapOvr>
+</p:sld>
+</file>
+
+<file path=ppt/slides/slide18.xml><?xml version="1.0" encoding="utf-8"?>
+<p:sld xmlns:a="http://schemas.openxmlformats.org/drawingml/2006/main" xmlns:p="http://schemas.openxmlformats.org/presentationml/2006/main" xmlns:r="http://schemas.openxmlformats.org/officeDocument/2006/relationships">
+  <p:cSld>
+    <p:spTree>
+      <p:nvGrpSpPr>
+        <p:cNvPr id="1" name=""/>
+        <p:cNvGrpSpPr/>
+        <p:nvPr/>
+      </p:nvGrpSpPr>
+      <p:grpSpPr/>
+      <p:sp>
+        <p:nvSpPr>
+          <p:cNvPr id="2" name="TextBox 1"/>
+          <p:cNvSpPr txBox="1"/>
+          <p:nvPr/>
+        </p:nvSpPr>
+        <p:spPr>
+          <a:xfrm>
+            <a:off x="502920" y="292608"/>
+            <a:ext cx="11155680" cy="685800"/>
+          </a:xfrm>
+          <a:prstGeom prst="rect">
+            <a:avLst/>
+          </a:prstGeom>
+          <a:noFill/>
+        </p:spPr>
+        <p:txBody>
+          <a:bodyPr wrap="square" lIns="25400" rIns="25400" tIns="25400" bIns="25400">
+            <a:spAutoFit/>
+          </a:bodyPr>
+          <a:lstStyle/>
+          <a:p>
+            <a:pPr algn="l"/>
             <a:r>
-              <a:rPr sz="1100">
+              <a:rPr sz="2900" b="1">
                 <a:solidFill>
-                  <a:srgbClr val="2D2D2D"/>
+                  <a:srgbClr val="1E2761"/>
                 </a:solidFill>
                 <a:latin typeface="Microsoft YaHei"/>
               </a:rPr>
-              <a:t>高级工程师</a:t>
+              <a:t>重验证：政治不确定性下的体系韧性</a:t>
             </a:r>
           </a:p>
-          <a:p>
-            <a:pPr>
-              <a:spcBef>
-                <a:spcPts val="800"/>
-              </a:spcBef>
-              <a:spcAft>
-                <a:spcPts val="200"/>
-              </a:spcAft>
-            </a:pPr>
+        </p:txBody>
+      </p:sp>
+      <p:sp>
+        <p:nvSpPr>
+          <p:cNvPr id="3" name="TextBox 2"/>
+          <p:cNvSpPr txBox="1"/>
+          <p:nvPr/>
+        </p:nvSpPr>
+        <p:spPr>
+          <a:xfrm>
+            <a:off x="521207" y="932688"/>
+            <a:ext cx="11155680" cy="365760"/>
+          </a:xfrm>
+          <a:prstGeom prst="rect">
+            <a:avLst/>
+          </a:prstGeom>
+          <a:noFill/>
+        </p:spPr>
+        <p:txBody>
+          <a:bodyPr wrap="square" lIns="25400" rIns="25400" tIns="25400" bIns="25400">
+            <a:spAutoFit/>
+          </a:bodyPr>
+          <a:lstStyle/>
+          <a:p>
+            <a:pPr algn="l"/>
             <a:r>
-              <a:rPr sz="1400" b="1">
+              <a:rPr sz="1300" b="0">
                 <a:solidFill>
-                  <a:srgbClr val="2E5C8A"/>
+                  <a:srgbClr val="57606A"/>
                 </a:solidFill>
                 <a:latin typeface="Microsoft YaHei"/>
               </a:rPr>
-              <a:t>行业委员</a:t>
+              <a:t>Monte Carlo 三场景对照 + 六策略全量 150 episodes（Wilson 95% CI）</a:t>
             </a:r>
           </a:p>
-          <a:p>
-            <a:pPr lvl="1">
-              <a:spcAft>
-                <a:spcPts val="100"/>
-              </a:spcAft>
-            </a:pPr>
+        </p:txBody>
+      </p:sp>
+      <p:sp>
+        <p:nvSpPr>
+          <p:cNvPr id="4" name="Rounded Rectangle 3"/>
+          <p:cNvSpPr/>
+          <p:nvPr/>
+        </p:nvSpPr>
+        <p:spPr>
+          <a:xfrm>
+            <a:off x="502920" y="1371600"/>
+            <a:ext cx="3657600" cy="1828800"/>
+          </a:xfrm>
+          <a:prstGeom prst="roundRect">
+            <a:avLst/>
+          </a:prstGeom>
+          <a:solidFill>
+            <a:srgbClr val="FFFFFF"/>
+          </a:solidFill>
+          <a:ln w="12700">
+            <a:solidFill>
+              <a:srgbClr val="C9D6E4"/>
+            </a:solidFill>
+          </a:ln>
+          <a:effectLst/>
+        </p:spPr>
+        <p:style>
+          <a:lnRef idx="1">
+            <a:schemeClr val="accent1"/>
+          </a:lnRef>
+          <a:fillRef idx="3">
+            <a:schemeClr val="accent1"/>
+          </a:fillRef>
+          <a:effectRef idx="2">
+            <a:schemeClr val="accent1"/>
+          </a:effectRef>
+          <a:fontRef idx="minor">
+            <a:schemeClr val="lt1"/>
+          </a:fontRef>
+        </p:style>
+        <p:txBody>
+          <a:bodyPr rtlCol="0" anchor="ctr" wrap="square"/>
+          <a:lstStyle/>
+          <a:p>
+            <a:pPr algn="ctr"/>
             <a:r>
-              <a:rPr sz="1100">
+              <a:rPr sz="4400" b="1">
                 <a:solidFill>
-                  <a:srgbClr val="2D2D2D"/>
+                  <a:srgbClr val="57606A"/>
+                </a:solidFill>
+                <a:latin typeface="Consolas"/>
+              </a:rPr>
+              <a:t>76.2%</a:t>
+            </a:r>
+          </a:p>
+          <a:p>
+            <a:pPr algn="ctr"/>
+            <a:r>
+              <a:rPr sz="1200">
+                <a:solidFill>
+                  <a:srgbClr val="1F2328"/>
                 </a:solidFill>
                 <a:latin typeface="Microsoft YaHei"/>
               </a:rPr>
-              <a:t>杭州数据交易所数据要素专业委员会委员</a:t>
+              <a:t>P6 基线
+原 22 站点 · 182 维</a:t>
             </a:r>
           </a:p>
-          <a:p>
-            <a:pPr lvl="1">
-              <a:spcAft>
-                <a:spcPts val="100"/>
-              </a:spcAft>
-            </a:pPr>
+        </p:txBody>
+      </p:sp>
+      <p:sp>
+        <p:nvSpPr>
+          <p:cNvPr id="5" name="Rounded Rectangle 4"/>
+          <p:cNvSpPr/>
+          <p:nvPr/>
+        </p:nvSpPr>
+        <p:spPr>
+          <a:xfrm>
+            <a:off x="4325112" y="1371600"/>
+            <a:ext cx="3657600" cy="1828800"/>
+          </a:xfrm>
+          <a:prstGeom prst="roundRect">
+            <a:avLst/>
+          </a:prstGeom>
+          <a:solidFill>
+            <a:srgbClr val="FFFFFF"/>
+          </a:solidFill>
+          <a:ln w="12700">
+            <a:solidFill>
+              <a:srgbClr val="C9D6E4"/>
+            </a:solidFill>
+          </a:ln>
+          <a:effectLst/>
+        </p:spPr>
+        <p:style>
+          <a:lnRef idx="1">
+            <a:schemeClr val="accent1"/>
+          </a:lnRef>
+          <a:fillRef idx="3">
+            <a:schemeClr val="accent1"/>
+          </a:fillRef>
+          <a:effectRef idx="2">
+            <a:schemeClr val="accent1"/>
+          </a:effectRef>
+          <a:fontRef idx="minor">
+            <a:schemeClr val="lt1"/>
+          </a:fontRef>
+        </p:style>
+        <p:txBody>
+          <a:bodyPr rtlCol="0" anchor="ctr" wrap="square"/>
+          <a:lstStyle/>
+          <a:p>
+            <a:pPr algn="ctr"/>
             <a:r>
-              <a:rPr sz="1100">
+              <a:rPr sz="4400" b="1">
                 <a:solidFill>
-                  <a:srgbClr val="2D2D2D"/>
+                  <a:srgbClr val="0969DA"/>
+                </a:solidFill>
+                <a:latin typeface="Consolas"/>
+              </a:rPr>
+              <a:t>79.0%</a:t>
+            </a:r>
+          </a:p>
+          <a:p>
+            <a:pPr algn="ctr"/>
+            <a:r>
+              <a:rPr sz="1200">
+                <a:solidFill>
+                  <a:srgbClr val="1F2328"/>
                 </a:solidFill>
                 <a:latin typeface="Microsoft YaHei"/>
               </a:rPr>
-              <a:t>浙江省企业促进会数据治理委员会委员</a:t>
+              <a:t>v2 权威数据
+模型不变 · 净效应 +2.8pp</a:t>
             </a:r>
           </a:p>
-          <a:p>
-            <a:pPr>
-              <a:spcBef>
-                <a:spcPts val="800"/>
-              </a:spcBef>
-              <a:spcAft>
-                <a:spcPts val="200"/>
-              </a:spcAft>
-            </a:pPr>
+        </p:txBody>
+      </p:sp>
+      <p:sp>
+        <p:nvSpPr>
+          <p:cNvPr id="6" name="Rounded Rectangle 5"/>
+          <p:cNvSpPr/>
+          <p:nvPr/>
+        </p:nvSpPr>
+        <p:spPr>
+          <a:xfrm>
+            <a:off x="8147304" y="1371600"/>
+            <a:ext cx="3657600" cy="1828800"/>
+          </a:xfrm>
+          <a:prstGeom prst="roundRect">
+            <a:avLst/>
+          </a:prstGeom>
+          <a:solidFill>
+            <a:srgbClr val="FFFFFF"/>
+          </a:solidFill>
+          <a:ln w="12700">
+            <a:solidFill>
+              <a:srgbClr val="C9D6E4"/>
+            </a:solidFill>
+          </a:ln>
+          <a:effectLst/>
+        </p:spPr>
+        <p:style>
+          <a:lnRef idx="1">
+            <a:schemeClr val="accent1"/>
+          </a:lnRef>
+          <a:fillRef idx="3">
+            <a:schemeClr val="accent1"/>
+          </a:fillRef>
+          <a:effectRef idx="2">
+            <a:schemeClr val="accent1"/>
+          </a:effectRef>
+          <a:fontRef idx="minor">
+            <a:schemeClr val="lt1"/>
+          </a:fontRef>
+        </p:style>
+        <p:txBody>
+          <a:bodyPr rtlCol="0" anchor="ctr" wrap="square"/>
+          <a:lstStyle/>
+          <a:p>
+            <a:pPr algn="ctr"/>
             <a:r>
-              <a:rPr sz="1400" b="1">
+              <a:rPr sz="4400" b="1">
                 <a:solidFill>
-                  <a:srgbClr val="2E5C8A"/>
+                  <a:srgbClr val="1A7F37"/>
+                </a:solidFill>
+                <a:latin typeface="Consolas"/>
+              </a:rPr>
+              <a:t>79.5%</a:t>
+            </a:r>
+          </a:p>
+          <a:p>
+            <a:pPr algn="ctr"/>
+            <a:r>
+              <a:rPr sz="1200">
+                <a:solidFill>
+                  <a:srgbClr val="1F2328"/>
                 </a:solidFill>
                 <a:latin typeface="Microsoft YaHei"/>
               </a:rPr>
-              <a:t>低空经济</a:t>
+              <a:t>政治准入
+219 维 P12 模型</a:t>
             </a:r>
           </a:p>
-          <a:p>
-            <a:pPr lvl="1">
-              <a:spcAft>
-                <a:spcPts val="100"/>
-              </a:spcAft>
-            </a:pPr>
+        </p:txBody>
+      </p:sp>
+      <p:sp>
+        <p:nvSpPr>
+          <p:cNvPr id="7" name="Rounded Rectangle 6"/>
+          <p:cNvSpPr/>
+          <p:nvPr/>
+        </p:nvSpPr>
+        <p:spPr>
+          <a:xfrm>
+            <a:off x="502920" y="3383280"/>
+            <a:ext cx="11201400" cy="685800"/>
+          </a:xfrm>
+          <a:prstGeom prst="roundRect">
+            <a:avLst/>
+          </a:prstGeom>
+          <a:solidFill>
+            <a:srgbClr val="E8F3EC"/>
+          </a:solidFill>
+          <a:ln w="12700">
+            <a:solidFill>
+              <a:srgbClr val="1A7F37"/>
+            </a:solidFill>
+          </a:ln>
+          <a:effectLst/>
+        </p:spPr>
+        <p:style>
+          <a:lnRef idx="1">
+            <a:schemeClr val="accent1"/>
+          </a:lnRef>
+          <a:fillRef idx="3">
+            <a:schemeClr val="accent1"/>
+          </a:fillRef>
+          <a:effectRef idx="2">
+            <a:schemeClr val="accent1"/>
+          </a:effectRef>
+          <a:fontRef idx="minor">
+            <a:schemeClr val="lt1"/>
+          </a:fontRef>
+        </p:style>
+        <p:txBody>
+          <a:bodyPr rtlCol="0" anchor="t" wrap="square" lIns="127000" rIns="127000" tIns="76200" bIns="76200"/>
+          <a:lstStyle/>
+          <a:p>
+            <a:pPr algn="l"/>
             <a:r>
-              <a:rPr sz="1100">
+              <a:rPr sz="1500" b="1">
                 <a:solidFill>
-                  <a:srgbClr val="2D2D2D"/>
+                  <a:srgbClr val="1A7F37"/>
                 </a:solidFill>
                 <a:latin typeface="Microsoft YaHei"/>
               </a:rPr>
-              <a:t>浙江省国际经济交流协会低空经济专委会常务副主任</a:t>
+              <a:t>六策略全量验证：总体拦截率 79.1%（95% CI 78.0 - 80.2）· 全部策略 ≥ 77.6% · 均过 70% 竞赛门槛</a:t>
             </a:r>
           </a:p>
-          <a:p>
-            <a:pPr lvl="1">
-              <a:spcAft>
-                <a:spcPts val="100"/>
-              </a:spcAft>
-            </a:pPr>
+        </p:txBody>
+      </p:sp>
+      <p:sp>
+        <p:nvSpPr>
+          <p:cNvPr id="8" name="Rounded Rectangle 7"/>
+          <p:cNvSpPr/>
+          <p:nvPr/>
+        </p:nvSpPr>
+        <p:spPr>
+          <a:xfrm>
+            <a:off x="502920" y="4251960"/>
+            <a:ext cx="5532120" cy="841248"/>
+          </a:xfrm>
+          <a:prstGeom prst="roundRect">
+            <a:avLst/>
+          </a:prstGeom>
+          <a:solidFill>
+            <a:srgbClr val="F2F6FA"/>
+          </a:solidFill>
+          <a:ln w="12700">
+            <a:solidFill>
+              <a:srgbClr val="C9D6E4"/>
+            </a:solidFill>
+          </a:ln>
+          <a:effectLst/>
+        </p:spPr>
+        <p:style>
+          <a:lnRef idx="1">
+            <a:schemeClr val="accent1"/>
+          </a:lnRef>
+          <a:fillRef idx="3">
+            <a:schemeClr val="accent1"/>
+          </a:fillRef>
+          <a:effectRef idx="2">
+            <a:schemeClr val="accent1"/>
+          </a:effectRef>
+          <a:fontRef idx="minor">
+            <a:schemeClr val="lt1"/>
+          </a:fontRef>
+        </p:style>
+        <p:txBody>
+          <a:bodyPr rtlCol="0" anchor="t" wrap="square" lIns="127000" rIns="127000" tIns="76200" bIns="76200"/>
+          <a:lstStyle/>
+          <a:p>
+            <a:pPr algn="l"/>
             <a:r>
-              <a:rPr sz="1100">
+              <a:rPr sz="1300" b="1">
                 <a:solidFill>
-                  <a:srgbClr val="2D2D2D"/>
+                  <a:srgbClr val="1E2761"/>
                 </a:solidFill>
                 <a:latin typeface="Microsoft YaHei"/>
               </a:rPr>
-              <a:t>浙江省信息通信协会低空专委会顾问</a:t>
+              <a:t>1. 权威数据提升韧性</a:t>
+            </a:r>
+          </a:p>
+          <a:p>
+            <a:pPr algn="l"/>
+            <a:r>
+              <a:rPr sz="1100" b="0">
+                <a:solidFill>
+                  <a:srgbClr val="1F2328"/>
+                </a:solidFill>
+                <a:latin typeface="Microsoft YaHei"/>
+              </a:rPr>
+              <a:t>Tier 分层纵深提升分布式拦截冗余（+2.8pp，模型不变对照）</a:t>
+            </a:r>
+          </a:p>
+        </p:txBody>
+      </p:sp>
+      <p:sp>
+        <p:nvSpPr>
+          <p:cNvPr id="9" name="Rounded Rectangle 8"/>
+          <p:cNvSpPr/>
+          <p:nvPr/>
+        </p:nvSpPr>
+        <p:spPr>
+          <a:xfrm>
+            <a:off x="6217920" y="4251960"/>
+            <a:ext cx="5532120" cy="841248"/>
+          </a:xfrm>
+          <a:prstGeom prst="roundRect">
+            <a:avLst/>
+          </a:prstGeom>
+          <a:solidFill>
+            <a:srgbClr val="F2F6FA"/>
+          </a:solidFill>
+          <a:ln w="12700">
+            <a:solidFill>
+              <a:srgbClr val="C9D6E4"/>
+            </a:solidFill>
+          </a:ln>
+          <a:effectLst/>
+        </p:spPr>
+        <p:style>
+          <a:lnRef idx="1">
+            <a:schemeClr val="accent1"/>
+          </a:lnRef>
+          <a:fillRef idx="3">
+            <a:schemeClr val="accent1"/>
+          </a:fillRef>
+          <a:effectRef idx="2">
+            <a:schemeClr val="accent1"/>
+          </a:effectRef>
+          <a:fontRef idx="minor">
+            <a:schemeClr val="lt1"/>
+          </a:fontRef>
+        </p:style>
+        <p:txBody>
+          <a:bodyPr rtlCol="0" anchor="t" wrap="square" lIns="127000" rIns="127000" tIns="76200" bIns="76200"/>
+          <a:lstStyle/>
+          <a:p>
+            <a:pPr algn="l"/>
+            <a:r>
+              <a:rPr sz="1300" b="1">
+                <a:solidFill>
+                  <a:srgbClr val="1E2761"/>
+                </a:solidFill>
+                <a:latin typeface="Microsoft YaHei"/>
+              </a:rPr>
+              <a:t>2. 政治不确定性可被学习</a:t>
+            </a:r>
+          </a:p>
+          <a:p>
+            <a:pPr algn="l"/>
+            <a:r>
+              <a:rPr sz="1100" b="0">
+                <a:solidFill>
+                  <a:srgbClr val="1F2328"/>
+                </a:solidFill>
+                <a:latin typeface="Microsoft YaHei"/>
+              </a:rPr>
+              <a:t>准入演化场景拦截率不降反稳——219 维模型学会规避 Denied 站点</a:t>
+            </a:r>
+          </a:p>
+        </p:txBody>
+      </p:sp>
+      <p:sp>
+        <p:nvSpPr>
+          <p:cNvPr id="10" name="Rounded Rectangle 9"/>
+          <p:cNvSpPr/>
+          <p:nvPr/>
+        </p:nvSpPr>
+        <p:spPr>
+          <a:xfrm>
+            <a:off x="502920" y="5212080"/>
+            <a:ext cx="5532120" cy="841248"/>
+          </a:xfrm>
+          <a:prstGeom prst="roundRect">
+            <a:avLst/>
+          </a:prstGeom>
+          <a:solidFill>
+            <a:srgbClr val="F2F6FA"/>
+          </a:solidFill>
+          <a:ln w="12700">
+            <a:solidFill>
+              <a:srgbClr val="C9D6E4"/>
+            </a:solidFill>
+          </a:ln>
+          <a:effectLst/>
+        </p:spPr>
+        <p:style>
+          <a:lnRef idx="1">
+            <a:schemeClr val="accent1"/>
+          </a:lnRef>
+          <a:fillRef idx="3">
+            <a:schemeClr val="accent1"/>
+          </a:fillRef>
+          <a:effectRef idx="2">
+            <a:schemeClr val="accent1"/>
+          </a:effectRef>
+          <a:fontRef idx="minor">
+            <a:schemeClr val="lt1"/>
+          </a:fontRef>
+        </p:style>
+        <p:txBody>
+          <a:bodyPr rtlCol="0" anchor="t" wrap="square" lIns="127000" rIns="127000" tIns="76200" bIns="76200"/>
+          <a:lstStyle/>
+          <a:p>
+            <a:pPr algn="l"/>
+            <a:r>
+              <a:rPr sz="1300" b="1">
+                <a:solidFill>
+                  <a:srgbClr val="1E2761"/>
+                </a:solidFill>
+                <a:latin typeface="Microsoft YaHei"/>
+              </a:rPr>
+              <a:t>3. 结构性缓冲存在</a:t>
+            </a:r>
+          </a:p>
+          <a:p>
+            <a:pPr algn="l"/>
+            <a:r>
+              <a:rPr sz="1100" b="0">
+                <a:solidFill>
+                  <a:srgbClr val="1F2328"/>
+                </a:solidFill>
+                <a:latin typeface="Microsoft YaHei"/>
+              </a:rPr>
+              <a:t>敏感性 N=200：最差采样可用基地率仍达 97.0%（以容量折损为主）</a:t>
+            </a:r>
+          </a:p>
+        </p:txBody>
+      </p:sp>
+      <p:sp>
+        <p:nvSpPr>
+          <p:cNvPr id="11" name="Rounded Rectangle 10"/>
+          <p:cNvSpPr/>
+          <p:nvPr/>
+        </p:nvSpPr>
+        <p:spPr>
+          <a:xfrm>
+            <a:off x="6217920" y="5212080"/>
+            <a:ext cx="5532120" cy="841248"/>
+          </a:xfrm>
+          <a:prstGeom prst="roundRect">
+            <a:avLst/>
+          </a:prstGeom>
+          <a:solidFill>
+            <a:srgbClr val="F2F6FA"/>
+          </a:solidFill>
+          <a:ln w="12700">
+            <a:solidFill>
+              <a:srgbClr val="C9D6E4"/>
+            </a:solidFill>
+          </a:ln>
+          <a:effectLst/>
+        </p:spPr>
+        <p:style>
+          <a:lnRef idx="1">
+            <a:schemeClr val="accent1"/>
+          </a:lnRef>
+          <a:fillRef idx="3">
+            <a:schemeClr val="accent1"/>
+          </a:fillRef>
+          <a:effectRef idx="2">
+            <a:schemeClr val="accent1"/>
+          </a:effectRef>
+          <a:fontRef idx="minor">
+            <a:schemeClr val="lt1"/>
+          </a:fontRef>
+        </p:style>
+        <p:txBody>
+          <a:bodyPr rtlCol="0" anchor="t" wrap="square" lIns="127000" rIns="127000" tIns="76200" bIns="76200"/>
+          <a:lstStyle/>
+          <a:p>
+            <a:pPr algn="l"/>
+            <a:r>
+              <a:rPr sz="1300" b="1">
+                <a:solidFill>
+                  <a:srgbClr val="1E2761"/>
+                </a:solidFill>
+                <a:latin typeface="Microsoft YaHei"/>
+              </a:rPr>
+              <a:t>4. 最弱项明确</a:t>
+            </a:r>
+          </a:p>
+          <a:p>
+            <a:pPr algn="l"/>
+            <a:r>
+              <a:rPr sz="1100" b="0">
+                <a:solidFill>
+                  <a:srgbClr val="1F2328"/>
+                </a:solidFill>
+                <a:latin typeface="Microsoft YaHei"/>
+              </a:rPr>
+              <a:t>电子战 / 政治分化策略 77-78% 为后续优化方向</a:t>
             </a:r>
           </a:p>
         </p:txBody>
@@ -11180,943 +13111,577 @@
 </file>
 
 <file path=ppt/slides/slide4.xml><?xml version="1.0" encoding="utf-8"?>
-<p:sld xmlns:a="http://schemas.openxmlformats.org/drawingml/2006/main" xmlns:r="http://schemas.openxmlformats.org/officeDocument/2006/relationships" xmlns:p="http://schemas.openxmlformats.org/presentationml/2006/main">
+<p:sld xmlns:a="http://schemas.openxmlformats.org/drawingml/2006/main" xmlns:p="http://schemas.openxmlformats.org/presentationml/2006/main" xmlns:r="http://schemas.openxmlformats.org/officeDocument/2006/relationships">
   <p:cSld>
-    <p:bg>
-      <p:bgPr>
-        <a:blipFill dpi="0" rotWithShape="1">
-          <a:blip r:embed="rId2">
-            <a:alphaModFix/>
-          </a:blip>
-          <a:srcRect/>
-          <a:stretch>
-            <a:fillRect/>
-          </a:stretch>
-        </a:blipFill>
-        <a:effectLst/>
-      </p:bgPr>
-    </p:bg>
     <p:spTree>
       <p:nvGrpSpPr>
         <p:cNvPr id="1" name=""/>
         <p:cNvGrpSpPr/>
         <p:nvPr/>
       </p:nvGrpSpPr>
-      <p:grpSpPr>
-        <a:xfrm>
-          <a:off x="0" y="0"/>
-          <a:ext cx="0" cy="0"/>
-          <a:chOff x="0" y="0"/>
-          <a:chExt cx="0" cy="0"/>
-        </a:xfrm>
-      </p:grpSpPr>
-      <p:sp>
-        <p:nvSpPr>
-          <p:cNvPr id="2" name="AutoShape 2"/>
+      <p:grpSpPr/>
+      <p:sp>
+        <p:nvSpPr>
+          <p:cNvPr id="2" name="Rectangle 1"/>
           <p:cNvSpPr/>
           <p:nvPr/>
         </p:nvSpPr>
         <p:spPr>
           <a:xfrm>
-            <a:off x="476023" y="1469910"/>
-            <a:ext cx="11328932" cy="2365584"/>
-          </a:xfrm>
-          <a:prstGeom prst="roundRect">
-            <a:avLst>
-              <a:gd name="adj" fmla="val 16667"/>
-            </a:avLst>
-          </a:prstGeom>
-          <a:solidFill>
-            <a:schemeClr val="accent1">
-              <a:alpha val="100000"/>
-            </a:schemeClr>
-          </a:solidFill>
-          <a:ln/>
-        </p:spPr>
-        <p:txBody>
-          <a:bodyPr/>
-          <a:lstStyle/>
-          <a:p>
-            <a:endParaRPr lang="zh-CN" altLang="en-US"/>
-          </a:p>
-        </p:txBody>
-        <p:extLst>
-          <p:ext uri="http://schemas.baidu.com/office/drawing/2023/templateData">
-            <bd:templateData xmlns="" xmlns:bd="http://schemas.baidu.com/office/drawing/2023/templateData">eyJ0YWciOiJub0VkaXQifQ==</bd:templateData>
-          </p:ext>
-        </p:extLst>
-      </p:sp>
-      <p:sp>
-        <p:nvSpPr>
-          <p:cNvPr id="3" name="TextBox 3"/>
-          <p:cNvSpPr txBox="1"/>
-          <p:nvPr/>
-        </p:nvSpPr>
-        <p:spPr>
-          <a:xfrm>
-            <a:off x="476023" y="265328"/>
-            <a:ext cx="11239500" cy="914400"/>
+            <a:off x="0" y="0"/>
+            <a:ext cx="12192000" cy="6858000"/>
           </a:xfrm>
           <a:prstGeom prst="rect">
             <a:avLst/>
           </a:prstGeom>
-          <a:ln/>
-        </p:spPr>
-        <p:txBody>
-          <a:bodyPr vert="horz" wrap="square" lIns="123825" tIns="123825" rIns="57150" bIns="123825" rtlCol="0" anchor="ctr" anchorCtr="0">
-            <a:noAutofit/>
-          </a:bodyPr>
-          <a:lstStyle/>
-          <a:p>
-            <a:pPr>
-              <a:lnSpc>
-                <a:spcPct val="140000"/>
-              </a:lnSpc>
-            </a:pPr>
-            <a:r>
-              <a:rPr lang="en-US" sz="3000" b="1">
-                <a:solidFill>
-                  <a:schemeClr val="dk2">
-                    <a:alpha val="100000"/>
-                  </a:schemeClr>
-                </a:solidFill>
-                <a:latin typeface="OPPOSans B"/>
-                <a:ea typeface="OPPOSans B"/>
-                <a:cs typeface="OPPOSans B"/>
-              </a:rPr>
-              <a:t>赛事认知 DTB Model与ASDA闭环</a:t>
-            </a:r>
-          </a:p>
-        </p:txBody>
-        <p:extLst>
-          <p:ext uri="http://schemas.baidu.com/office/drawing/2023/templateData">
-            <bd:templateData xmlns="" xmlns:bd="http://schemas.baidu.com/office/drawing/2023/templateData">eyJfdGVtcGxhdGVEYXRhIjp7ImNvbnRlbnRUeXBlIjoiJHRpdGxlIiwibGluZUNvdW50IjoiMSIsIndvcmRDb3VudCI6IjI4In0sInRhZyI6IiR0aXRsZSJ9</bd:templateData>
-          </p:ext>
-        </p:extLst>
-      </p:sp>
-      <p:sp>
-        <p:nvSpPr>
-          <p:cNvPr id="4" name="Freeform 4"/>
+          <a:solidFill>
+            <a:srgbClr val="FFFFFF"/>
+          </a:solidFill>
+          <a:ln>
+            <a:noFill/>
+          </a:ln>
+        </p:spPr>
+        <p:style>
+          <a:lnRef idx="1">
+            <a:schemeClr val="accent1"/>
+          </a:lnRef>
+          <a:fillRef idx="3">
+            <a:schemeClr val="accent1"/>
+          </a:fillRef>
+          <a:effectRef idx="2">
+            <a:schemeClr val="accent1"/>
+          </a:effectRef>
+          <a:fontRef idx="minor">
+            <a:schemeClr val="lt1"/>
+          </a:fontRef>
+        </p:style>
+        <p:txBody>
+          <a:bodyPr rtlCol="0" anchor="ctr"/>
+          <a:lstStyle/>
+          <a:p>
+            <a:pPr algn="ctr"/>
+          </a:p>
+        </p:txBody>
+      </p:sp>
+      <p:sp>
+        <p:nvSpPr>
+          <p:cNvPr id="3" name="Rectangle 2"/>
           <p:cNvSpPr/>
           <p:nvPr/>
         </p:nvSpPr>
         <p:spPr>
           <a:xfrm>
-            <a:off x="1458055" y="5431509"/>
-            <a:ext cx="9275890" cy="605612"/>
-          </a:xfrm>
-          <a:custGeom>
-            <a:avLst/>
-            <a:gdLst/>
-            <a:ahLst/>
-            <a:cxnLst/>
-            <a:rect l="l" t="t" r="r" b="b"/>
-            <a:pathLst>
-              <a:path w="8348133" h="561260">
-                <a:moveTo>
-                  <a:pt x="0" y="561260"/>
-                </a:moveTo>
-                <a:cubicBezTo>
-                  <a:pt x="2751667" y="-155585"/>
-                  <a:pt x="5545667" y="-212029"/>
-                  <a:pt x="8348133" y="544326"/>
-                </a:cubicBezTo>
-              </a:path>
-            </a:pathLst>
-          </a:custGeom>
-          <a:noFill/>
-          <a:ln w="12700">
-            <a:solidFill>
-              <a:schemeClr val="accent1">
-                <a:alpha val="100000"/>
-              </a:schemeClr>
-            </a:solidFill>
-            <a:prstDash val="solid"/>
-          </a:ln>
-        </p:spPr>
-        <p:txBody>
-          <a:bodyPr/>
-          <a:lstStyle/>
-          <a:p>
-            <a:endParaRPr lang="zh-CN" altLang="en-US"/>
-          </a:p>
-        </p:txBody>
-        <p:extLst>
-          <p:ext uri="http://schemas.baidu.com/office/drawing/2023/templateData">
-            <bd:templateData xmlns="" xmlns:bd="http://schemas.baidu.com/office/drawing/2023/templateData">eyJ0YWciOiJub0VkaXQifQ==</bd:templateData>
-          </p:ext>
-        </p:extLst>
-      </p:sp>
-      <p:sp>
-        <p:nvSpPr>
-          <p:cNvPr id="5" name="AutoShape 5"/>
-          <p:cNvSpPr/>
-          <p:nvPr/>
-        </p:nvSpPr>
-        <p:spPr>
-          <a:xfrm>
-            <a:off x="1335949" y="5929320"/>
-            <a:ext cx="191850" cy="191850"/>
-          </a:xfrm>
-          <a:prstGeom prst="ellipse">
+            <a:off x="0" y="0"/>
+            <a:ext cx="4500000" cy="6858000"/>
+          </a:xfrm>
+          <a:prstGeom prst="rect">
             <a:avLst/>
           </a:prstGeom>
           <a:solidFill>
-            <a:schemeClr val="accent1">
-              <a:alpha val="100000"/>
-            </a:schemeClr>
+            <a:srgbClr val="1F3A5F"/>
           </a:solidFill>
-          <a:ln/>
-        </p:spPr>
-        <p:txBody>
-          <a:bodyPr/>
-          <a:lstStyle/>
-          <a:p>
-            <a:endParaRPr lang="zh-CN" altLang="en-US"/>
-          </a:p>
-        </p:txBody>
-        <p:extLst>
-          <p:ext uri="http://schemas.baidu.com/office/drawing/2023/templateData">
-            <bd:templateData xmlns="" xmlns:bd="http://schemas.baidu.com/office/drawing/2023/templateData">eyJ0YWciOiJub0VkaXQifQ==</bd:templateData>
-          </p:ext>
-        </p:extLst>
-      </p:sp>
-      <p:sp>
-        <p:nvSpPr>
-          <p:cNvPr id="6" name="AutoShape 6"/>
-          <p:cNvSpPr/>
-          <p:nvPr/>
-        </p:nvSpPr>
-        <p:spPr>
-          <a:xfrm>
-            <a:off x="3668384" y="5493547"/>
-            <a:ext cx="191850" cy="191850"/>
-          </a:xfrm>
-          <a:prstGeom prst="ellipse">
-            <a:avLst/>
-          </a:prstGeom>
-          <a:solidFill>
-            <a:schemeClr val="accent1">
-              <a:alpha val="100000"/>
-            </a:schemeClr>
-          </a:solidFill>
-          <a:ln/>
-        </p:spPr>
-        <p:txBody>
-          <a:bodyPr/>
-          <a:lstStyle/>
-          <a:p>
-            <a:endParaRPr lang="zh-CN" altLang="en-US"/>
-          </a:p>
-        </p:txBody>
-        <p:extLst>
-          <p:ext uri="http://schemas.baidu.com/office/drawing/2023/templateData">
-            <bd:templateData xmlns="" xmlns:bd="http://schemas.baidu.com/office/drawing/2023/templateData">eyJ0YWciOiJub0VkaXQifQ==</bd:templateData>
-          </p:ext>
-        </p:extLst>
-      </p:sp>
-      <p:sp>
-        <p:nvSpPr>
-          <p:cNvPr id="7" name="AutoShape 7"/>
-          <p:cNvSpPr/>
-          <p:nvPr/>
-        </p:nvSpPr>
-        <p:spPr>
-          <a:xfrm>
-            <a:off x="6000075" y="5335584"/>
-            <a:ext cx="191850" cy="191850"/>
-          </a:xfrm>
-          <a:prstGeom prst="ellipse">
-            <a:avLst/>
-          </a:prstGeom>
-          <a:solidFill>
-            <a:schemeClr val="accent1">
-              <a:alpha val="100000"/>
-            </a:schemeClr>
-          </a:solidFill>
-          <a:ln/>
-        </p:spPr>
-        <p:txBody>
-          <a:bodyPr/>
-          <a:lstStyle/>
-          <a:p>
-            <a:endParaRPr lang="zh-CN" altLang="en-US"/>
-          </a:p>
-        </p:txBody>
-        <p:extLst>
-          <p:ext uri="http://schemas.baidu.com/office/drawing/2023/templateData">
-            <bd:templateData xmlns="" xmlns:bd="http://schemas.baidu.com/office/drawing/2023/templateData">eyJ0YWciOiJub0VkaXQifQ==</bd:templateData>
-          </p:ext>
-        </p:extLst>
-      </p:sp>
-      <p:sp>
-        <p:nvSpPr>
-          <p:cNvPr id="8" name="AutoShape 8"/>
-          <p:cNvSpPr/>
-          <p:nvPr/>
-        </p:nvSpPr>
-        <p:spPr>
-          <a:xfrm>
-            <a:off x="8333253" y="5493547"/>
-            <a:ext cx="191850" cy="191850"/>
-          </a:xfrm>
-          <a:prstGeom prst="ellipse">
-            <a:avLst/>
-          </a:prstGeom>
-          <a:solidFill>
-            <a:schemeClr val="accent1">
-              <a:alpha val="100000"/>
-            </a:schemeClr>
-          </a:solidFill>
-          <a:ln/>
-        </p:spPr>
-        <p:txBody>
-          <a:bodyPr/>
-          <a:lstStyle/>
-          <a:p>
-            <a:endParaRPr lang="zh-CN" altLang="en-US"/>
-          </a:p>
-        </p:txBody>
-        <p:extLst>
-          <p:ext uri="http://schemas.baidu.com/office/drawing/2023/templateData">
-            <bd:templateData xmlns="" xmlns:bd="http://schemas.baidu.com/office/drawing/2023/templateData">eyJ0YWciOiJub0VkaXQifQ==</bd:templateData>
-          </p:ext>
-        </p:extLst>
-      </p:sp>
-      <p:sp>
-        <p:nvSpPr>
-          <p:cNvPr id="9" name="AutoShape 9"/>
-          <p:cNvSpPr/>
-          <p:nvPr/>
-        </p:nvSpPr>
-        <p:spPr>
-          <a:xfrm>
-            <a:off x="10665687" y="5929320"/>
-            <a:ext cx="191850" cy="191850"/>
-          </a:xfrm>
-          <a:prstGeom prst="ellipse">
-            <a:avLst/>
-          </a:prstGeom>
-          <a:solidFill>
-            <a:schemeClr val="accent1">
-              <a:alpha val="100000"/>
-            </a:schemeClr>
-          </a:solidFill>
-          <a:ln/>
-        </p:spPr>
-        <p:txBody>
-          <a:bodyPr/>
-          <a:lstStyle/>
-          <a:p>
-            <a:endParaRPr lang="zh-CN" altLang="en-US"/>
-          </a:p>
-        </p:txBody>
-        <p:extLst>
-          <p:ext uri="http://schemas.baidu.com/office/drawing/2023/templateData">
-            <bd:templateData xmlns="" xmlns:bd="http://schemas.baidu.com/office/drawing/2023/templateData">eyJ0YWciOiJub0VkaXQifQ==</bd:templateData>
-          </p:ext>
-        </p:extLst>
-      </p:sp>
-      <p:sp>
-        <p:nvSpPr>
-          <p:cNvPr id="10" name="AutoShape 10"/>
-          <p:cNvSpPr/>
-          <p:nvPr/>
-        </p:nvSpPr>
-        <p:spPr>
-          <a:xfrm>
-            <a:off x="5696624" y="4346785"/>
-            <a:ext cx="838202" cy="838202"/>
-          </a:xfrm>
-          <a:prstGeom prst="ellipse">
-            <a:avLst/>
-          </a:prstGeom>
-          <a:solidFill>
-            <a:schemeClr val="accent1">
-              <a:alpha val="100000"/>
-            </a:schemeClr>
-          </a:solidFill>
-          <a:ln/>
-        </p:spPr>
-        <p:txBody>
-          <a:bodyPr/>
-          <a:lstStyle/>
-          <a:p>
-            <a:endParaRPr lang="zh-CN" altLang="en-US"/>
-          </a:p>
-        </p:txBody>
-        <p:extLst>
-          <p:ext uri="http://schemas.baidu.com/office/drawing/2023/templateData">
-            <bd:templateData xmlns="" xmlns:bd="http://schemas.baidu.com/office/drawing/2023/templateData">eyJfdGVtcGxhdGVEYXRhIjp7ImxpbmVDb3VudCI6IjUiLCJ3b3JkQ291bnQiOiI0In0sInRhZyI6Im5vRWRpdCJ9</bd:templateData>
-          </p:ext>
-        </p:extLst>
-      </p:sp>
-      <p:sp>
-        <p:nvSpPr>
-          <p:cNvPr id="11" name="AutoShape 11"/>
-          <p:cNvSpPr/>
-          <p:nvPr/>
-        </p:nvSpPr>
-        <p:spPr>
-          <a:xfrm>
-            <a:off x="3345208" y="4519628"/>
-            <a:ext cx="838202" cy="838202"/>
-          </a:xfrm>
-          <a:prstGeom prst="ellipse">
-            <a:avLst/>
-          </a:prstGeom>
-          <a:solidFill>
-            <a:schemeClr val="accent1">
-              <a:alpha val="100000"/>
-            </a:schemeClr>
-          </a:solidFill>
-          <a:ln/>
-        </p:spPr>
-        <p:txBody>
-          <a:bodyPr/>
-          <a:lstStyle/>
-          <a:p>
-            <a:endParaRPr lang="zh-CN" altLang="en-US"/>
-          </a:p>
-        </p:txBody>
-        <p:extLst>
-          <p:ext uri="http://schemas.baidu.com/office/drawing/2023/templateData">
-            <bd:templateData xmlns="" xmlns:bd="http://schemas.baidu.com/office/drawing/2023/templateData">eyJ0YWciOiJub0VkaXQifQ==</bd:templateData>
-          </p:ext>
-        </p:extLst>
-      </p:sp>
-      <p:sp>
-        <p:nvSpPr>
-          <p:cNvPr id="12" name="AutoShape 12"/>
-          <p:cNvSpPr/>
-          <p:nvPr/>
-        </p:nvSpPr>
-        <p:spPr>
-          <a:xfrm>
-            <a:off x="1012773" y="4911322"/>
-            <a:ext cx="838202" cy="838202"/>
-          </a:xfrm>
-          <a:prstGeom prst="ellipse">
-            <a:avLst/>
-          </a:prstGeom>
-          <a:solidFill>
-            <a:schemeClr val="accent1">
-              <a:alpha val="100000"/>
-            </a:schemeClr>
-          </a:solidFill>
-          <a:ln/>
-        </p:spPr>
-        <p:txBody>
-          <a:bodyPr/>
-          <a:lstStyle/>
-          <a:p>
-            <a:endParaRPr lang="zh-CN" altLang="en-US"/>
-          </a:p>
-        </p:txBody>
-        <p:extLst>
-          <p:ext uri="http://schemas.baidu.com/office/drawing/2023/templateData">
-            <bd:templateData xmlns="" xmlns:bd="http://schemas.baidu.com/office/drawing/2023/templateData">eyJ0YWciOiJub0VkaXQifQ==</bd:templateData>
-          </p:ext>
-        </p:extLst>
-      </p:sp>
-      <p:sp>
-        <p:nvSpPr>
-          <p:cNvPr id="13" name="AutoShape 13"/>
-          <p:cNvSpPr/>
-          <p:nvPr/>
-        </p:nvSpPr>
-        <p:spPr>
-          <a:xfrm>
-            <a:off x="8010077" y="4519628"/>
-            <a:ext cx="838202" cy="838202"/>
-          </a:xfrm>
-          <a:prstGeom prst="ellipse">
-            <a:avLst/>
-          </a:prstGeom>
-          <a:solidFill>
-            <a:schemeClr val="accent1">
-              <a:alpha val="100000"/>
-            </a:schemeClr>
-          </a:solidFill>
-          <a:ln/>
-        </p:spPr>
-        <p:txBody>
-          <a:bodyPr/>
-          <a:lstStyle/>
-          <a:p>
-            <a:endParaRPr lang="zh-CN" altLang="en-US"/>
-          </a:p>
-        </p:txBody>
-        <p:extLst>
-          <p:ext uri="http://schemas.baidu.com/office/drawing/2023/templateData">
-            <bd:templateData xmlns="" xmlns:bd="http://schemas.baidu.com/office/drawing/2023/templateData">eyJ0YWciOiJub0VkaXQifQ==</bd:templateData>
-          </p:ext>
-        </p:extLst>
-      </p:sp>
-      <p:sp>
-        <p:nvSpPr>
-          <p:cNvPr id="14" name="AutoShape 14"/>
-          <p:cNvSpPr/>
-          <p:nvPr/>
-        </p:nvSpPr>
-        <p:spPr>
-          <a:xfrm>
-            <a:off x="10342511" y="4911322"/>
-            <a:ext cx="838202" cy="838202"/>
-          </a:xfrm>
-          <a:prstGeom prst="ellipse">
-            <a:avLst/>
-          </a:prstGeom>
-          <a:solidFill>
-            <a:schemeClr val="accent1">
-              <a:alpha val="100000"/>
-            </a:schemeClr>
-          </a:solidFill>
-          <a:ln/>
-        </p:spPr>
-        <p:txBody>
-          <a:bodyPr/>
-          <a:lstStyle/>
-          <a:p>
-            <a:endParaRPr lang="zh-CN" altLang="en-US"/>
-          </a:p>
-        </p:txBody>
-        <p:extLst>
-          <p:ext uri="http://schemas.baidu.com/office/drawing/2023/templateData">
-            <bd:templateData xmlns="" xmlns:bd="http://schemas.baidu.com/office/drawing/2023/templateData">eyJ0YWciOiJub0VkaXQifQ==</bd:templateData>
-          </p:ext>
-        </p:extLst>
-      </p:sp>
-      <p:sp>
-        <p:nvSpPr>
-          <p:cNvPr id="15" name="Freeform 15"/>
-          <p:cNvSpPr/>
-          <p:nvPr/>
-        </p:nvSpPr>
-        <p:spPr>
-          <a:xfrm>
-            <a:off x="1307454" y="5156412"/>
-            <a:ext cx="285637" cy="340022"/>
-          </a:xfrm>
-          <a:custGeom>
-            <a:avLst/>
-            <a:gdLst/>
-            <a:ahLst/>
-            <a:cxnLst/>
-            <a:rect l="l" t="t" r="r" b="b"/>
-            <a:pathLst>
-              <a:path w="401" h="478">
-                <a:moveTo>
-                  <a:pt x="401" y="89"/>
-                </a:moveTo>
-                <a:lnTo>
-                  <a:pt x="401" y="293"/>
-                </a:lnTo>
-                <a:cubicBezTo>
-                  <a:pt x="292" y="212"/>
-                  <a:pt x="182" y="375"/>
-                  <a:pt x="73" y="293"/>
-                </a:cubicBezTo>
-                <a:lnTo>
-                  <a:pt x="73" y="89"/>
-                </a:lnTo>
-                <a:cubicBezTo>
-                  <a:pt x="182" y="171"/>
-                  <a:pt x="292" y="7"/>
-                  <a:pt x="401" y="89"/>
-                </a:cubicBezTo>
-                <a:close/>
-              </a:path>
-              <a:path w="401" h="478">
-                <a:moveTo>
-                  <a:pt x="39" y="0"/>
-                </a:moveTo>
-                <a:cubicBezTo>
-                  <a:pt x="18" y="0"/>
-                  <a:pt x="0" y="17"/>
-                  <a:pt x="0" y="39"/>
-                </a:cubicBezTo>
-                <a:cubicBezTo>
-                  <a:pt x="0" y="54"/>
-                  <a:pt x="9" y="68"/>
-                  <a:pt x="23" y="74"/>
-                </a:cubicBezTo>
-                <a:lnTo>
-                  <a:pt x="23" y="478"/>
-                </a:lnTo>
-                <a:lnTo>
-                  <a:pt x="56" y="478"/>
-                </a:lnTo>
-                <a:lnTo>
-                  <a:pt x="56" y="74"/>
-                </a:lnTo>
-                <a:cubicBezTo>
-                  <a:pt x="69" y="68"/>
-                  <a:pt x="78" y="54"/>
-                  <a:pt x="78" y="39"/>
-                </a:cubicBezTo>
-                <a:cubicBezTo>
-                  <a:pt x="78" y="17"/>
-                  <a:pt x="61" y="0"/>
-                  <a:pt x="39" y="0"/>
-                </a:cubicBezTo>
-              </a:path>
-            </a:pathLst>
-          </a:custGeom>
-          <a:solidFill>
-            <a:srgbClr val="FFFFFF">
-              <a:alpha val="100000"/>
-            </a:srgbClr>
-          </a:solidFill>
-          <a:ln/>
-        </p:spPr>
-        <p:txBody>
-          <a:bodyPr/>
-          <a:lstStyle/>
-          <a:p>
-            <a:endParaRPr lang="zh-CN" altLang="en-US"/>
-          </a:p>
-        </p:txBody>
-        <p:extLst>
-          <p:ext uri="http://schemas.baidu.com/office/drawing/2023/templateData">
-            <bd:templateData xmlns="" xmlns:bd="http://schemas.baidu.com/office/drawing/2023/templateData">eyJ0YWciOiJub0VkaXQifQ==</bd:templateData>
-          </p:ext>
-        </p:extLst>
-      </p:sp>
-      <p:sp>
-        <p:nvSpPr>
-          <p:cNvPr id="16" name="Freeform 16"/>
-          <p:cNvSpPr/>
-          <p:nvPr/>
-        </p:nvSpPr>
-        <p:spPr>
-          <a:xfrm>
-            <a:off x="10656484" y="5175462"/>
-            <a:ext cx="285637" cy="340022"/>
-          </a:xfrm>
-          <a:custGeom>
-            <a:avLst/>
-            <a:gdLst/>
-            <a:ahLst/>
-            <a:cxnLst/>
-            <a:rect l="l" t="t" r="r" b="b"/>
-            <a:pathLst>
-              <a:path w="401" h="478">
-                <a:moveTo>
-                  <a:pt x="401" y="89"/>
-                </a:moveTo>
-                <a:lnTo>
-                  <a:pt x="401" y="293"/>
-                </a:lnTo>
-                <a:cubicBezTo>
-                  <a:pt x="292" y="212"/>
-                  <a:pt x="182" y="375"/>
-                  <a:pt x="73" y="293"/>
-                </a:cubicBezTo>
-                <a:lnTo>
-                  <a:pt x="73" y="89"/>
-                </a:lnTo>
-                <a:cubicBezTo>
-                  <a:pt x="182" y="171"/>
-                  <a:pt x="292" y="7"/>
-                  <a:pt x="401" y="89"/>
-                </a:cubicBezTo>
-                <a:close/>
-              </a:path>
-              <a:path w="401" h="478">
-                <a:moveTo>
-                  <a:pt x="39" y="0"/>
-                </a:moveTo>
-                <a:cubicBezTo>
-                  <a:pt x="18" y="0"/>
-                  <a:pt x="0" y="17"/>
-                  <a:pt x="0" y="39"/>
-                </a:cubicBezTo>
-                <a:cubicBezTo>
-                  <a:pt x="0" y="54"/>
-                  <a:pt x="9" y="68"/>
-                  <a:pt x="23" y="74"/>
-                </a:cubicBezTo>
-                <a:lnTo>
-                  <a:pt x="23" y="478"/>
-                </a:lnTo>
-                <a:lnTo>
-                  <a:pt x="56" y="478"/>
-                </a:lnTo>
-                <a:lnTo>
-                  <a:pt x="56" y="74"/>
-                </a:lnTo>
-                <a:cubicBezTo>
-                  <a:pt x="69" y="68"/>
-                  <a:pt x="78" y="54"/>
-                  <a:pt x="78" y="39"/>
-                </a:cubicBezTo>
-                <a:cubicBezTo>
-                  <a:pt x="78" y="17"/>
-                  <a:pt x="61" y="0"/>
-                  <a:pt x="39" y="0"/>
-                </a:cubicBezTo>
-              </a:path>
-            </a:pathLst>
-          </a:custGeom>
-          <a:solidFill>
-            <a:srgbClr val="FFFFFF">
-              <a:alpha val="100000"/>
-            </a:srgbClr>
-          </a:solidFill>
-          <a:ln/>
-        </p:spPr>
-        <p:txBody>
-          <a:bodyPr/>
-          <a:lstStyle/>
-          <a:p>
-            <a:endParaRPr lang="zh-CN" altLang="en-US"/>
-          </a:p>
-        </p:txBody>
-        <p:extLst>
-          <p:ext uri="http://schemas.baidu.com/office/drawing/2023/templateData">
-            <bd:templateData xmlns="" xmlns:bd="http://schemas.baidu.com/office/drawing/2023/templateData">eyJ0YWciOiJub0VkaXQifQ==</bd:templateData>
-          </p:ext>
-        </p:extLst>
-      </p:sp>
-      <p:sp>
-        <p:nvSpPr>
-          <p:cNvPr id="17" name="Freeform 17"/>
-          <p:cNvSpPr/>
-          <p:nvPr/>
-        </p:nvSpPr>
-        <p:spPr>
-          <a:xfrm>
-            <a:off x="3552466" y="4739614"/>
-            <a:ext cx="423687" cy="398229"/>
-          </a:xfrm>
-          <a:custGeom>
-            <a:avLst/>
-            <a:gdLst/>
-            <a:ahLst/>
-            <a:cxnLst/>
-            <a:rect l="l" t="t" r="r" b="b"/>
-            <a:pathLst>
-              <a:path w="304800" h="304800">
-                <a:moveTo>
-                  <a:pt x="147409" y="185366"/>
-                </a:moveTo>
-                <a:lnTo>
-                  <a:pt x="66913" y="266338"/>
-                </a:lnTo>
-                <a:lnTo>
-                  <a:pt x="66913" y="47987"/>
-                </a:lnTo>
-                <a:lnTo>
-                  <a:pt x="228371" y="47987"/>
-                </a:lnTo>
-                <a:lnTo>
-                  <a:pt x="228371" y="266338"/>
-                </a:lnTo>
-                <a:lnTo>
-                  <a:pt x="147409" y="185366"/>
-                </a:lnTo>
-              </a:path>
-            </a:pathLst>
-          </a:custGeom>
-          <a:solidFill>
-            <a:srgbClr val="F9F4F4">
-              <a:alpha val="100000"/>
-            </a:srgbClr>
-          </a:solidFill>
-          <a:ln/>
-        </p:spPr>
-        <p:txBody>
-          <a:bodyPr/>
-          <a:lstStyle/>
-          <a:p>
-            <a:endParaRPr lang="zh-CN" altLang="en-US"/>
-          </a:p>
-        </p:txBody>
-        <p:extLst>
-          <p:ext uri="http://schemas.baidu.com/office/drawing/2023/templateData">
-            <bd:templateData xmlns="" xmlns:bd="http://schemas.baidu.com/office/drawing/2023/templateData">eyJ0YWciOiJub0VkaXQifQ==</bd:templateData>
-          </p:ext>
-        </p:extLst>
-      </p:sp>
-      <p:sp>
-        <p:nvSpPr>
-          <p:cNvPr id="18" name="Freeform 18"/>
-          <p:cNvSpPr/>
-          <p:nvPr/>
-        </p:nvSpPr>
-        <p:spPr>
-          <a:xfrm>
-            <a:off x="8245909" y="4740783"/>
-            <a:ext cx="423687" cy="398229"/>
-          </a:xfrm>
-          <a:custGeom>
-            <a:avLst/>
-            <a:gdLst/>
-            <a:ahLst/>
-            <a:cxnLst/>
-            <a:rect l="l" t="t" r="r" b="b"/>
-            <a:pathLst>
-              <a:path w="304800" h="304800">
-                <a:moveTo>
-                  <a:pt x="147409" y="185366"/>
-                </a:moveTo>
-                <a:lnTo>
-                  <a:pt x="66913" y="266338"/>
-                </a:lnTo>
-                <a:lnTo>
-                  <a:pt x="66913" y="47987"/>
-                </a:lnTo>
-                <a:lnTo>
-                  <a:pt x="228371" y="47987"/>
-                </a:lnTo>
-                <a:lnTo>
-                  <a:pt x="228371" y="266338"/>
-                </a:lnTo>
-                <a:lnTo>
-                  <a:pt x="147409" y="185366"/>
-                </a:lnTo>
-              </a:path>
-            </a:pathLst>
-          </a:custGeom>
-          <a:solidFill>
-            <a:srgbClr val="F9F6F6">
-              <a:alpha val="100000"/>
-            </a:srgbClr>
-          </a:solidFill>
-          <a:ln/>
-        </p:spPr>
-        <p:txBody>
-          <a:bodyPr/>
-          <a:lstStyle/>
-          <a:p>
-            <a:endParaRPr lang="zh-CN" altLang="en-US"/>
-          </a:p>
-        </p:txBody>
-        <p:extLst>
-          <p:ext uri="http://schemas.baidu.com/office/drawing/2023/templateData">
-            <bd:templateData xmlns="" xmlns:bd="http://schemas.baidu.com/office/drawing/2023/templateData">eyJ0YWciOiJub0VkaXQifQ==</bd:templateData>
-          </p:ext>
-        </p:extLst>
-      </p:sp>
-      <p:sp>
-        <p:nvSpPr>
-          <p:cNvPr id="19" name="Freeform 19"/>
-          <p:cNvSpPr/>
-          <p:nvPr/>
-        </p:nvSpPr>
-        <p:spPr>
-          <a:xfrm>
-            <a:off x="5906295" y="4594017"/>
-            <a:ext cx="423687" cy="398229"/>
-          </a:xfrm>
-          <a:custGeom>
-            <a:avLst/>
-            <a:gdLst/>
-            <a:ahLst/>
-            <a:cxnLst/>
-            <a:rect l="l" t="t" r="r" b="b"/>
-            <a:pathLst>
-              <a:path w="304800" h="304800">
-                <a:moveTo>
-                  <a:pt x="147409" y="185366"/>
-                </a:moveTo>
-                <a:lnTo>
-                  <a:pt x="66913" y="266338"/>
-                </a:lnTo>
-                <a:lnTo>
-                  <a:pt x="66913" y="47987"/>
-                </a:lnTo>
-                <a:lnTo>
-                  <a:pt x="228371" y="47987"/>
-                </a:lnTo>
-                <a:lnTo>
-                  <a:pt x="228371" y="266338"/>
-                </a:lnTo>
-                <a:lnTo>
-                  <a:pt x="147409" y="185366"/>
-                </a:lnTo>
-              </a:path>
-            </a:pathLst>
-          </a:custGeom>
-          <a:solidFill>
-            <a:srgbClr val="F9F6F6">
-              <a:alpha val="100000"/>
-            </a:srgbClr>
-          </a:solidFill>
-          <a:ln/>
-        </p:spPr>
-        <p:txBody>
-          <a:bodyPr/>
-          <a:lstStyle/>
-          <a:p>
-            <a:endParaRPr lang="zh-CN" altLang="en-US"/>
-          </a:p>
-        </p:txBody>
-        <p:extLst>
-          <p:ext uri="http://schemas.baidu.com/office/drawing/2023/templateData">
-            <bd:templateData xmlns="" xmlns:bd="http://schemas.baidu.com/office/drawing/2023/templateData">eyJ0YWciOiJub0VkaXQifQ==</bd:templateData>
-          </p:ext>
-        </p:extLst>
-      </p:sp>
-      <p:sp>
-        <p:nvSpPr>
-          <p:cNvPr id="20" name="TextBox 20"/>
-          <p:cNvSpPr txBox="1"/>
-          <p:nvPr/>
-        </p:nvSpPr>
-        <p:spPr>
-          <a:xfrm>
-            <a:off x="912572" y="1718641"/>
-            <a:ext cx="10455834" cy="1868121"/>
+          <a:ln>
+            <a:noFill/>
+          </a:ln>
+        </p:spPr>
+        <p:style>
+          <a:lnRef idx="1">
+            <a:schemeClr val="accent1"/>
+          </a:lnRef>
+          <a:fillRef idx="3">
+            <a:schemeClr val="accent1"/>
+          </a:fillRef>
+          <a:effectRef idx="2">
+            <a:schemeClr val="accent1"/>
+          </a:effectRef>
+          <a:fontRef idx="minor">
+            <a:schemeClr val="lt1"/>
+          </a:fontRef>
+        </p:style>
+        <p:txBody>
+          <a:bodyPr rtlCol="0" anchor="ctr"/>
+          <a:lstStyle/>
+          <a:p>
+            <a:pPr algn="ctr"/>
+          </a:p>
+        </p:txBody>
+      </p:sp>
+      <p:pic>
+        <p:nvPicPr>
+          <p:cNvPr id="4" name="Picture 3" descr="profile_photo.jpg"/>
+          <p:cNvPicPr>
+            <a:picLocks noChangeAspect="1"/>
+          </p:cNvPicPr>
+          <p:nvPr/>
+        </p:nvPicPr>
+        <p:blipFill>
+          <a:blip r:embed="rId2"/>
+          <a:stretch>
+            <a:fillRect/>
+          </a:stretch>
+        </p:blipFill>
+        <p:spPr>
+          <a:xfrm>
+            <a:off x="990000" y="1260000"/>
+            <a:ext cx="2520000" cy="3780000"/>
           </a:xfrm>
           <a:prstGeom prst="rect">
             <a:avLst/>
           </a:prstGeom>
-          <a:ln/>
-        </p:spPr>
-        <p:txBody>
-          <a:bodyPr vert="horz" wrap="square" lIns="66008" tIns="33052" rIns="66008" bIns="33052" rtlCol="0" anchor="ctr" anchorCtr="0">
-            <a:noAutofit/>
+        </p:spPr>
+      </p:pic>
+      <p:sp>
+        <p:nvSpPr>
+          <p:cNvPr id="5" name="TextBox 4"/>
+          <p:cNvSpPr txBox="1"/>
+          <p:nvPr/>
+        </p:nvSpPr>
+        <p:spPr>
+          <a:xfrm>
+            <a:off x="540000" y="5328000"/>
+            <a:ext cx="3420000" cy="432000"/>
+          </a:xfrm>
+          <a:prstGeom prst="rect">
+            <a:avLst/>
+          </a:prstGeom>
+          <a:noFill/>
+        </p:spPr>
+        <p:txBody>
+          <a:bodyPr wrap="square">
+            <a:spAutoFit/>
           </a:bodyPr>
           <a:lstStyle/>
           <a:p>
-            <a:pPr algn="l">
-              <a:lnSpc>
-                <a:spcPct val="180000"/>
-              </a:lnSpc>
+            <a:pPr algn="ctr"/>
+            <a:r>
+              <a:rPr sz="2800" b="1">
+                <a:solidFill>
+                  <a:srgbClr val="FFFFFF"/>
+                </a:solidFill>
+                <a:latin typeface="Microsoft YaHei"/>
+              </a:rPr>
+              <a:t>冯亦根</a:t>
+            </a:r>
+          </a:p>
+        </p:txBody>
+      </p:sp>
+      <p:sp>
+        <p:nvSpPr>
+          <p:cNvPr id="6" name="TextBox 5"/>
+          <p:cNvSpPr txBox="1"/>
+          <p:nvPr/>
+        </p:nvSpPr>
+        <p:spPr>
+          <a:xfrm>
+            <a:off x="360000" y="144000"/>
+            <a:ext cx="3780000" cy="360000"/>
+          </a:xfrm>
+          <a:prstGeom prst="rect">
+            <a:avLst/>
+          </a:prstGeom>
+          <a:noFill/>
+        </p:spPr>
+        <p:txBody>
+          <a:bodyPr wrap="none">
+            <a:spAutoFit/>
+          </a:bodyPr>
+          <a:lstStyle/>
+          <a:p>
+            <a:pPr algn="ctr"/>
+            <a:r>
+              <a:rPr sz="2600" b="1">
+                <a:solidFill>
+                  <a:srgbClr val="FFFFFF"/>
+                </a:solidFill>
+                <a:latin typeface="Microsoft YaHei"/>
+              </a:rPr>
+              <a:t>个人简介</a:t>
+            </a:r>
+          </a:p>
+        </p:txBody>
+      </p:sp>
+      <p:sp>
+        <p:nvSpPr>
+          <p:cNvPr id="7" name="TextBox 6"/>
+          <p:cNvSpPr txBox="1"/>
+          <p:nvPr/>
+        </p:nvSpPr>
+        <p:spPr>
+          <a:xfrm>
+            <a:off x="4860000" y="288000"/>
+            <a:ext cx="7020000" cy="6300000"/>
+          </a:xfrm>
+          <a:prstGeom prst="rect">
+            <a:avLst/>
+          </a:prstGeom>
+          <a:noFill/>
+        </p:spPr>
+        <p:txBody>
+          <a:bodyPr wrap="square">
+            <a:spAutoFit/>
+          </a:bodyPr>
+          <a:lstStyle/>
+          <a:p>
+            <a:pPr>
+              <a:spcBef>
+                <a:spcPts val="800"/>
+              </a:spcBef>
+              <a:spcAft>
+                <a:spcPts val="200"/>
+              </a:spcAft>
             </a:pPr>
             <a:r>
-              <a:rPr lang="en-US" sz="1500">
+              <a:rPr sz="1400" b="1">
                 <a:solidFill>
-                  <a:srgbClr val="FFFFFF">
-                    <a:alpha val="100000"/>
-                  </a:srgbClr>
+                  <a:srgbClr val="2E5C8A"/>
                 </a:solidFill>
-                <a:latin typeface="Noto Sans SC"/>
-                <a:ea typeface="Noto Sans SC"/>
-                <a:cs typeface="Noto Sans SC"/>
+                <a:latin typeface="Microsoft YaHei"/>
               </a:rPr>
-              <a:t>大赛核心判断——制胜逻辑不再是"谁的武器更强" 而是"谁适应得更快" DTB Model由四大组件构成 作战引擎驱动ASDA闭环仿真推演 战斗网络聚合传感器分析赢得透明战场 应用商店实现能力模块化按需加载 即插即用通过gRPC标准化接口接入异构设备 ASDA闭环 行动-感知-决策-适应 是核心运行机制 体现适应优于压制理念</a:t>
+              <a:t>教育背景</a:t>
             </a:r>
           </a:p>
-        </p:txBody>
-        <p:extLst>
-          <p:ext uri="http://schemas.baidu.com/office/drawing/2023/templateData">
-            <bd:templateData xmlns="" xmlns:bd="http://schemas.baidu.com/office/drawing/2023/templateData">eyJfdGVtcGxhdGVEYXRhIjp7ImNvbnRlbnRUeXBlIjoiJHRleHQiLCJsaW5lQ291bnQiOiI0Iiwid29yZENvdW50IjoiNTMifSwidGFnIjoiJHRleHQifQ==</bd:templateData>
-          </p:ext>
-        </p:extLst>
+          <a:p>
+            <a:pPr lvl="1">
+              <a:spcAft>
+                <a:spcPts val="100"/>
+              </a:spcAft>
+            </a:pPr>
+            <a:r>
+              <a:rPr sz="1100">
+                <a:solidFill>
+                  <a:srgbClr val="2D2D2D"/>
+                </a:solidFill>
+                <a:latin typeface="Microsoft YaHei"/>
+              </a:rPr>
+              <a:t>浙江大学 计算机通信工程 本科</a:t>
+            </a:r>
+          </a:p>
+          <a:p>
+            <a:pPr>
+              <a:spcBef>
+                <a:spcPts val="800"/>
+              </a:spcBef>
+              <a:spcAft>
+                <a:spcPts val="200"/>
+              </a:spcAft>
+            </a:pPr>
+            <a:r>
+              <a:rPr sz="1400" b="1">
+                <a:solidFill>
+                  <a:srgbClr val="2E5C8A"/>
+                </a:solidFill>
+                <a:latin typeface="Microsoft YaHei"/>
+              </a:rPr>
+              <a:t>学术任职</a:t>
+            </a:r>
+          </a:p>
+          <a:p>
+            <a:pPr lvl="1">
+              <a:spcAft>
+                <a:spcPts val="100"/>
+              </a:spcAft>
+            </a:pPr>
+            <a:r>
+              <a:rPr sz="1100">
+                <a:solidFill>
+                  <a:srgbClr val="2D2D2D"/>
+                </a:solidFill>
+                <a:latin typeface="Microsoft YaHei"/>
+              </a:rPr>
+              <a:t>浙江邮电职业技术学院 人工智能学术委员会主任</a:t>
+            </a:r>
+          </a:p>
+          <a:p>
+            <a:pPr lvl="1">
+              <a:spcAft>
+                <a:spcPts val="100"/>
+              </a:spcAft>
+            </a:pPr>
+            <a:r>
+              <a:rPr sz="1100">
+                <a:solidFill>
+                  <a:srgbClr val="2D2D2D"/>
+                </a:solidFill>
+                <a:latin typeface="Microsoft YaHei"/>
+              </a:rPr>
+              <a:t>浙江省首批产业教授</a:t>
+            </a:r>
+          </a:p>
+          <a:p>
+            <a:pPr>
+              <a:spcBef>
+                <a:spcPts val="800"/>
+              </a:spcBef>
+              <a:spcAft>
+                <a:spcPts val="200"/>
+              </a:spcAft>
+            </a:pPr>
+            <a:r>
+              <a:rPr sz="1400" b="1">
+                <a:solidFill>
+                  <a:srgbClr val="2E5C8A"/>
+                </a:solidFill>
+                <a:latin typeface="Microsoft YaHei"/>
+              </a:rPr>
+              <a:t>专家库入库</a:t>
+            </a:r>
+          </a:p>
+          <a:p>
+            <a:pPr lvl="1">
+              <a:spcAft>
+                <a:spcPts val="100"/>
+              </a:spcAft>
+            </a:pPr>
+            <a:r>
+              <a:rPr sz="1100">
+                <a:solidFill>
+                  <a:srgbClr val="2D2D2D"/>
+                </a:solidFill>
+                <a:latin typeface="Microsoft YaHei"/>
+              </a:rPr>
+              <a:t>浙江省科技厅入库科技专家</a:t>
+            </a:r>
+          </a:p>
+          <a:p>
+            <a:pPr lvl="1">
+              <a:spcAft>
+                <a:spcPts val="100"/>
+              </a:spcAft>
+            </a:pPr>
+            <a:r>
+              <a:rPr sz="1100">
+                <a:solidFill>
+                  <a:srgbClr val="2D2D2D"/>
+                </a:solidFill>
+                <a:latin typeface="Microsoft YaHei"/>
+              </a:rPr>
+              <a:t>浙江省经信厅新一代通信技术入库专家</a:t>
+            </a:r>
+          </a:p>
+          <a:p>
+            <a:pPr lvl="1">
+              <a:spcAft>
+                <a:spcPts val="100"/>
+              </a:spcAft>
+            </a:pPr>
+            <a:r>
+              <a:rPr sz="1100">
+                <a:solidFill>
+                  <a:srgbClr val="2D2D2D"/>
+                </a:solidFill>
+                <a:latin typeface="Microsoft YaHei"/>
+              </a:rPr>
+              <a:t>杭州市科技局入库专家</a:t>
+            </a:r>
+          </a:p>
+          <a:p>
+            <a:pPr lvl="1">
+              <a:spcAft>
+                <a:spcPts val="100"/>
+              </a:spcAft>
+            </a:pPr>
+            <a:r>
+              <a:rPr sz="1100">
+                <a:solidFill>
+                  <a:srgbClr val="2D2D2D"/>
+                </a:solidFill>
+                <a:latin typeface="Microsoft YaHei"/>
+              </a:rPr>
+              <a:t>浙江省人工智能专家服务团专家</a:t>
+            </a:r>
+          </a:p>
+          <a:p>
+            <a:pPr lvl="1">
+              <a:spcAft>
+                <a:spcPts val="100"/>
+              </a:spcAft>
+            </a:pPr>
+            <a:r>
+              <a:rPr sz="1100">
+                <a:solidFill>
+                  <a:srgbClr val="2D2D2D"/>
+                </a:solidFill>
+                <a:latin typeface="Microsoft YaHei"/>
+              </a:rPr>
+              <a:t>浙江省智慧城市产业智库专家</a:t>
+            </a:r>
+          </a:p>
+          <a:p>
+            <a:pPr>
+              <a:spcBef>
+                <a:spcPts val="800"/>
+              </a:spcBef>
+              <a:spcAft>
+                <a:spcPts val="200"/>
+              </a:spcAft>
+            </a:pPr>
+            <a:r>
+              <a:rPr sz="1400" b="1">
+                <a:solidFill>
+                  <a:srgbClr val="2E5C8A"/>
+                </a:solidFill>
+                <a:latin typeface="Microsoft YaHei"/>
+              </a:rPr>
+              <a:t>专业资质</a:t>
+            </a:r>
+          </a:p>
+          <a:p>
+            <a:pPr lvl="1">
+              <a:spcAft>
+                <a:spcPts val="100"/>
+              </a:spcAft>
+            </a:pPr>
+            <a:r>
+              <a:rPr sz="1100">
+                <a:solidFill>
+                  <a:srgbClr val="2D2D2D"/>
+                </a:solidFill>
+                <a:latin typeface="Microsoft YaHei"/>
+              </a:rPr>
+              <a:t>工信部认证首席数据官</a:t>
+            </a:r>
+          </a:p>
+          <a:p>
+            <a:pPr lvl="1">
+              <a:spcAft>
+                <a:spcPts val="100"/>
+              </a:spcAft>
+            </a:pPr>
+            <a:r>
+              <a:rPr sz="1100">
+                <a:solidFill>
+                  <a:srgbClr val="2D2D2D"/>
+                </a:solidFill>
+                <a:latin typeface="Microsoft YaHei"/>
+              </a:rPr>
+              <a:t>首席数据资产运营官</a:t>
+            </a:r>
+          </a:p>
+          <a:p>
+            <a:pPr lvl="1">
+              <a:spcAft>
+                <a:spcPts val="100"/>
+              </a:spcAft>
+            </a:pPr>
+            <a:r>
+              <a:rPr sz="1100">
+                <a:solidFill>
+                  <a:srgbClr val="2D2D2D"/>
+                </a:solidFill>
+                <a:latin typeface="Microsoft YaHei"/>
+              </a:rPr>
+              <a:t>高级工程师</a:t>
+            </a:r>
+          </a:p>
+          <a:p>
+            <a:pPr>
+              <a:spcBef>
+                <a:spcPts val="800"/>
+              </a:spcBef>
+              <a:spcAft>
+                <a:spcPts val="200"/>
+              </a:spcAft>
+            </a:pPr>
+            <a:r>
+              <a:rPr sz="1400" b="1">
+                <a:solidFill>
+                  <a:srgbClr val="2E5C8A"/>
+                </a:solidFill>
+                <a:latin typeface="Microsoft YaHei"/>
+              </a:rPr>
+              <a:t>行业委员</a:t>
+            </a:r>
+          </a:p>
+          <a:p>
+            <a:pPr lvl="1">
+              <a:spcAft>
+                <a:spcPts val="100"/>
+              </a:spcAft>
+            </a:pPr>
+            <a:r>
+              <a:rPr sz="1100">
+                <a:solidFill>
+                  <a:srgbClr val="2D2D2D"/>
+                </a:solidFill>
+                <a:latin typeface="Microsoft YaHei"/>
+              </a:rPr>
+              <a:t>杭州数据交易所数据要素专业委员会委员</a:t>
+            </a:r>
+          </a:p>
+          <a:p>
+            <a:pPr lvl="1">
+              <a:spcAft>
+                <a:spcPts val="100"/>
+              </a:spcAft>
+            </a:pPr>
+            <a:r>
+              <a:rPr sz="1100">
+                <a:solidFill>
+                  <a:srgbClr val="2D2D2D"/>
+                </a:solidFill>
+                <a:latin typeface="Microsoft YaHei"/>
+              </a:rPr>
+              <a:t>浙江省企业促进会数据治理委员会委员</a:t>
+            </a:r>
+          </a:p>
+          <a:p>
+            <a:pPr>
+              <a:spcBef>
+                <a:spcPts val="800"/>
+              </a:spcBef>
+              <a:spcAft>
+                <a:spcPts val="200"/>
+              </a:spcAft>
+            </a:pPr>
+            <a:r>
+              <a:rPr sz="1400" b="1">
+                <a:solidFill>
+                  <a:srgbClr val="2E5C8A"/>
+                </a:solidFill>
+                <a:latin typeface="Microsoft YaHei"/>
+              </a:rPr>
+              <a:t>低空经济</a:t>
+            </a:r>
+          </a:p>
+          <a:p>
+            <a:pPr lvl="1">
+              <a:spcAft>
+                <a:spcPts val="100"/>
+              </a:spcAft>
+            </a:pPr>
+            <a:r>
+              <a:rPr sz="1100">
+                <a:solidFill>
+                  <a:srgbClr val="2D2D2D"/>
+                </a:solidFill>
+                <a:latin typeface="Microsoft YaHei"/>
+              </a:rPr>
+              <a:t>浙江省国际经济交流协会低空经济专委会常务副主任</a:t>
+            </a:r>
+          </a:p>
+          <a:p>
+            <a:pPr lvl="1">
+              <a:spcAft>
+                <a:spcPts val="100"/>
+              </a:spcAft>
+            </a:pPr>
+            <a:r>
+              <a:rPr sz="1100">
+                <a:solidFill>
+                  <a:srgbClr val="2D2D2D"/>
+                </a:solidFill>
+                <a:latin typeface="Microsoft YaHei"/>
+              </a:rPr>
+              <a:t>浙江省信息通信协会低空专委会顾问</a:t>
+            </a:r>
+          </a:p>
+        </p:txBody>
       </p:sp>
     </p:spTree>
   </p:cSld>
   <p:clrMapOvr>
     <a:masterClrMapping/>
   </p:clrMapOvr>
-  <p:extLst>
-    <p:ext uri="http://schemas.baidu.com/office/drawing/2023/templateData">
-      <bd:templateData xmlns="" xmlns:bd="http://schemas.baidu.com/office/drawing/2023/templateData">eyJtZCI6IiMjIOivt+i+k+WFpeacrOmhteagh+mimFxu6K+35Zyo5q2k5aSE6L6T5YWl5oKo55qE5q2j5paH5YaF5a6544CC5paH5a2X5Luj6KGo5oKo55qE5Li76aKY5oCd5oOz77yM6K+35Yqb5rGC566A5piO5Zyw6KGo6L6+5oKo55qE6KeC54K544CC5Y+v6YCC5bqm5Yig5YeP5paH5a2X5Lul56Gu5L+d5L+h5oGv55qE5riF5pmw5ZKM57K+56Gu5Lyg6L6+77yM5ZCM5pe25Lmf6KaB5YWz5rOo5paH5a2X55qE6YC76L6R5oCn5ZKM5p2h55CG5oCn77yM5Lul5Yqp5LqO5LuW5Lq65pu05rex5YWl55CG6Kej5ZKM5o6l5Y+X5oKo55qE6KeC54K544CCIiwidHBsaWQiOiI2OSIsInRwbE5hbWUiOiJ0aXRsZUNvbnRlbnRfeWFuZ2UxOCIsImVkaXRlZCI6ImZhbHNlIn0=</bd:templateData>
-    </p:ext>
-  </p:extLst>
 </p:sld>
 </file>
 
@@ -12158,6 +13723,947 @@
           <p:nvPr/>
         </p:nvSpPr>
         <p:spPr>
+          <a:xfrm>
+            <a:off x="476023" y="1469910"/>
+            <a:ext cx="11328932" cy="2365584"/>
+          </a:xfrm>
+          <a:prstGeom prst="roundRect">
+            <a:avLst>
+              <a:gd name="adj" fmla="val 16667"/>
+            </a:avLst>
+          </a:prstGeom>
+          <a:solidFill>
+            <a:schemeClr val="accent1">
+              <a:alpha val="100000"/>
+            </a:schemeClr>
+          </a:solidFill>
+          <a:ln/>
+        </p:spPr>
+        <p:txBody>
+          <a:bodyPr/>
+          <a:lstStyle/>
+          <a:p>
+            <a:endParaRPr lang="zh-CN" altLang="en-US"/>
+          </a:p>
+        </p:txBody>
+        <p:extLst>
+          <p:ext uri="http://schemas.baidu.com/office/drawing/2023/templateData">
+            <bd:templateData xmlns="" xmlns:bd="http://schemas.baidu.com/office/drawing/2023/templateData">eyJ0YWciOiJub0VkaXQifQ==</bd:templateData>
+          </p:ext>
+        </p:extLst>
+      </p:sp>
+      <p:sp>
+        <p:nvSpPr>
+          <p:cNvPr id="3" name="TextBox 3"/>
+          <p:cNvSpPr txBox="1"/>
+          <p:nvPr/>
+        </p:nvSpPr>
+        <p:spPr>
+          <a:xfrm>
+            <a:off x="476023" y="265328"/>
+            <a:ext cx="11239500" cy="914400"/>
+          </a:xfrm>
+          <a:prstGeom prst="rect">
+            <a:avLst/>
+          </a:prstGeom>
+          <a:ln/>
+        </p:spPr>
+        <p:txBody>
+          <a:bodyPr vert="horz" wrap="square" lIns="123825" tIns="123825" rIns="57150" bIns="123825" rtlCol="0" anchor="ctr" anchorCtr="0">
+            <a:noAutofit/>
+          </a:bodyPr>
+          <a:lstStyle/>
+          <a:p>
+            <a:pPr>
+              <a:lnSpc>
+                <a:spcPct val="140000"/>
+              </a:lnSpc>
+            </a:pPr>
+            <a:r>
+              <a:rPr lang="en-US" sz="3000" b="1">
+                <a:solidFill>
+                  <a:schemeClr val="dk2">
+                    <a:alpha val="100000"/>
+                  </a:schemeClr>
+                </a:solidFill>
+                <a:latin typeface="OPPOSans B"/>
+                <a:ea typeface="OPPOSans B"/>
+                <a:cs typeface="OPPOSans B"/>
+              </a:rPr>
+              <a:t>赛事认知 DTB Model与ASDA闭环</a:t>
+            </a:r>
+          </a:p>
+        </p:txBody>
+        <p:extLst>
+          <p:ext uri="http://schemas.baidu.com/office/drawing/2023/templateData">
+            <bd:templateData xmlns="" xmlns:bd="http://schemas.baidu.com/office/drawing/2023/templateData">eyJfdGVtcGxhdGVEYXRhIjp7ImNvbnRlbnRUeXBlIjoiJHRpdGxlIiwibGluZUNvdW50IjoiMSIsIndvcmRDb3VudCI6IjI4In0sInRhZyI6IiR0aXRsZSJ9</bd:templateData>
+          </p:ext>
+        </p:extLst>
+      </p:sp>
+      <p:sp>
+        <p:nvSpPr>
+          <p:cNvPr id="4" name="Freeform 4"/>
+          <p:cNvSpPr/>
+          <p:nvPr/>
+        </p:nvSpPr>
+        <p:spPr>
+          <a:xfrm>
+            <a:off x="1458055" y="5431509"/>
+            <a:ext cx="9275890" cy="605612"/>
+          </a:xfrm>
+          <a:custGeom>
+            <a:avLst/>
+            <a:gdLst/>
+            <a:ahLst/>
+            <a:cxnLst/>
+            <a:rect l="l" t="t" r="r" b="b"/>
+            <a:pathLst>
+              <a:path w="8348133" h="561260">
+                <a:moveTo>
+                  <a:pt x="0" y="561260"/>
+                </a:moveTo>
+                <a:cubicBezTo>
+                  <a:pt x="2751667" y="-155585"/>
+                  <a:pt x="5545667" y="-212029"/>
+                  <a:pt x="8348133" y="544326"/>
+                </a:cubicBezTo>
+              </a:path>
+            </a:pathLst>
+          </a:custGeom>
+          <a:noFill/>
+          <a:ln w="12700">
+            <a:solidFill>
+              <a:schemeClr val="accent1">
+                <a:alpha val="100000"/>
+              </a:schemeClr>
+            </a:solidFill>
+            <a:prstDash val="solid"/>
+          </a:ln>
+        </p:spPr>
+        <p:txBody>
+          <a:bodyPr/>
+          <a:lstStyle/>
+          <a:p>
+            <a:endParaRPr lang="zh-CN" altLang="en-US"/>
+          </a:p>
+        </p:txBody>
+        <p:extLst>
+          <p:ext uri="http://schemas.baidu.com/office/drawing/2023/templateData">
+            <bd:templateData xmlns="" xmlns:bd="http://schemas.baidu.com/office/drawing/2023/templateData">eyJ0YWciOiJub0VkaXQifQ==</bd:templateData>
+          </p:ext>
+        </p:extLst>
+      </p:sp>
+      <p:sp>
+        <p:nvSpPr>
+          <p:cNvPr id="5" name="AutoShape 5"/>
+          <p:cNvSpPr/>
+          <p:nvPr/>
+        </p:nvSpPr>
+        <p:spPr>
+          <a:xfrm>
+            <a:off x="1335949" y="5929320"/>
+            <a:ext cx="191850" cy="191850"/>
+          </a:xfrm>
+          <a:prstGeom prst="ellipse">
+            <a:avLst/>
+          </a:prstGeom>
+          <a:solidFill>
+            <a:schemeClr val="accent1">
+              <a:alpha val="100000"/>
+            </a:schemeClr>
+          </a:solidFill>
+          <a:ln/>
+        </p:spPr>
+        <p:txBody>
+          <a:bodyPr/>
+          <a:lstStyle/>
+          <a:p>
+            <a:endParaRPr lang="zh-CN" altLang="en-US"/>
+          </a:p>
+        </p:txBody>
+        <p:extLst>
+          <p:ext uri="http://schemas.baidu.com/office/drawing/2023/templateData">
+            <bd:templateData xmlns="" xmlns:bd="http://schemas.baidu.com/office/drawing/2023/templateData">eyJ0YWciOiJub0VkaXQifQ==</bd:templateData>
+          </p:ext>
+        </p:extLst>
+      </p:sp>
+      <p:sp>
+        <p:nvSpPr>
+          <p:cNvPr id="6" name="AutoShape 6"/>
+          <p:cNvSpPr/>
+          <p:nvPr/>
+        </p:nvSpPr>
+        <p:spPr>
+          <a:xfrm>
+            <a:off x="3668384" y="5493547"/>
+            <a:ext cx="191850" cy="191850"/>
+          </a:xfrm>
+          <a:prstGeom prst="ellipse">
+            <a:avLst/>
+          </a:prstGeom>
+          <a:solidFill>
+            <a:schemeClr val="accent1">
+              <a:alpha val="100000"/>
+            </a:schemeClr>
+          </a:solidFill>
+          <a:ln/>
+        </p:spPr>
+        <p:txBody>
+          <a:bodyPr/>
+          <a:lstStyle/>
+          <a:p>
+            <a:endParaRPr lang="zh-CN" altLang="en-US"/>
+          </a:p>
+        </p:txBody>
+        <p:extLst>
+          <p:ext uri="http://schemas.baidu.com/office/drawing/2023/templateData">
+            <bd:templateData xmlns="" xmlns:bd="http://schemas.baidu.com/office/drawing/2023/templateData">eyJ0YWciOiJub0VkaXQifQ==</bd:templateData>
+          </p:ext>
+        </p:extLst>
+      </p:sp>
+      <p:sp>
+        <p:nvSpPr>
+          <p:cNvPr id="7" name="AutoShape 7"/>
+          <p:cNvSpPr/>
+          <p:nvPr/>
+        </p:nvSpPr>
+        <p:spPr>
+          <a:xfrm>
+            <a:off x="6000075" y="5335584"/>
+            <a:ext cx="191850" cy="191850"/>
+          </a:xfrm>
+          <a:prstGeom prst="ellipse">
+            <a:avLst/>
+          </a:prstGeom>
+          <a:solidFill>
+            <a:schemeClr val="accent1">
+              <a:alpha val="100000"/>
+            </a:schemeClr>
+          </a:solidFill>
+          <a:ln/>
+        </p:spPr>
+        <p:txBody>
+          <a:bodyPr/>
+          <a:lstStyle/>
+          <a:p>
+            <a:endParaRPr lang="zh-CN" altLang="en-US"/>
+          </a:p>
+        </p:txBody>
+        <p:extLst>
+          <p:ext uri="http://schemas.baidu.com/office/drawing/2023/templateData">
+            <bd:templateData xmlns="" xmlns:bd="http://schemas.baidu.com/office/drawing/2023/templateData">eyJ0YWciOiJub0VkaXQifQ==</bd:templateData>
+          </p:ext>
+        </p:extLst>
+      </p:sp>
+      <p:sp>
+        <p:nvSpPr>
+          <p:cNvPr id="8" name="AutoShape 8"/>
+          <p:cNvSpPr/>
+          <p:nvPr/>
+        </p:nvSpPr>
+        <p:spPr>
+          <a:xfrm>
+            <a:off x="8333253" y="5493547"/>
+            <a:ext cx="191850" cy="191850"/>
+          </a:xfrm>
+          <a:prstGeom prst="ellipse">
+            <a:avLst/>
+          </a:prstGeom>
+          <a:solidFill>
+            <a:schemeClr val="accent1">
+              <a:alpha val="100000"/>
+            </a:schemeClr>
+          </a:solidFill>
+          <a:ln/>
+        </p:spPr>
+        <p:txBody>
+          <a:bodyPr/>
+          <a:lstStyle/>
+          <a:p>
+            <a:endParaRPr lang="zh-CN" altLang="en-US"/>
+          </a:p>
+        </p:txBody>
+        <p:extLst>
+          <p:ext uri="http://schemas.baidu.com/office/drawing/2023/templateData">
+            <bd:templateData xmlns="" xmlns:bd="http://schemas.baidu.com/office/drawing/2023/templateData">eyJ0YWciOiJub0VkaXQifQ==</bd:templateData>
+          </p:ext>
+        </p:extLst>
+      </p:sp>
+      <p:sp>
+        <p:nvSpPr>
+          <p:cNvPr id="9" name="AutoShape 9"/>
+          <p:cNvSpPr/>
+          <p:nvPr/>
+        </p:nvSpPr>
+        <p:spPr>
+          <a:xfrm>
+            <a:off x="10665687" y="5929320"/>
+            <a:ext cx="191850" cy="191850"/>
+          </a:xfrm>
+          <a:prstGeom prst="ellipse">
+            <a:avLst/>
+          </a:prstGeom>
+          <a:solidFill>
+            <a:schemeClr val="accent1">
+              <a:alpha val="100000"/>
+            </a:schemeClr>
+          </a:solidFill>
+          <a:ln/>
+        </p:spPr>
+        <p:txBody>
+          <a:bodyPr/>
+          <a:lstStyle/>
+          <a:p>
+            <a:endParaRPr lang="zh-CN" altLang="en-US"/>
+          </a:p>
+        </p:txBody>
+        <p:extLst>
+          <p:ext uri="http://schemas.baidu.com/office/drawing/2023/templateData">
+            <bd:templateData xmlns="" xmlns:bd="http://schemas.baidu.com/office/drawing/2023/templateData">eyJ0YWciOiJub0VkaXQifQ==</bd:templateData>
+          </p:ext>
+        </p:extLst>
+      </p:sp>
+      <p:sp>
+        <p:nvSpPr>
+          <p:cNvPr id="10" name="AutoShape 10"/>
+          <p:cNvSpPr/>
+          <p:nvPr/>
+        </p:nvSpPr>
+        <p:spPr>
+          <a:xfrm>
+            <a:off x="5696624" y="4346785"/>
+            <a:ext cx="838202" cy="838202"/>
+          </a:xfrm>
+          <a:prstGeom prst="ellipse">
+            <a:avLst/>
+          </a:prstGeom>
+          <a:solidFill>
+            <a:schemeClr val="accent1">
+              <a:alpha val="100000"/>
+            </a:schemeClr>
+          </a:solidFill>
+          <a:ln/>
+        </p:spPr>
+        <p:txBody>
+          <a:bodyPr/>
+          <a:lstStyle/>
+          <a:p>
+            <a:endParaRPr lang="zh-CN" altLang="en-US"/>
+          </a:p>
+        </p:txBody>
+        <p:extLst>
+          <p:ext uri="http://schemas.baidu.com/office/drawing/2023/templateData">
+            <bd:templateData xmlns="" xmlns:bd="http://schemas.baidu.com/office/drawing/2023/templateData">eyJfdGVtcGxhdGVEYXRhIjp7ImxpbmVDb3VudCI6IjUiLCJ3b3JkQ291bnQiOiI0In0sInRhZyI6Im5vRWRpdCJ9</bd:templateData>
+          </p:ext>
+        </p:extLst>
+      </p:sp>
+      <p:sp>
+        <p:nvSpPr>
+          <p:cNvPr id="11" name="AutoShape 11"/>
+          <p:cNvSpPr/>
+          <p:nvPr/>
+        </p:nvSpPr>
+        <p:spPr>
+          <a:xfrm>
+            <a:off x="3345208" y="4519628"/>
+            <a:ext cx="838202" cy="838202"/>
+          </a:xfrm>
+          <a:prstGeom prst="ellipse">
+            <a:avLst/>
+          </a:prstGeom>
+          <a:solidFill>
+            <a:schemeClr val="accent1">
+              <a:alpha val="100000"/>
+            </a:schemeClr>
+          </a:solidFill>
+          <a:ln/>
+        </p:spPr>
+        <p:txBody>
+          <a:bodyPr/>
+          <a:lstStyle/>
+          <a:p>
+            <a:endParaRPr lang="zh-CN" altLang="en-US"/>
+          </a:p>
+        </p:txBody>
+        <p:extLst>
+          <p:ext uri="http://schemas.baidu.com/office/drawing/2023/templateData">
+            <bd:templateData xmlns="" xmlns:bd="http://schemas.baidu.com/office/drawing/2023/templateData">eyJ0YWciOiJub0VkaXQifQ==</bd:templateData>
+          </p:ext>
+        </p:extLst>
+      </p:sp>
+      <p:sp>
+        <p:nvSpPr>
+          <p:cNvPr id="12" name="AutoShape 12"/>
+          <p:cNvSpPr/>
+          <p:nvPr/>
+        </p:nvSpPr>
+        <p:spPr>
+          <a:xfrm>
+            <a:off x="1012773" y="4911322"/>
+            <a:ext cx="838202" cy="838202"/>
+          </a:xfrm>
+          <a:prstGeom prst="ellipse">
+            <a:avLst/>
+          </a:prstGeom>
+          <a:solidFill>
+            <a:schemeClr val="accent1">
+              <a:alpha val="100000"/>
+            </a:schemeClr>
+          </a:solidFill>
+          <a:ln/>
+        </p:spPr>
+        <p:txBody>
+          <a:bodyPr/>
+          <a:lstStyle/>
+          <a:p>
+            <a:endParaRPr lang="zh-CN" altLang="en-US"/>
+          </a:p>
+        </p:txBody>
+        <p:extLst>
+          <p:ext uri="http://schemas.baidu.com/office/drawing/2023/templateData">
+            <bd:templateData xmlns="" xmlns:bd="http://schemas.baidu.com/office/drawing/2023/templateData">eyJ0YWciOiJub0VkaXQifQ==</bd:templateData>
+          </p:ext>
+        </p:extLst>
+      </p:sp>
+      <p:sp>
+        <p:nvSpPr>
+          <p:cNvPr id="13" name="AutoShape 13"/>
+          <p:cNvSpPr/>
+          <p:nvPr/>
+        </p:nvSpPr>
+        <p:spPr>
+          <a:xfrm>
+            <a:off x="8010077" y="4519628"/>
+            <a:ext cx="838202" cy="838202"/>
+          </a:xfrm>
+          <a:prstGeom prst="ellipse">
+            <a:avLst/>
+          </a:prstGeom>
+          <a:solidFill>
+            <a:schemeClr val="accent1">
+              <a:alpha val="100000"/>
+            </a:schemeClr>
+          </a:solidFill>
+          <a:ln/>
+        </p:spPr>
+        <p:txBody>
+          <a:bodyPr/>
+          <a:lstStyle/>
+          <a:p>
+            <a:endParaRPr lang="zh-CN" altLang="en-US"/>
+          </a:p>
+        </p:txBody>
+        <p:extLst>
+          <p:ext uri="http://schemas.baidu.com/office/drawing/2023/templateData">
+            <bd:templateData xmlns="" xmlns:bd="http://schemas.baidu.com/office/drawing/2023/templateData">eyJ0YWciOiJub0VkaXQifQ==</bd:templateData>
+          </p:ext>
+        </p:extLst>
+      </p:sp>
+      <p:sp>
+        <p:nvSpPr>
+          <p:cNvPr id="14" name="AutoShape 14"/>
+          <p:cNvSpPr/>
+          <p:nvPr/>
+        </p:nvSpPr>
+        <p:spPr>
+          <a:xfrm>
+            <a:off x="10342511" y="4911322"/>
+            <a:ext cx="838202" cy="838202"/>
+          </a:xfrm>
+          <a:prstGeom prst="ellipse">
+            <a:avLst/>
+          </a:prstGeom>
+          <a:solidFill>
+            <a:schemeClr val="accent1">
+              <a:alpha val="100000"/>
+            </a:schemeClr>
+          </a:solidFill>
+          <a:ln/>
+        </p:spPr>
+        <p:txBody>
+          <a:bodyPr/>
+          <a:lstStyle/>
+          <a:p>
+            <a:endParaRPr lang="zh-CN" altLang="en-US"/>
+          </a:p>
+        </p:txBody>
+        <p:extLst>
+          <p:ext uri="http://schemas.baidu.com/office/drawing/2023/templateData">
+            <bd:templateData xmlns="" xmlns:bd="http://schemas.baidu.com/office/drawing/2023/templateData">eyJ0YWciOiJub0VkaXQifQ==</bd:templateData>
+          </p:ext>
+        </p:extLst>
+      </p:sp>
+      <p:sp>
+        <p:nvSpPr>
+          <p:cNvPr id="15" name="Freeform 15"/>
+          <p:cNvSpPr/>
+          <p:nvPr/>
+        </p:nvSpPr>
+        <p:spPr>
+          <a:xfrm>
+            <a:off x="1307454" y="5156412"/>
+            <a:ext cx="285637" cy="340022"/>
+          </a:xfrm>
+          <a:custGeom>
+            <a:avLst/>
+            <a:gdLst/>
+            <a:ahLst/>
+            <a:cxnLst/>
+            <a:rect l="l" t="t" r="r" b="b"/>
+            <a:pathLst>
+              <a:path w="401" h="478">
+                <a:moveTo>
+                  <a:pt x="401" y="89"/>
+                </a:moveTo>
+                <a:lnTo>
+                  <a:pt x="401" y="293"/>
+                </a:lnTo>
+                <a:cubicBezTo>
+                  <a:pt x="292" y="212"/>
+                  <a:pt x="182" y="375"/>
+                  <a:pt x="73" y="293"/>
+                </a:cubicBezTo>
+                <a:lnTo>
+                  <a:pt x="73" y="89"/>
+                </a:lnTo>
+                <a:cubicBezTo>
+                  <a:pt x="182" y="171"/>
+                  <a:pt x="292" y="7"/>
+                  <a:pt x="401" y="89"/>
+                </a:cubicBezTo>
+                <a:close/>
+              </a:path>
+              <a:path w="401" h="478">
+                <a:moveTo>
+                  <a:pt x="39" y="0"/>
+                </a:moveTo>
+                <a:cubicBezTo>
+                  <a:pt x="18" y="0"/>
+                  <a:pt x="0" y="17"/>
+                  <a:pt x="0" y="39"/>
+                </a:cubicBezTo>
+                <a:cubicBezTo>
+                  <a:pt x="0" y="54"/>
+                  <a:pt x="9" y="68"/>
+                  <a:pt x="23" y="74"/>
+                </a:cubicBezTo>
+                <a:lnTo>
+                  <a:pt x="23" y="478"/>
+                </a:lnTo>
+                <a:lnTo>
+                  <a:pt x="56" y="478"/>
+                </a:lnTo>
+                <a:lnTo>
+                  <a:pt x="56" y="74"/>
+                </a:lnTo>
+                <a:cubicBezTo>
+                  <a:pt x="69" y="68"/>
+                  <a:pt x="78" y="54"/>
+                  <a:pt x="78" y="39"/>
+                </a:cubicBezTo>
+                <a:cubicBezTo>
+                  <a:pt x="78" y="17"/>
+                  <a:pt x="61" y="0"/>
+                  <a:pt x="39" y="0"/>
+                </a:cubicBezTo>
+              </a:path>
+            </a:pathLst>
+          </a:custGeom>
+          <a:solidFill>
+            <a:srgbClr val="FFFFFF">
+              <a:alpha val="100000"/>
+            </a:srgbClr>
+          </a:solidFill>
+          <a:ln/>
+        </p:spPr>
+        <p:txBody>
+          <a:bodyPr/>
+          <a:lstStyle/>
+          <a:p>
+            <a:endParaRPr lang="zh-CN" altLang="en-US"/>
+          </a:p>
+        </p:txBody>
+        <p:extLst>
+          <p:ext uri="http://schemas.baidu.com/office/drawing/2023/templateData">
+            <bd:templateData xmlns="" xmlns:bd="http://schemas.baidu.com/office/drawing/2023/templateData">eyJ0YWciOiJub0VkaXQifQ==</bd:templateData>
+          </p:ext>
+        </p:extLst>
+      </p:sp>
+      <p:sp>
+        <p:nvSpPr>
+          <p:cNvPr id="16" name="Freeform 16"/>
+          <p:cNvSpPr/>
+          <p:nvPr/>
+        </p:nvSpPr>
+        <p:spPr>
+          <a:xfrm>
+            <a:off x="10656484" y="5175462"/>
+            <a:ext cx="285637" cy="340022"/>
+          </a:xfrm>
+          <a:custGeom>
+            <a:avLst/>
+            <a:gdLst/>
+            <a:ahLst/>
+            <a:cxnLst/>
+            <a:rect l="l" t="t" r="r" b="b"/>
+            <a:pathLst>
+              <a:path w="401" h="478">
+                <a:moveTo>
+                  <a:pt x="401" y="89"/>
+                </a:moveTo>
+                <a:lnTo>
+                  <a:pt x="401" y="293"/>
+                </a:lnTo>
+                <a:cubicBezTo>
+                  <a:pt x="292" y="212"/>
+                  <a:pt x="182" y="375"/>
+                  <a:pt x="73" y="293"/>
+                </a:cubicBezTo>
+                <a:lnTo>
+                  <a:pt x="73" y="89"/>
+                </a:lnTo>
+                <a:cubicBezTo>
+                  <a:pt x="182" y="171"/>
+                  <a:pt x="292" y="7"/>
+                  <a:pt x="401" y="89"/>
+                </a:cubicBezTo>
+                <a:close/>
+              </a:path>
+              <a:path w="401" h="478">
+                <a:moveTo>
+                  <a:pt x="39" y="0"/>
+                </a:moveTo>
+                <a:cubicBezTo>
+                  <a:pt x="18" y="0"/>
+                  <a:pt x="0" y="17"/>
+                  <a:pt x="0" y="39"/>
+                </a:cubicBezTo>
+                <a:cubicBezTo>
+                  <a:pt x="0" y="54"/>
+                  <a:pt x="9" y="68"/>
+                  <a:pt x="23" y="74"/>
+                </a:cubicBezTo>
+                <a:lnTo>
+                  <a:pt x="23" y="478"/>
+                </a:lnTo>
+                <a:lnTo>
+                  <a:pt x="56" y="478"/>
+                </a:lnTo>
+                <a:lnTo>
+                  <a:pt x="56" y="74"/>
+                </a:lnTo>
+                <a:cubicBezTo>
+                  <a:pt x="69" y="68"/>
+                  <a:pt x="78" y="54"/>
+                  <a:pt x="78" y="39"/>
+                </a:cubicBezTo>
+                <a:cubicBezTo>
+                  <a:pt x="78" y="17"/>
+                  <a:pt x="61" y="0"/>
+                  <a:pt x="39" y="0"/>
+                </a:cubicBezTo>
+              </a:path>
+            </a:pathLst>
+          </a:custGeom>
+          <a:solidFill>
+            <a:srgbClr val="FFFFFF">
+              <a:alpha val="100000"/>
+            </a:srgbClr>
+          </a:solidFill>
+          <a:ln/>
+        </p:spPr>
+        <p:txBody>
+          <a:bodyPr/>
+          <a:lstStyle/>
+          <a:p>
+            <a:endParaRPr lang="zh-CN" altLang="en-US"/>
+          </a:p>
+        </p:txBody>
+        <p:extLst>
+          <p:ext uri="http://schemas.baidu.com/office/drawing/2023/templateData">
+            <bd:templateData xmlns="" xmlns:bd="http://schemas.baidu.com/office/drawing/2023/templateData">eyJ0YWciOiJub0VkaXQifQ==</bd:templateData>
+          </p:ext>
+        </p:extLst>
+      </p:sp>
+      <p:sp>
+        <p:nvSpPr>
+          <p:cNvPr id="17" name="Freeform 17"/>
+          <p:cNvSpPr/>
+          <p:nvPr/>
+        </p:nvSpPr>
+        <p:spPr>
+          <a:xfrm>
+            <a:off x="3552466" y="4739614"/>
+            <a:ext cx="423687" cy="398229"/>
+          </a:xfrm>
+          <a:custGeom>
+            <a:avLst/>
+            <a:gdLst/>
+            <a:ahLst/>
+            <a:cxnLst/>
+            <a:rect l="l" t="t" r="r" b="b"/>
+            <a:pathLst>
+              <a:path w="304800" h="304800">
+                <a:moveTo>
+                  <a:pt x="147409" y="185366"/>
+                </a:moveTo>
+                <a:lnTo>
+                  <a:pt x="66913" y="266338"/>
+                </a:lnTo>
+                <a:lnTo>
+                  <a:pt x="66913" y="47987"/>
+                </a:lnTo>
+                <a:lnTo>
+                  <a:pt x="228371" y="47987"/>
+                </a:lnTo>
+                <a:lnTo>
+                  <a:pt x="228371" y="266338"/>
+                </a:lnTo>
+                <a:lnTo>
+                  <a:pt x="147409" y="185366"/>
+                </a:lnTo>
+              </a:path>
+            </a:pathLst>
+          </a:custGeom>
+          <a:solidFill>
+            <a:srgbClr val="F9F4F4">
+              <a:alpha val="100000"/>
+            </a:srgbClr>
+          </a:solidFill>
+          <a:ln/>
+        </p:spPr>
+        <p:txBody>
+          <a:bodyPr/>
+          <a:lstStyle/>
+          <a:p>
+            <a:endParaRPr lang="zh-CN" altLang="en-US"/>
+          </a:p>
+        </p:txBody>
+        <p:extLst>
+          <p:ext uri="http://schemas.baidu.com/office/drawing/2023/templateData">
+            <bd:templateData xmlns="" xmlns:bd="http://schemas.baidu.com/office/drawing/2023/templateData">eyJ0YWciOiJub0VkaXQifQ==</bd:templateData>
+          </p:ext>
+        </p:extLst>
+      </p:sp>
+      <p:sp>
+        <p:nvSpPr>
+          <p:cNvPr id="18" name="Freeform 18"/>
+          <p:cNvSpPr/>
+          <p:nvPr/>
+        </p:nvSpPr>
+        <p:spPr>
+          <a:xfrm>
+            <a:off x="8245909" y="4740783"/>
+            <a:ext cx="423687" cy="398229"/>
+          </a:xfrm>
+          <a:custGeom>
+            <a:avLst/>
+            <a:gdLst/>
+            <a:ahLst/>
+            <a:cxnLst/>
+            <a:rect l="l" t="t" r="r" b="b"/>
+            <a:pathLst>
+              <a:path w="304800" h="304800">
+                <a:moveTo>
+                  <a:pt x="147409" y="185366"/>
+                </a:moveTo>
+                <a:lnTo>
+                  <a:pt x="66913" y="266338"/>
+                </a:lnTo>
+                <a:lnTo>
+                  <a:pt x="66913" y="47987"/>
+                </a:lnTo>
+                <a:lnTo>
+                  <a:pt x="228371" y="47987"/>
+                </a:lnTo>
+                <a:lnTo>
+                  <a:pt x="228371" y="266338"/>
+                </a:lnTo>
+                <a:lnTo>
+                  <a:pt x="147409" y="185366"/>
+                </a:lnTo>
+              </a:path>
+            </a:pathLst>
+          </a:custGeom>
+          <a:solidFill>
+            <a:srgbClr val="F9F6F6">
+              <a:alpha val="100000"/>
+            </a:srgbClr>
+          </a:solidFill>
+          <a:ln/>
+        </p:spPr>
+        <p:txBody>
+          <a:bodyPr/>
+          <a:lstStyle/>
+          <a:p>
+            <a:endParaRPr lang="zh-CN" altLang="en-US"/>
+          </a:p>
+        </p:txBody>
+        <p:extLst>
+          <p:ext uri="http://schemas.baidu.com/office/drawing/2023/templateData">
+            <bd:templateData xmlns="" xmlns:bd="http://schemas.baidu.com/office/drawing/2023/templateData">eyJ0YWciOiJub0VkaXQifQ==</bd:templateData>
+          </p:ext>
+        </p:extLst>
+      </p:sp>
+      <p:sp>
+        <p:nvSpPr>
+          <p:cNvPr id="19" name="Freeform 19"/>
+          <p:cNvSpPr/>
+          <p:nvPr/>
+        </p:nvSpPr>
+        <p:spPr>
+          <a:xfrm>
+            <a:off x="5906295" y="4594017"/>
+            <a:ext cx="423687" cy="398229"/>
+          </a:xfrm>
+          <a:custGeom>
+            <a:avLst/>
+            <a:gdLst/>
+            <a:ahLst/>
+            <a:cxnLst/>
+            <a:rect l="l" t="t" r="r" b="b"/>
+            <a:pathLst>
+              <a:path w="304800" h="304800">
+                <a:moveTo>
+                  <a:pt x="147409" y="185366"/>
+                </a:moveTo>
+                <a:lnTo>
+                  <a:pt x="66913" y="266338"/>
+                </a:lnTo>
+                <a:lnTo>
+                  <a:pt x="66913" y="47987"/>
+                </a:lnTo>
+                <a:lnTo>
+                  <a:pt x="228371" y="47987"/>
+                </a:lnTo>
+                <a:lnTo>
+                  <a:pt x="228371" y="266338"/>
+                </a:lnTo>
+                <a:lnTo>
+                  <a:pt x="147409" y="185366"/>
+                </a:lnTo>
+              </a:path>
+            </a:pathLst>
+          </a:custGeom>
+          <a:solidFill>
+            <a:srgbClr val="F9F6F6">
+              <a:alpha val="100000"/>
+            </a:srgbClr>
+          </a:solidFill>
+          <a:ln/>
+        </p:spPr>
+        <p:txBody>
+          <a:bodyPr/>
+          <a:lstStyle/>
+          <a:p>
+            <a:endParaRPr lang="zh-CN" altLang="en-US"/>
+          </a:p>
+        </p:txBody>
+        <p:extLst>
+          <p:ext uri="http://schemas.baidu.com/office/drawing/2023/templateData">
+            <bd:templateData xmlns="" xmlns:bd="http://schemas.baidu.com/office/drawing/2023/templateData">eyJ0YWciOiJub0VkaXQifQ==</bd:templateData>
+          </p:ext>
+        </p:extLst>
+      </p:sp>
+      <p:sp>
+        <p:nvSpPr>
+          <p:cNvPr id="20" name="TextBox 20"/>
+          <p:cNvSpPr txBox="1"/>
+          <p:nvPr/>
+        </p:nvSpPr>
+        <p:spPr>
+          <a:xfrm>
+            <a:off x="912572" y="1718641"/>
+            <a:ext cx="10455834" cy="1868121"/>
+          </a:xfrm>
+          <a:prstGeom prst="rect">
+            <a:avLst/>
+          </a:prstGeom>
+          <a:ln/>
+        </p:spPr>
+        <p:txBody>
+          <a:bodyPr vert="horz" wrap="square" lIns="66008" tIns="33052" rIns="66008" bIns="33052" rtlCol="0" anchor="ctr" anchorCtr="0">
+            <a:noAutofit/>
+          </a:bodyPr>
+          <a:lstStyle/>
+          <a:p>
+            <a:pPr algn="l">
+              <a:lnSpc>
+                <a:spcPct val="180000"/>
+              </a:lnSpc>
+            </a:pPr>
+            <a:r>
+              <a:rPr lang="en-US" sz="1500">
+                <a:solidFill>
+                  <a:srgbClr val="FFFFFF">
+                    <a:alpha val="100000"/>
+                  </a:srgbClr>
+                </a:solidFill>
+                <a:latin typeface="Noto Sans SC"/>
+                <a:ea typeface="Noto Sans SC"/>
+                <a:cs typeface="Noto Sans SC"/>
+              </a:rPr>
+              <a:t>大赛核心判断——制胜逻辑不再是"谁的武器更强" 而是"谁适应得更快" DTB Model由四大组件构成 作战引擎驱动ASDA闭环仿真推演 战斗网络聚合传感器分析赢得透明战场 应用商店实现能力模块化按需加载 即插即用通过gRPC标准化接口接入异构设备 ASDA闭环 行动-感知-决策-适应 是核心运行机制 体现适应优于压制理念</a:t>
+            </a:r>
+          </a:p>
+        </p:txBody>
+        <p:extLst>
+          <p:ext uri="http://schemas.baidu.com/office/drawing/2023/templateData">
+            <bd:templateData xmlns="" xmlns:bd="http://schemas.baidu.com/office/drawing/2023/templateData">eyJfdGVtcGxhdGVEYXRhIjp7ImNvbnRlbnRUeXBlIjoiJHRleHQiLCJsaW5lQ291bnQiOiI0Iiwid29yZENvdW50IjoiNTMifSwidGFnIjoiJHRleHQifQ==</bd:templateData>
+          </p:ext>
+        </p:extLst>
+      </p:sp>
+    </p:spTree>
+  </p:cSld>
+  <p:clrMapOvr>
+    <a:masterClrMapping/>
+  </p:clrMapOvr>
+  <p:extLst>
+    <p:ext uri="http://schemas.baidu.com/office/drawing/2023/templateData">
+      <bd:templateData xmlns="" xmlns:bd="http://schemas.baidu.com/office/drawing/2023/templateData">eyJtZCI6IiMjIOivt+i+k+WFpeacrOmhteagh+mimFxu6K+35Zyo5q2k5aSE6L6T5YWl5oKo55qE5q2j5paH5YaF5a6544CC5paH5a2X5Luj6KGo5oKo55qE5Li76aKY5oCd5oOz77yM6K+35Yqb5rGC566A5piO5Zyw6KGo6L6+5oKo55qE6KeC54K544CC5Y+v6YCC5bqm5Yig5YeP5paH5a2X5Lul56Gu5L+d5L+h5oGv55qE5riF5pmw5ZKM57K+56Gu5Lyg6L6+77yM5ZCM5pe25Lmf6KaB5YWz5rOo5paH5a2X55qE6YC76L6R5oCn5ZKM5p2h55CG5oCn77yM5Lul5Yqp5LqO5LuW5Lq65pu05rex5YWl55CG6Kej5ZKM5o6l5Y+X5oKo55qE6KeC54K544CCIiwidHBsaWQiOiI2OSIsInRwbE5hbWUiOiJ0aXRsZUNvbnRlbnRfeWFuZ2UxOCIsImVkaXRlZCI6ImZhbHNlIn0=</bd:templateData>
+    </p:ext>
+  </p:extLst>
+</p:sld>
+</file>
+
+<file path=ppt/slides/slide6.xml><?xml version="1.0" encoding="utf-8"?>
+<p:sld xmlns:a="http://schemas.openxmlformats.org/drawingml/2006/main" xmlns:r="http://schemas.openxmlformats.org/officeDocument/2006/relationships" xmlns:p="http://schemas.openxmlformats.org/presentationml/2006/main">
+  <p:cSld>
+    <p:bg>
+      <p:bgPr>
+        <a:blipFill dpi="0" rotWithShape="1">
+          <a:blip r:embed="rId2">
+            <a:alphaModFix/>
+          </a:blip>
+          <a:srcRect/>
+          <a:stretch>
+            <a:fillRect/>
+          </a:stretch>
+        </a:blipFill>
+        <a:effectLst/>
+      </p:bgPr>
+    </p:bg>
+    <p:spTree>
+      <p:nvGrpSpPr>
+        <p:cNvPr id="1" name=""/>
+        <p:cNvGrpSpPr/>
+        <p:nvPr/>
+      </p:nvGrpSpPr>
+      <p:grpSpPr>
+        <a:xfrm>
+          <a:off x="0" y="0"/>
+          <a:ext cx="0" cy="0"/>
+          <a:chOff x="0" y="0"/>
+          <a:chExt cx="0" cy="0"/>
+        </a:xfrm>
+      </p:grpSpPr>
+      <p:sp>
+        <p:nvSpPr>
+          <p:cNvPr id="2" name="AutoShape 2"/>
+          <p:cNvSpPr/>
+          <p:nvPr/>
+        </p:nvSpPr>
+        <p:spPr>
           <a:xfrm flipH="1" flipV="1">
             <a:off x="8866695" y="1046036"/>
             <a:ext cx="2705073" cy="2545325"/>
@@ -13554,7 +16060,7 @@
 </p:sld>
 </file>
 
-<file path=ppt/slides/slide6.xml><?xml version="1.0" encoding="utf-8"?>
+<file path=ppt/slides/slide7.xml><?xml version="1.0" encoding="utf-8"?>
 <p:sld xmlns:a="http://schemas.openxmlformats.org/drawingml/2006/main" xmlns:r="http://schemas.openxmlformats.org/officeDocument/2006/relationships" xmlns:p="http://schemas.openxmlformats.org/presentationml/2006/main">
   <p:cSld>
     <p:bg>
@@ -14706,7 +17212,7 @@
 </p:sld>
 </file>
 
-<file path=ppt/slides/slide7.xml><?xml version="1.0" encoding="utf-8"?>
+<file path=ppt/slides/slide8.xml><?xml version="1.0" encoding="utf-8"?>
 <p:sld xmlns:a="http://schemas.openxmlformats.org/drawingml/2006/main" xmlns:r="http://schemas.openxmlformats.org/officeDocument/2006/relationships" xmlns:p="http://schemas.openxmlformats.org/presentationml/2006/main">
   <p:cSld>
     <p:bg>
@@ -21015,7 +23521,7 @@
 </p:sld>
 </file>
 
-<file path=ppt/slides/slide8.xml><?xml version="1.0" encoding="utf-8"?>
+<file path=ppt/slides/slide9.xml><?xml version="1.0" encoding="utf-8"?>
 <p:sld xmlns:a="http://schemas.openxmlformats.org/drawingml/2006/main" xmlns:r="http://schemas.openxmlformats.org/officeDocument/2006/relationships" xmlns:p="http://schemas.openxmlformats.org/presentationml/2006/main">
   <p:cSld>
     <p:bg>
@@ -22998,791 +25504,6 @@
   <p:extLst>
     <p:ext uri="http://schemas.baidu.com/office/drawing/2023/templateData">
       <bd:templateData xmlns="" xmlns:bd="http://schemas.baidu.com/office/drawing/2023/templateData">eyJtZCI6IiMjIOivt+i+k+WFpeacrOmhteagh+mimFxuIyMjIOa3u+WKoOWwj+agh+mimFxu6K+35Zyo5q2k5aSE6L6T5YWl5oKo55qE5q2j5paH5YaF5a6544CC5paH5a2X5Luj6KGo5oKo55qE5Li76aKY5oCd5oOz77yM6K+35Yqb5rGC566A5piO5Zyw6KGo6L6+5oKo55qE6KeC54K544CC5Y+v6YCC5bqm5Yig5YeP5paH5a2X5Lul56Gu5L+d5L+h5oGv55qE5riF5pmw5ZKM57K+XG4jIyMg5re75Yqg5bCP5qCH6aKYXG7or7flnKjmraTlpITovpPlhaXmgqjnmoTmraPmloflhoXlrrnjgILmloflrZfku6PooajmgqjnmoTkuLvpopjmgJ3mg7PvvIzor7flipvmsYLnroDmmI7lnLDooajovr7mgqjnmoTop4LngrnjgILlj6/pgILluqbliKDlh4/mloflrZfku6Xnoa7kv53kv6Hmga/nmoTmuIXmmbDlkoznsr5cbiMjIyDmt7vliqDlsI/moIfpophcbuivt+WcqOatpOWkhOi+k+WFpeaCqOeahOato+aWh+WGheWuueOAguaWh+Wtl+S7o+ihqOaCqOeahOS4u+mimOaAneaDs++8jOivt+WKm+axgueugOaYjuWcsOihqOi+vuaCqOeahOingueCueOAguWPr+mAguW6puWIoOWHj+aWh+Wtl+S7peehruS/neS/oeaBr+eahOa4heaZsOWSjOeyvlxuIyMjIOa3u+WKoOWwj+agh+mimFxu6K+35Zyo5q2k5aSE6L6T5YWl5oKo55qE5q2j5paH5YaF5a6544CC5paH5a2X5Luj6KGo5oKo55qE5Li76aKY5oCd5oOz77yM6K+35Yqb5rGC566A5piO5Zyw6KGo6L6+5oKo55qE6KeC54K544CC5Y+v6YCC5bqm5Yig5YeP5paH5a2X5Lul56Gu5L+d5L+h5oGv55qE5riF5pmw5ZKM57K+IiwidHBsaWQiOiI2OSIsInRwbE5hbWUiOiJsaXN0NF8yMDI1MDcwMzExIiwiZWRpdGVkIjoiZmFsc2UifQ==</bd:templateData>
-    </p:ext>
-  </p:extLst>
-</p:sld>
-</file>
-
-<file path=ppt/slides/slide9.xml><?xml version="1.0" encoding="utf-8"?>
-<p:sld xmlns:a="http://schemas.openxmlformats.org/drawingml/2006/main" xmlns:r="http://schemas.openxmlformats.org/officeDocument/2006/relationships" xmlns:p="http://schemas.openxmlformats.org/presentationml/2006/main">
-  <p:cSld>
-    <p:bg>
-      <p:bgPr>
-        <a:blipFill dpi="0" rotWithShape="1">
-          <a:blip r:embed="rId2">
-            <a:alphaModFix/>
-          </a:blip>
-          <a:srcRect/>
-          <a:stretch>
-            <a:fillRect/>
-          </a:stretch>
-        </a:blipFill>
-        <a:effectLst/>
-      </p:bgPr>
-    </p:bg>
-    <p:spTree>
-      <p:nvGrpSpPr>
-        <p:cNvPr id="1" name=""/>
-        <p:cNvGrpSpPr/>
-        <p:nvPr/>
-      </p:nvGrpSpPr>
-      <p:grpSpPr>
-        <a:xfrm>
-          <a:off x="0" y="0"/>
-          <a:ext cx="0" cy="0"/>
-          <a:chOff x="0" y="0"/>
-          <a:chExt cx="0" cy="0"/>
-        </a:xfrm>
-      </p:grpSpPr>
-      <p:sp>
-        <p:nvSpPr>
-          <p:cNvPr id="2" name="AutoShape 2"/>
-          <p:cNvSpPr/>
-          <p:nvPr/>
-        </p:nvSpPr>
-        <p:spPr>
-          <a:xfrm>
-            <a:off x="4487245" y="1423716"/>
-            <a:ext cx="3186474" cy="3186474"/>
-          </a:xfrm>
-          <a:prstGeom prst="ellipse">
-            <a:avLst/>
-          </a:prstGeom>
-          <a:solidFill>
-            <a:schemeClr val="accent2">
-              <a:alpha val="20000"/>
-            </a:schemeClr>
-          </a:solidFill>
-          <a:ln/>
-        </p:spPr>
-        <p:txBody>
-          <a:bodyPr/>
-          <a:lstStyle/>
-          <a:p>
-            <a:endParaRPr lang="zh-CN" altLang="en-US"/>
-          </a:p>
-        </p:txBody>
-        <p:extLst>
-          <p:ext uri="http://schemas.baidu.com/office/drawing/2023/templateData">
-            <bd:templateData xmlns="" xmlns:bd="http://schemas.baidu.com/office/drawing/2023/templateData">eyJ0YWciOiJub0VkaXQifQ==</bd:templateData>
-          </p:ext>
-        </p:extLst>
-      </p:sp>
-      <p:sp>
-        <p:nvSpPr>
-          <p:cNvPr id="3" name="AutoShape 3"/>
-          <p:cNvSpPr/>
-          <p:nvPr/>
-        </p:nvSpPr>
-        <p:spPr>
-          <a:xfrm>
-            <a:off x="4173203" y="1109673"/>
-            <a:ext cx="3814560" cy="3814560"/>
-          </a:xfrm>
-          <a:prstGeom prst="ellipse">
-            <a:avLst/>
-          </a:prstGeom>
-          <a:solidFill>
-            <a:schemeClr val="accent2">
-              <a:alpha val="20000"/>
-            </a:schemeClr>
-          </a:solidFill>
-          <a:ln/>
-        </p:spPr>
-        <p:txBody>
-          <a:bodyPr/>
-          <a:lstStyle/>
-          <a:p>
-            <a:endParaRPr lang="zh-CN" altLang="en-US"/>
-          </a:p>
-        </p:txBody>
-        <p:extLst>
-          <p:ext uri="http://schemas.baidu.com/office/drawing/2023/templateData">
-            <bd:templateData xmlns="" xmlns:bd="http://schemas.baidu.com/office/drawing/2023/templateData">eyJ0YWciOiJub0VkaXQifQ==</bd:templateData>
-          </p:ext>
-        </p:extLst>
-      </p:sp>
-      <p:sp>
-        <p:nvSpPr>
-          <p:cNvPr id="4" name="AutoShape 4"/>
-          <p:cNvSpPr/>
-          <p:nvPr/>
-        </p:nvSpPr>
-        <p:spPr>
-          <a:xfrm>
-            <a:off x="3495828" y="2017416"/>
-            <a:ext cx="1999074" cy="1999074"/>
-          </a:xfrm>
-          <a:prstGeom prst="ellipse">
-            <a:avLst/>
-          </a:prstGeom>
-          <a:solidFill>
-            <a:schemeClr val="accent1">
-              <a:alpha val="100000"/>
-              <a:lumMod val="75000"/>
-            </a:schemeClr>
-          </a:solidFill>
-          <a:ln/>
-        </p:spPr>
-        <p:txBody>
-          <a:bodyPr/>
-          <a:lstStyle/>
-          <a:p>
-            <a:endParaRPr lang="zh-CN" altLang="en-US"/>
-          </a:p>
-        </p:txBody>
-        <p:extLst>
-          <p:ext uri="http://schemas.baidu.com/office/drawing/2023/templateData">
-            <bd:templateData xmlns="" xmlns:bd="http://schemas.baidu.com/office/drawing/2023/templateData">eyJ0YWciOiJub0VkaXQifQ==</bd:templateData>
-          </p:ext>
-        </p:extLst>
-      </p:sp>
-      <p:sp>
-        <p:nvSpPr>
-          <p:cNvPr id="5" name="AutoShape 5"/>
-          <p:cNvSpPr/>
-          <p:nvPr/>
-        </p:nvSpPr>
-        <p:spPr>
-          <a:xfrm>
-            <a:off x="6686299" y="2017209"/>
-            <a:ext cx="1999488" cy="1999488"/>
-          </a:xfrm>
-          <a:prstGeom prst="ellipse">
-            <a:avLst/>
-          </a:prstGeom>
-          <a:solidFill>
-            <a:schemeClr val="accent1">
-              <a:alpha val="100000"/>
-              <a:lumMod val="75000"/>
-            </a:schemeClr>
-          </a:solidFill>
-          <a:ln/>
-        </p:spPr>
-        <p:txBody>
-          <a:bodyPr/>
-          <a:lstStyle/>
-          <a:p>
-            <a:endParaRPr lang="zh-CN" altLang="en-US"/>
-          </a:p>
-        </p:txBody>
-        <p:extLst>
-          <p:ext uri="http://schemas.baidu.com/office/drawing/2023/templateData">
-            <bd:templateData xmlns="" xmlns:bd="http://schemas.baidu.com/office/drawing/2023/templateData">eyJ0YWciOiJub0VkaXQifQ==</bd:templateData>
-          </p:ext>
-        </p:extLst>
-      </p:sp>
-      <p:sp>
-        <p:nvSpPr>
-          <p:cNvPr id="6" name="AutoShape 6"/>
-          <p:cNvSpPr/>
-          <p:nvPr/>
-        </p:nvSpPr>
-        <p:spPr>
-          <a:xfrm>
-            <a:off x="4732087" y="1668558"/>
-            <a:ext cx="2696790" cy="2696790"/>
-          </a:xfrm>
-          <a:prstGeom prst="ellipse">
-            <a:avLst/>
-          </a:prstGeom>
-          <a:solidFill>
-            <a:schemeClr val="accent1">
-              <a:alpha val="100000"/>
-            </a:schemeClr>
-          </a:solidFill>
-          <a:ln/>
-        </p:spPr>
-        <p:txBody>
-          <a:bodyPr/>
-          <a:lstStyle/>
-          <a:p>
-            <a:endParaRPr lang="zh-CN" altLang="en-US"/>
-          </a:p>
-        </p:txBody>
-        <p:extLst>
-          <p:ext uri="http://schemas.baidu.com/office/drawing/2023/templateData">
-            <bd:templateData xmlns="" xmlns:bd="http://schemas.baidu.com/office/drawing/2023/templateData">eyJ0YWciOiJub0VkaXQifQ==</bd:templateData>
-          </p:ext>
-        </p:extLst>
-      </p:sp>
-      <p:sp>
-        <p:nvSpPr>
-          <p:cNvPr id="7" name="TextBox 7"/>
-          <p:cNvSpPr txBox="1"/>
-          <p:nvPr/>
-        </p:nvSpPr>
-        <p:spPr>
-          <a:xfrm>
-            <a:off x="384641" y="2117702"/>
-            <a:ext cx="2934861" cy="2120494"/>
-          </a:xfrm>
-          <a:prstGeom prst="rect">
-            <a:avLst/>
-          </a:prstGeom>
-          <a:ln/>
-        </p:spPr>
-        <p:txBody>
-          <a:bodyPr vert="horz" wrap="square" lIns="114300" tIns="57150" rIns="114300" bIns="57150" rtlCol="0" anchor="ctr" anchorCtr="0">
-            <a:normAutofit/>
-          </a:bodyPr>
-          <a:lstStyle/>
-          <a:p>
-            <a:pPr algn="r">
-              <a:lnSpc>
-                <a:spcPct val="140000"/>
-              </a:lnSpc>
-            </a:pPr>
-            <a:r>
-              <a:rPr lang="en-US" sz="1425">
-                <a:solidFill>
-                  <a:schemeClr val="dk1">
-                    <a:alpha val="100000"/>
-                  </a:schemeClr>
-                </a:solidFill>
-                <a:latin typeface="Noto Sans SC"/>
-                <a:ea typeface="Noto Sans SC"/>
-                <a:cs typeface="Noto Sans SC"/>
-              </a:rPr>
-              <a:t>行动 执行部署与转移命令 触发对手响应释放信号 感知 战斗网络采集信号更新战场态势</a:t>
-            </a:r>
-          </a:p>
-        </p:txBody>
-        <p:extLst>
-          <p:ext uri="http://schemas.baidu.com/office/drawing/2023/templateData">
-            <bd:templateData xmlns="" xmlns:bd="http://schemas.baidu.com/office/drawing/2023/templateData">eyJfdGVtcGxhdGVEYXRhIjp7ImNvbnRlbnRUeXBlIjoiJGl0ZW0xX2MiLCJsaW5lQ291bnQiOiI2Iiwid29yZENvdW50IjoiMTMifSwidGFnIjoiJGl0ZW0xX2MifQ==</bd:templateData>
-          </p:ext>
-        </p:extLst>
-      </p:sp>
-      <p:sp>
-        <p:nvSpPr>
-          <p:cNvPr id="8" name="TextBox 8"/>
-          <p:cNvSpPr txBox="1"/>
-          <p:nvPr/>
-        </p:nvSpPr>
-        <p:spPr>
-          <a:xfrm>
-            <a:off x="8861907" y="2117702"/>
-            <a:ext cx="2934861" cy="2120494"/>
-          </a:xfrm>
-          <a:prstGeom prst="rect">
-            <a:avLst/>
-          </a:prstGeom>
-          <a:ln/>
-        </p:spPr>
-        <p:txBody>
-          <a:bodyPr vert="horz" wrap="square" lIns="114300" tIns="57150" rIns="114300" bIns="57150" rtlCol="0" anchor="ctr" anchorCtr="0">
-            <a:normAutofit/>
-          </a:bodyPr>
-          <a:lstStyle/>
-          <a:p>
-            <a:pPr algn="l">
-              <a:lnSpc>
-                <a:spcPct val="140000"/>
-              </a:lnSpc>
-            </a:pPr>
-            <a:r>
-              <a:rPr lang="en-US" sz="1425">
-                <a:solidFill>
-                  <a:schemeClr val="dk1">
-                    <a:alpha val="100000"/>
-                  </a:schemeClr>
-                </a:solidFill>
-                <a:latin typeface="Noto Sans SC"/>
-                <a:ea typeface="Noto Sans SC"/>
-                <a:cs typeface="Noto Sans SC"/>
-              </a:rPr>
-              <a:t>决策 基于更新后的对手模型验证不确定性制定下一步行动 适应 持续调整部署与策略形成闭环</a:t>
-            </a:r>
-          </a:p>
-        </p:txBody>
-        <p:extLst>
-          <p:ext uri="http://schemas.baidu.com/office/drawing/2023/templateData">
-            <bd:templateData xmlns="" xmlns:bd="http://schemas.baidu.com/office/drawing/2023/templateData">eyJfdGVtcGxhdGVEYXRhIjp7ImNvbnRlbnRUeXBlIjoiJGl0ZW0yX2MiLCJsaW5lQ291bnQiOiI2Iiwid29yZENvdW50IjoiMTMifSwidGFnIjoiJGl0ZW0yX2MifQ==</bd:templateData>
-          </p:ext>
-        </p:extLst>
-      </p:sp>
-      <p:sp>
-        <p:nvSpPr>
-          <p:cNvPr id="9" name="Freeform 9"/>
-          <p:cNvSpPr/>
-          <p:nvPr/>
-        </p:nvSpPr>
-        <p:spPr>
-          <a:xfrm>
-            <a:off x="5452470" y="2378719"/>
-            <a:ext cx="1276469" cy="1276469"/>
-          </a:xfrm>
-          <a:custGeom>
-            <a:avLst/>
-            <a:gdLst/>
-            <a:ahLst/>
-            <a:cxnLst/>
-            <a:rect l="l" t="t" r="r" b="b"/>
-            <a:pathLst>
-              <a:path w="304800" h="304800">
-                <a:moveTo>
-                  <a:pt x="257299" y="240773"/>
-                </a:moveTo>
-                <a:lnTo>
-                  <a:pt x="257299" y="258156"/>
-                </a:lnTo>
-                <a:lnTo>
-                  <a:pt x="47501" y="258156"/>
-                </a:lnTo>
-                <a:lnTo>
-                  <a:pt x="47501" y="240773"/>
-                </a:lnTo>
-                <a:cubicBezTo>
-                  <a:pt x="47501" y="240773"/>
-                  <a:pt x="43015" y="231162"/>
-                  <a:pt x="67361" y="208112"/>
-                </a:cubicBezTo>
-                <a:cubicBezTo>
-                  <a:pt x="91688" y="185071"/>
-                  <a:pt x="88487" y="125511"/>
-                  <a:pt x="88487" y="85173"/>
-                </a:cubicBezTo>
-                <a:cubicBezTo>
-                  <a:pt x="88487" y="44834"/>
-                  <a:pt x="145142" y="43977"/>
-                  <a:pt x="145142" y="43977"/>
-                </a:cubicBezTo>
-                <a:lnTo>
-                  <a:pt x="147085" y="43977"/>
-                </a:lnTo>
-                <a:cubicBezTo>
-                  <a:pt x="147085" y="43996"/>
-                  <a:pt x="147085" y="43701"/>
-                  <a:pt x="147085" y="37424"/>
-                </a:cubicBezTo>
-                <a:cubicBezTo>
-                  <a:pt x="147085" y="33395"/>
-                  <a:pt x="133560" y="18802"/>
-                  <a:pt x="133560" y="18802"/>
-                </a:cubicBezTo>
-                <a:lnTo>
-                  <a:pt x="133360" y="9973"/>
-                </a:lnTo>
-                <a:lnTo>
-                  <a:pt x="171555" y="9973"/>
-                </a:lnTo>
-                <a:lnTo>
-                  <a:pt x="171298" y="19136"/>
-                </a:lnTo>
-                <a:cubicBezTo>
-                  <a:pt x="171298" y="19136"/>
-                  <a:pt x="156639" y="33719"/>
-                  <a:pt x="156639" y="38014"/>
-                </a:cubicBezTo>
-                <a:cubicBezTo>
-                  <a:pt x="156639" y="42167"/>
-                  <a:pt x="156639" y="43558"/>
-                  <a:pt x="156639" y="43967"/>
-                </a:cubicBezTo>
-                <a:lnTo>
-                  <a:pt x="159658" y="43967"/>
-                </a:lnTo>
-                <a:cubicBezTo>
-                  <a:pt x="159658" y="43967"/>
-                  <a:pt x="216313" y="44825"/>
-                  <a:pt x="216313" y="85163"/>
-                </a:cubicBezTo>
-                <a:cubicBezTo>
-                  <a:pt x="216313" y="125501"/>
-                  <a:pt x="213112" y="185071"/>
-                  <a:pt x="237449" y="208121"/>
-                </a:cubicBezTo>
-                <a:cubicBezTo>
-                  <a:pt x="261785" y="231172"/>
-                  <a:pt x="257299" y="240773"/>
-                  <a:pt x="257299" y="240773"/>
-                </a:cubicBezTo>
-                <a:close/>
-              </a:path>
-              <a:path w="304800" h="304800">
-                <a:moveTo>
-                  <a:pt x="176327" y="267367"/>
-                </a:moveTo>
-                <a:cubicBezTo>
-                  <a:pt x="176327" y="280559"/>
-                  <a:pt x="165640" y="294827"/>
-                  <a:pt x="152457" y="294827"/>
-                </a:cubicBezTo>
-                <a:cubicBezTo>
-                  <a:pt x="139275" y="294827"/>
-                  <a:pt x="128588" y="280559"/>
-                  <a:pt x="128588" y="267367"/>
-                </a:cubicBezTo>
-                <a:cubicBezTo>
-                  <a:pt x="128588" y="267662"/>
-                  <a:pt x="176327" y="267062"/>
-                  <a:pt x="176327" y="267367"/>
-                </a:cubicBezTo>
-              </a:path>
-            </a:pathLst>
-          </a:custGeom>
-          <a:solidFill>
-            <a:srgbClr val="FFFFFF">
-              <a:alpha val="100000"/>
-            </a:srgbClr>
-          </a:solidFill>
-          <a:ln/>
-        </p:spPr>
-        <p:txBody>
-          <a:bodyPr/>
-          <a:lstStyle/>
-          <a:p>
-            <a:endParaRPr lang="zh-CN" altLang="en-US"/>
-          </a:p>
-        </p:txBody>
-        <p:extLst>
-          <p:ext uri="http://schemas.baidu.com/office/drawing/2023/templateData">
-            <bd:templateData xmlns="" xmlns:bd="http://schemas.baidu.com/office/drawing/2023/templateData">eyJ0YWciOiJub0VkaXQifQ==</bd:templateData>
-          </p:ext>
-        </p:extLst>
-      </p:sp>
-      <p:sp>
-        <p:nvSpPr>
-          <p:cNvPr id="10" name="AutoShape 10"/>
-          <p:cNvSpPr/>
-          <p:nvPr/>
-        </p:nvSpPr>
-        <p:spPr>
-          <a:xfrm>
-            <a:off x="851954" y="5059643"/>
-            <a:ext cx="10477500" cy="1521079"/>
-          </a:xfrm>
-          <a:prstGeom prst="roundRect">
-            <a:avLst>
-              <a:gd name="adj" fmla="val 16667"/>
-            </a:avLst>
-          </a:prstGeom>
-          <a:solidFill>
-            <a:schemeClr val="accent1">
-              <a:alpha val="100000"/>
-            </a:schemeClr>
-          </a:solidFill>
-          <a:ln/>
-        </p:spPr>
-        <p:txBody>
-          <a:bodyPr/>
-          <a:lstStyle/>
-          <a:p>
-            <a:endParaRPr lang="zh-CN" altLang="en-US"/>
-          </a:p>
-        </p:txBody>
-        <p:extLst>
-          <p:ext uri="http://schemas.baidu.com/office/drawing/2023/templateData">
-            <bd:templateData xmlns="" xmlns:bd="http://schemas.baidu.com/office/drawing/2023/templateData">eyJ0YWciOiJub0VkaXQifQ==</bd:templateData>
-          </p:ext>
-        </p:extLst>
-      </p:sp>
-      <p:sp>
-        <p:nvSpPr>
-          <p:cNvPr id="11" name="TextBox 11"/>
-          <p:cNvSpPr txBox="1"/>
-          <p:nvPr/>
-        </p:nvSpPr>
-        <p:spPr>
-          <a:xfrm>
-            <a:off x="1094842" y="5262970"/>
-            <a:ext cx="9952232" cy="1114425"/>
-          </a:xfrm>
-          <a:prstGeom prst="rect">
-            <a:avLst/>
-          </a:prstGeom>
-          <a:ln/>
-        </p:spPr>
-        <p:txBody>
-          <a:bodyPr vert="horz" wrap="square" lIns="114300" tIns="57150" rIns="114300" bIns="57150" rtlCol="0" anchor="ctr" anchorCtr="0">
-            <a:normAutofit/>
-          </a:bodyPr>
-          <a:lstStyle/>
-          <a:p>
-            <a:pPr algn="ctr">
-              <a:lnSpc>
-                <a:spcPct val="140000"/>
-              </a:lnSpc>
-              <a:spcBef>
-                <a:spcPct val="0"/>
-              </a:spcBef>
-            </a:pPr>
-            <a:r>
-              <a:rPr lang="en-US" sz="1425">
-                <a:solidFill>
-                  <a:srgbClr val="FFFFFF">
-                    <a:alpha val="100000"/>
-                  </a:srgbClr>
-                </a:solidFill>
-                <a:latin typeface="Noto Sans SC"/>
-                <a:ea typeface="Noto Sans SC"/>
-                <a:cs typeface="Noto Sans SC"/>
-              </a:rPr>
-              <a:t>不追求一次性摧毁对手 通过持续探索-感知-决策-适应的循环 比对手适应得更快 这是三级任务的核心评审视角</a:t>
-            </a:r>
-          </a:p>
-        </p:txBody>
-        <p:extLst>
-          <p:ext uri="http://schemas.baidu.com/office/drawing/2023/templateData">
-            <bd:templateData xmlns="" xmlns:bd="http://schemas.baidu.com/office/drawing/2023/templateData">eyJfdGVtcGxhdGVEYXRhIjp7ImNvbnRlbnRUeXBlIjoiJHN1bSIsImxpbmVDb3VudCI6IjMiLCJ3b3JkQ291bnQiOiI1MiJ9LCJ0YWciOiIkc3VtIn0=</bd:templateData>
-          </p:ext>
-        </p:extLst>
-      </p:sp>
-      <p:sp>
-        <p:nvSpPr>
-          <p:cNvPr id="12" name="TextBox 12"/>
-          <p:cNvSpPr txBox="1"/>
-          <p:nvPr/>
-        </p:nvSpPr>
-        <p:spPr>
-          <a:xfrm>
-            <a:off x="646786" y="1552223"/>
-            <a:ext cx="2672715" cy="530496"/>
-          </a:xfrm>
-          <a:prstGeom prst="rect">
-            <a:avLst/>
-          </a:prstGeom>
-          <a:ln/>
-        </p:spPr>
-        <p:txBody>
-          <a:bodyPr vert="horz" wrap="square" lIns="114300" tIns="57150" rIns="114300" bIns="57150" rtlCol="0" anchor="ctr" anchorCtr="0">
-            <a:normAutofit/>
-          </a:bodyPr>
-          <a:lstStyle/>
-          <a:p>
-            <a:pPr algn="r">
-              <a:lnSpc>
-                <a:spcPct val="77000"/>
-              </a:lnSpc>
-            </a:pPr>
-            <a:r>
-              <a:rPr lang="en-US" sz="2025" b="1">
-                <a:solidFill>
-                  <a:schemeClr val="accent1">
-                    <a:alpha val="100000"/>
-                  </a:schemeClr>
-                </a:solidFill>
-                <a:latin typeface="Noto Sans SC"/>
-                <a:ea typeface="Noto Sans SC"/>
-                <a:cs typeface="Noto Sans SC"/>
-              </a:rPr>
-              <a:t>行动与感知</a:t>
-            </a:r>
-          </a:p>
-        </p:txBody>
-        <p:extLst>
-          <p:ext uri="http://schemas.baidu.com/office/drawing/2023/templateData">
-            <bd:templateData xmlns="" xmlns:bd="http://schemas.baidu.com/office/drawing/2023/templateData">eyJfdGVtcGxhdGVEYXRhIjp7ImNvbnRlbnRUeXBlIjoiJGl0ZW0xX3RpdGxlIiwibGluZUNvdW50IjoiMSIsIndvcmRDb3VudCI6IjgifSwidGFnIjoiJGl0ZW0xX3RpdGxlIn0=</bd:templateData>
-          </p:ext>
-        </p:extLst>
-      </p:sp>
-      <p:sp>
-        <p:nvSpPr>
-          <p:cNvPr id="13" name="TextBox 13"/>
-          <p:cNvSpPr txBox="1"/>
-          <p:nvPr/>
-        </p:nvSpPr>
-        <p:spPr>
-          <a:xfrm>
-            <a:off x="8866669" y="1552223"/>
-            <a:ext cx="2667000" cy="530496"/>
-          </a:xfrm>
-          <a:prstGeom prst="rect">
-            <a:avLst/>
-          </a:prstGeom>
-          <a:ln/>
-        </p:spPr>
-        <p:txBody>
-          <a:bodyPr vert="horz" wrap="square" lIns="114300" tIns="57150" rIns="114300" bIns="57150" rtlCol="0" anchor="ctr" anchorCtr="0">
-            <a:normAutofit/>
-          </a:bodyPr>
-          <a:lstStyle/>
-          <a:p>
-            <a:pPr algn="l">
-              <a:lnSpc>
-                <a:spcPct val="77000"/>
-              </a:lnSpc>
-            </a:pPr>
-            <a:r>
-              <a:rPr lang="en-US" sz="2025" b="1">
-                <a:solidFill>
-                  <a:schemeClr val="accent1">
-                    <a:alpha val="100000"/>
-                  </a:schemeClr>
-                </a:solidFill>
-                <a:latin typeface="Noto Sans SC"/>
-                <a:ea typeface="Noto Sans SC"/>
-                <a:cs typeface="Noto Sans SC"/>
-              </a:rPr>
-              <a:t>决策与适应</a:t>
-            </a:r>
-          </a:p>
-        </p:txBody>
-        <p:extLst>
-          <p:ext uri="http://schemas.baidu.com/office/drawing/2023/templateData">
-            <bd:templateData xmlns="" xmlns:bd="http://schemas.baidu.com/office/drawing/2023/templateData">eyJfdGVtcGxhdGVEYXRhIjp7ImNvbnRlbnRUeXBlIjoiJGl0ZW0yX3RpdGxlIiwibGluZUNvdW50IjoiMSIsIndvcmRDb3VudCI6IjgifSwidGFnIjoiJGl0ZW0yX3RpdGxlIn0=</bd:templateData>
-          </p:ext>
-        </p:extLst>
-      </p:sp>
-      <p:sp>
-        <p:nvSpPr>
-          <p:cNvPr id="14" name="TextBox 14"/>
-          <p:cNvSpPr txBox="1"/>
-          <p:nvPr/>
-        </p:nvSpPr>
-        <p:spPr>
-          <a:xfrm>
-            <a:off x="3819141" y="2666433"/>
-            <a:ext cx="868680" cy="701040"/>
-          </a:xfrm>
-          <a:prstGeom prst="rect">
-            <a:avLst/>
-          </a:prstGeom>
-          <a:ln/>
-        </p:spPr>
-        <p:txBody>
-          <a:bodyPr vert="horz" wrap="square" lIns="91440" tIns="45720" rIns="91440" bIns="45720" rtlCol="0" anchor="ctr" anchorCtr="0">
-            <a:spAutoFit/>
-          </a:bodyPr>
-          <a:lstStyle/>
-          <a:p>
-            <a:pPr algn="ctr">
-              <a:lnSpc>
-                <a:spcPct val="100000"/>
-              </a:lnSpc>
-              <a:spcBef>
-                <a:spcPts val="375"/>
-              </a:spcBef>
-            </a:pPr>
-            <a:r>
-              <a:rPr lang="en-US" sz="3600" b="1">
-                <a:solidFill>
-                  <a:srgbClr val="FBFBFB">
-                    <a:alpha val="100000"/>
-                  </a:srgbClr>
-                </a:solidFill>
-                <a:latin typeface="Microsoft Yahei"/>
-                <a:ea typeface="Microsoft Yahei"/>
-                <a:cs typeface="Microsoft Yahei"/>
-              </a:rPr>
-              <a:t>01</a:t>
-            </a:r>
-          </a:p>
-        </p:txBody>
-        <p:extLst>
-          <p:ext uri="http://schemas.baidu.com/office/drawing/2023/templateData">
-            <bd:templateData xmlns="" xmlns:bd="http://schemas.baidu.com/office/drawing/2023/templateData">eyJfdGVtcGxhdGVEYXRhIjp7ImxpbmVDb3VudCI6IjEiLCJ3b3JkQ291bnQiOiIxIn0sInRhZyI6Im5vRWRpdCJ9</bd:templateData>
-          </p:ext>
-        </p:extLst>
-      </p:sp>
-      <p:sp>
-        <p:nvSpPr>
-          <p:cNvPr id="15" name="TextBox 15"/>
-          <p:cNvSpPr txBox="1"/>
-          <p:nvPr/>
-        </p:nvSpPr>
-        <p:spPr>
-          <a:xfrm>
-            <a:off x="7473509" y="2666433"/>
-            <a:ext cx="868680" cy="701040"/>
-          </a:xfrm>
-          <a:prstGeom prst="rect">
-            <a:avLst/>
-          </a:prstGeom>
-          <a:ln/>
-        </p:spPr>
-        <p:txBody>
-          <a:bodyPr vert="horz" wrap="square" lIns="91440" tIns="45720" rIns="91440" bIns="45720" rtlCol="0" anchor="ctr" anchorCtr="0">
-            <a:spAutoFit/>
-          </a:bodyPr>
-          <a:lstStyle/>
-          <a:p>
-            <a:pPr algn="ctr">
-              <a:lnSpc>
-                <a:spcPct val="100000"/>
-              </a:lnSpc>
-              <a:spcBef>
-                <a:spcPts val="375"/>
-              </a:spcBef>
-            </a:pPr>
-            <a:r>
-              <a:rPr lang="en-US" sz="3600" b="1">
-                <a:solidFill>
-                  <a:srgbClr val="FBFBFB">
-                    <a:alpha val="100000"/>
-                  </a:srgbClr>
-                </a:solidFill>
-                <a:latin typeface="Microsoft Yahei"/>
-                <a:ea typeface="Microsoft Yahei"/>
-                <a:cs typeface="Microsoft Yahei"/>
-              </a:rPr>
-              <a:t>02</a:t>
-            </a:r>
-          </a:p>
-        </p:txBody>
-        <p:extLst>
-          <p:ext uri="http://schemas.baidu.com/office/drawing/2023/templateData">
-            <bd:templateData xmlns="" xmlns:bd="http://schemas.baidu.com/office/drawing/2023/templateData">eyJfdGVtcGxhdGVEYXRhIjp7ImxpbmVDb3VudCI6IjEiLCJ3b3JkQ291bnQiOiIxIn0sInRhZyI6Im5vRWRpdCJ9</bd:templateData>
-          </p:ext>
-        </p:extLst>
-      </p:sp>
-      <p:sp>
-        <p:nvSpPr>
-          <p:cNvPr id="16" name="TextBox 16"/>
-          <p:cNvSpPr txBox="1"/>
-          <p:nvPr/>
-        </p:nvSpPr>
-        <p:spPr>
-          <a:xfrm>
-            <a:off x="476023" y="265328"/>
-            <a:ext cx="11239500" cy="914400"/>
-          </a:xfrm>
-          <a:prstGeom prst="rect">
-            <a:avLst/>
-          </a:prstGeom>
-          <a:ln/>
-        </p:spPr>
-        <p:txBody>
-          <a:bodyPr vert="horz" wrap="square" lIns="123825" tIns="123825" rIns="57150" bIns="123825" rtlCol="0" anchor="ctr" anchorCtr="0">
-            <a:noAutofit/>
-          </a:bodyPr>
-          <a:lstStyle/>
-          <a:p>
-            <a:pPr>
-              <a:lnSpc>
-                <a:spcPct val="140000"/>
-              </a:lnSpc>
-            </a:pPr>
-            <a:r>
-              <a:rPr lang="en-US" sz="3000" b="1">
-                <a:solidFill>
-                  <a:schemeClr val="dk2">
-                    <a:alpha val="100000"/>
-                  </a:schemeClr>
-                </a:solidFill>
-                <a:latin typeface="Noto Sans SC"/>
-                <a:ea typeface="Noto Sans SC"/>
-                <a:cs typeface="Noto Sans SC"/>
-              </a:rPr>
-              <a:t>ASDA闭环驱动仿真</a:t>
-            </a:r>
-          </a:p>
-        </p:txBody>
-        <p:extLst>
-          <p:ext uri="http://schemas.baidu.com/office/drawing/2023/templateData">
-            <bd:templateData xmlns="" xmlns:bd="http://schemas.baidu.com/office/drawing/2023/templateData">eyJfdGVtcGxhdGVEYXRhIjp7ImNvbnRlbnRUeXBlIjoiJHRpdGxlIiwibGluZUNvdW50IjoiMSIsIndvcmRDb3VudCI6IjI4In0sInRhZyI6IiR0aXRsZSJ9</bd:templateData>
-          </p:ext>
-        </p:extLst>
-      </p:sp>
-    </p:spTree>
-  </p:cSld>
-  <p:clrMapOvr>
-    <a:masterClrMapping/>
-  </p:clrMapOvr>
-  <p:extLst>
-    <p:ext uri="http://schemas.baidu.com/office/drawing/2023/templateData">
-      <bd:templateData xmlns="" xmlns:bd="http://schemas.baidu.com/office/drawing/2023/templateData">eyJtZCI6IiMjIOivt+i+k+WFpeacrOmhteagh+mimFxuIyMjIOivt+i+k+WFpeagh+mimFxu6K+35Zyo5q2k5aSE6L6T5YWl5oKo55qE5q2j5paH5YaF5a6544CC5paH5a2X5Luj6KGo5oKo55qE5Li76aKY5oCd5oOz77yM6K+35Yqb5rGC566A5piO5Zyw6KGo6L6+5oKo55qE6KeC54K544CC5Y+v6YCC5bqm5Yig5YeP5paH5a2X5Lul56Gu5L+d5L+h5oGv55qE5riF5pmw5ZKM57K+56Gu5Lyg6L6+77yM5ZCM5pe25Lmf6KaB5YWz5rOo5paH5a2X55qE6YC76L6R5oCn5ZKM5p2h55CG5oCn77yM5Lul5Yqp5LqOXG4jIyMg6K+36L6T5YWl5qCH6aKYXG7or7flnKjmraTlpITovpPlhaXmgqjnmoTmraPmloflhoXlrrnjgILmloflrZfku6PooajmgqjnmoTkuLvpopjmgJ3mg7PvvIzor7flipvmsYLnroDmmI7lnLDooajovr7mgqjnmoTop4LngrnjgILlj6/pgILluqbliKDlh4/mloflrZfku6Xnoa7kv53kv6Hmga/nmoTmuIXmmbDlkoznsr7noa7kvKDovr7vvIzlkIzml7bkuZ/opoHlhbPms6jmloflrZfnmoTpgLvovpHmgKflkozmnaHnkIbmgKfvvIzku6Xliqnkuo4iLCJ0cGxpZCI6IjY5IiwidHBsTmFtZSI6Imxpc3RTdW0yXzIzMTEyMTkiLCJlZGl0ZWQiOiJmYWxzZSJ9</bd:templateData>
     </p:ext>
   </p:extLst>
 </p:sld>

--- a/DTC2026赛道二参赛作品-含个人简介.pptx
+++ b/DTC2026赛道二参赛作品-含个人简介.pptx
@@ -8516,6 +8516,1724 @@
 <file path=ppt/slides/slide14.xml><?xml version="1.0" encoding="utf-8"?>
 <p:sld xmlns:a="http://schemas.openxmlformats.org/drawingml/2006/main" xmlns:p="http://schemas.openxmlformats.org/presentationml/2006/main" xmlns:r="http://schemas.openxmlformats.org/officeDocument/2006/relationships">
   <p:cSld>
+    <p:spTree>
+      <p:nvGrpSpPr>
+        <p:cNvPr id="1" name=""/>
+        <p:cNvGrpSpPr/>
+        <p:nvPr/>
+      </p:nvGrpSpPr>
+      <p:grpSpPr/>
+      <p:sp>
+        <p:nvSpPr>
+          <p:cNvPr id="2" name="TextBox 1"/>
+          <p:cNvSpPr txBox="1"/>
+          <p:nvPr/>
+        </p:nvSpPr>
+        <p:spPr>
+          <a:xfrm>
+            <a:off x="502920" y="292608"/>
+            <a:ext cx="11155680" cy="685800"/>
+          </a:xfrm>
+          <a:prstGeom prst="rect">
+            <a:avLst/>
+          </a:prstGeom>
+          <a:noFill/>
+        </p:spPr>
+        <p:txBody>
+          <a:bodyPr wrap="square" lIns="25400" rIns="25400" tIns="25400" bIns="25400">
+            <a:spAutoFit/>
+          </a:bodyPr>
+          <a:lstStyle/>
+          <a:p>
+            <a:pPr algn="l"/>
+            <a:r>
+              <a:rPr sz="2900" b="1">
+                <a:solidFill>
+                  <a:srgbClr val="1E2761"/>
+                </a:solidFill>
+                <a:latin typeface="Microsoft YaHei"/>
+              </a:rPr>
+              <a:t>权威数据升级（P9-P11）：22 → 67 实体 · 政治准入 · 指挥链</a:t>
+            </a:r>
+          </a:p>
+        </p:txBody>
+      </p:sp>
+      <p:sp>
+        <p:nvSpPr>
+          <p:cNvPr id="3" name="TextBox 2"/>
+          <p:cNvSpPr txBox="1"/>
+          <p:nvPr/>
+        </p:nvSpPr>
+        <p:spPr>
+          <a:xfrm>
+            <a:off x="521207" y="932688"/>
+            <a:ext cx="11155680" cy="365760"/>
+          </a:xfrm>
+          <a:prstGeom prst="rect">
+            <a:avLst/>
+          </a:prstGeom>
+          <a:noFill/>
+        </p:spPr>
+        <p:txBody>
+          <a:bodyPr wrap="square" lIns="25400" rIns="25400" tIns="25400" bIns="25400">
+            <a:spAutoFit/>
+          </a:bodyPr>
+          <a:lstStyle/>
+          <a:p>
+            <a:pPr algn="l"/>
+            <a:r>
+              <a:rPr sz="1300" b="0">
+                <a:solidFill>
+                  <a:srgbClr val="57606A"/>
+                </a:solidFill>
+                <a:latin typeface="Microsoft YaHei"/>
+              </a:rPr>
+              <a:t>全部基地数据可溯源至权威公开报告 —— 「每一颗坐标都有出处」</a:t>
+            </a:r>
+          </a:p>
+        </p:txBody>
+      </p:sp>
+      <p:sp>
+        <p:nvSpPr>
+          <p:cNvPr id="4" name="Rounded Rectangle 3"/>
+          <p:cNvSpPr/>
+          <p:nvPr/>
+        </p:nvSpPr>
+        <p:spPr>
+          <a:xfrm>
+            <a:off x="502920" y="1417320"/>
+            <a:ext cx="2697480" cy="1234440"/>
+          </a:xfrm>
+          <a:prstGeom prst="roundRect">
+            <a:avLst/>
+          </a:prstGeom>
+          <a:solidFill>
+            <a:srgbClr val="F2F6FA"/>
+          </a:solidFill>
+          <a:ln w="12700">
+            <a:solidFill>
+              <a:srgbClr val="C9D6E4"/>
+            </a:solidFill>
+          </a:ln>
+          <a:effectLst/>
+        </p:spPr>
+        <p:style>
+          <a:lnRef idx="1">
+            <a:schemeClr val="accent1"/>
+          </a:lnRef>
+          <a:fillRef idx="3">
+            <a:schemeClr val="accent1"/>
+          </a:fillRef>
+          <a:effectRef idx="2">
+            <a:schemeClr val="accent1"/>
+          </a:effectRef>
+          <a:fontRef idx="minor">
+            <a:schemeClr val="lt1"/>
+          </a:fontRef>
+        </p:style>
+        <p:txBody>
+          <a:bodyPr rtlCol="0" anchor="t" wrap="square" lIns="127000" rIns="127000" tIns="76200" bIns="76200"/>
+          <a:lstStyle/>
+          <a:p>
+            <a:pPr algn="l"/>
+            <a:r>
+              <a:rPr sz="1500" b="1">
+                <a:solidFill>
+                  <a:srgbClr val="0969DA"/>
+                </a:solidFill>
+                <a:latin typeface="Microsoft YaHei"/>
+              </a:rPr>
+              <a:t>CRS R47589</a:t>
+            </a:r>
+          </a:p>
+          <a:p>
+            <a:pPr algn="l"/>
+            <a:r>
+              <a:rPr sz="1100" b="0">
+                <a:solidFill>
+                  <a:srgbClr val="1F2328"/>
+                </a:solidFill>
+                <a:latin typeface="Microsoft YaHei"/>
+              </a:rPr>
+              <a:t>Table A-1 全量 66 站点清单
++ Tinian 特殊保留 = 67 实体</a:t>
+            </a:r>
+          </a:p>
+        </p:txBody>
+      </p:sp>
+      <p:sp>
+        <p:nvSpPr>
+          <p:cNvPr id="5" name="Rounded Rectangle 4"/>
+          <p:cNvSpPr/>
+          <p:nvPr/>
+        </p:nvSpPr>
+        <p:spPr>
+          <a:xfrm>
+            <a:off x="3364991" y="1417320"/>
+            <a:ext cx="2697480" cy="1234440"/>
+          </a:xfrm>
+          <a:prstGeom prst="roundRect">
+            <a:avLst/>
+          </a:prstGeom>
+          <a:solidFill>
+            <a:srgbClr val="F2F6FA"/>
+          </a:solidFill>
+          <a:ln w="12700">
+            <a:solidFill>
+              <a:srgbClr val="C9D6E4"/>
+            </a:solidFill>
+          </a:ln>
+          <a:effectLst/>
+        </p:spPr>
+        <p:style>
+          <a:lnRef idx="1">
+            <a:schemeClr val="accent1"/>
+          </a:lnRef>
+          <a:fillRef idx="3">
+            <a:schemeClr val="accent1"/>
+          </a:fillRef>
+          <a:effectRef idx="2">
+            <a:schemeClr val="accent1"/>
+          </a:effectRef>
+          <a:fontRef idx="minor">
+            <a:schemeClr val="lt1"/>
+          </a:fontRef>
+        </p:style>
+        <p:txBody>
+          <a:bodyPr rtlCol="0" anchor="t" wrap="square" lIns="127000" rIns="127000" tIns="76200" bIns="76200"/>
+          <a:lstStyle/>
+          <a:p>
+            <a:pPr algn="l"/>
+            <a:r>
+              <a:rPr sz="1500" b="1">
+                <a:solidFill>
+                  <a:srgbClr val="0969DA"/>
+                </a:solidFill>
+                <a:latin typeface="Microsoft YaHei"/>
+              </a:rPr>
+              <a:t>DoD FY2024 BSR</a:t>
+            </a:r>
+          </a:p>
+          <a:p>
+            <a:pPr algn="l"/>
+            <a:r>
+              <a:rPr sz="1100" b="0">
+                <a:solidFill>
+                  <a:srgbClr val="1F2328"/>
+                </a:solidFill>
+                <a:latin typeface="Microsoft YaHei"/>
+              </a:rPr>
+              <a:t>PRV 2.23 万亿 · 四分位分级
+建筑/土地权威数据</a:t>
+            </a:r>
+          </a:p>
+        </p:txBody>
+      </p:sp>
+      <p:sp>
+        <p:nvSpPr>
+          <p:cNvPr id="6" name="Rounded Rectangle 5"/>
+          <p:cNvSpPr/>
+          <p:nvPr/>
+        </p:nvSpPr>
+        <p:spPr>
+          <a:xfrm>
+            <a:off x="6227064" y="1417320"/>
+            <a:ext cx="2697480" cy="1234440"/>
+          </a:xfrm>
+          <a:prstGeom prst="roundRect">
+            <a:avLst/>
+          </a:prstGeom>
+          <a:solidFill>
+            <a:srgbClr val="F2F6FA"/>
+          </a:solidFill>
+          <a:ln w="12700">
+            <a:solidFill>
+              <a:srgbClr val="C9D6E4"/>
+            </a:solidFill>
+          </a:ln>
+          <a:effectLst/>
+        </p:spPr>
+        <p:style>
+          <a:lnRef idx="1">
+            <a:schemeClr val="accent1"/>
+          </a:lnRef>
+          <a:fillRef idx="3">
+            <a:schemeClr val="accent1"/>
+          </a:fillRef>
+          <a:effectRef idx="2">
+            <a:schemeClr val="accent1"/>
+          </a:effectRef>
+          <a:fontRef idx="minor">
+            <a:schemeClr val="lt1"/>
+          </a:fontRef>
+        </p:style>
+        <p:txBody>
+          <a:bodyPr rtlCol="0" anchor="t" wrap="square" lIns="127000" rIns="127000" tIns="76200" bIns="76200"/>
+          <a:lstStyle/>
+          <a:p>
+            <a:pPr algn="l"/>
+            <a:r>
+              <a:rPr sz="1500" b="1">
+                <a:solidFill>
+                  <a:srgbClr val="0969DA"/>
+                </a:solidFill>
+                <a:latin typeface="Microsoft YaHei"/>
+              </a:rPr>
+              <a:t>RAND RRA967-2</a:t>
+            </a:r>
+          </a:p>
+          <a:p>
+            <a:pPr algn="l"/>
+            <a:r>
+              <a:rPr sz="1100" b="0">
+                <a:solidFill>
+                  <a:srgbClr val="1F2328"/>
+                </a:solidFill>
+                <a:latin typeface="Microsoft YaHei"/>
+              </a:rPr>
+              <a:t>盟友政治意愿不确定性
+准入建模为随机变量</a:t>
+            </a:r>
+          </a:p>
+        </p:txBody>
+      </p:sp>
+      <p:sp>
+        <p:nvSpPr>
+          <p:cNvPr id="7" name="Rounded Rectangle 6"/>
+          <p:cNvSpPr/>
+          <p:nvPr/>
+        </p:nvSpPr>
+        <p:spPr>
+          <a:xfrm>
+            <a:off x="9089136" y="1417320"/>
+            <a:ext cx="2697480" cy="1234440"/>
+          </a:xfrm>
+          <a:prstGeom prst="roundRect">
+            <a:avLst/>
+          </a:prstGeom>
+          <a:solidFill>
+            <a:srgbClr val="F2F6FA"/>
+          </a:solidFill>
+          <a:ln w="12700">
+            <a:solidFill>
+              <a:srgbClr val="C9D6E4"/>
+            </a:solidFill>
+          </a:ln>
+          <a:effectLst/>
+        </p:spPr>
+        <p:style>
+          <a:lnRef idx="1">
+            <a:schemeClr val="accent1"/>
+          </a:lnRef>
+          <a:fillRef idx="3">
+            <a:schemeClr val="accent1"/>
+          </a:fillRef>
+          <a:effectRef idx="2">
+            <a:schemeClr val="accent1"/>
+          </a:effectRef>
+          <a:fontRef idx="minor">
+            <a:schemeClr val="lt1"/>
+          </a:fontRef>
+        </p:style>
+        <p:txBody>
+          <a:bodyPr rtlCol="0" anchor="t" wrap="square" lIns="127000" rIns="127000" tIns="76200" bIns="76200"/>
+          <a:lstStyle/>
+          <a:p>
+            <a:pPr algn="l"/>
+            <a:r>
+              <a:rPr sz="1500" b="1">
+                <a:solidFill>
+                  <a:srgbClr val="0969DA"/>
+                </a:solidFill>
+                <a:latin typeface="Microsoft YaHei"/>
+              </a:rPr>
+              <a:t>CRS IF12175</a:t>
+            </a:r>
+          </a:p>
+          <a:p>
+            <a:pPr algn="l"/>
+            <a:r>
+              <a:rPr sz="1100" b="0">
+                <a:solidFill>
+                  <a:srgbClr val="1F2328"/>
+                </a:solidFill>
+                <a:latin typeface="Microsoft YaHei"/>
+              </a:rPr>
+              <a:t>INDOPACOM 架构
+5 军种组成 + 3 下属联合</a:t>
+            </a:r>
+          </a:p>
+        </p:txBody>
+      </p:sp>
+      <p:sp>
+        <p:nvSpPr>
+          <p:cNvPr id="8" name="Rounded Rectangle 7"/>
+          <p:cNvSpPr/>
+          <p:nvPr/>
+        </p:nvSpPr>
+        <p:spPr>
+          <a:xfrm>
+            <a:off x="502920" y="2971800"/>
+            <a:ext cx="3657600" cy="1737360"/>
+          </a:xfrm>
+          <a:prstGeom prst="roundRect">
+            <a:avLst/>
+          </a:prstGeom>
+          <a:solidFill>
+            <a:srgbClr val="FFFFFF"/>
+          </a:solidFill>
+          <a:ln w="12700">
+            <a:solidFill>
+              <a:srgbClr val="C9D6E4"/>
+            </a:solidFill>
+          </a:ln>
+          <a:effectLst/>
+        </p:spPr>
+        <p:style>
+          <a:lnRef idx="1">
+            <a:schemeClr val="accent1"/>
+          </a:lnRef>
+          <a:fillRef idx="3">
+            <a:schemeClr val="accent1"/>
+          </a:fillRef>
+          <a:effectRef idx="2">
+            <a:schemeClr val="accent1"/>
+          </a:effectRef>
+          <a:fontRef idx="minor">
+            <a:schemeClr val="lt1"/>
+          </a:fontRef>
+        </p:style>
+        <p:txBody>
+          <a:bodyPr rtlCol="0" anchor="t" wrap="square" lIns="127000" rIns="127000" tIns="76200" bIns="76200"/>
+          <a:lstStyle/>
+          <a:p>
+            <a:pPr algn="l"/>
+            <a:r>
+              <a:rPr sz="1500" b="1">
+                <a:solidFill>
+                  <a:srgbClr val="1E2761"/>
+                </a:solidFill>
+                <a:latin typeface="Microsoft YaHei"/>
+              </a:rPr>
+              <a:t>第一级 · 基地标绘</a:t>
+            </a:r>
+          </a:p>
+          <a:p>
+            <a:pPr algn="l"/>
+            <a:r>
+              <a:rPr sz="1200" b="0">
+                <a:solidFill>
+                  <a:srgbClr val="1F2328"/>
+                </a:solidFill>
+                <a:latin typeface="Microsoft YaHei"/>
+              </a:rPr>
+              <a:t>67 实体 / 33 字段档案
+Tier 四级分层 · QGIS + Leaflet 重生成
+总索引可溯源 CRS 编号</a:t>
+            </a:r>
+          </a:p>
+        </p:txBody>
+      </p:sp>
+      <p:sp>
+        <p:nvSpPr>
+          <p:cNvPr id="9" name="Rounded Rectangle 8"/>
+          <p:cNvSpPr/>
+          <p:nvPr/>
+        </p:nvSpPr>
+        <p:spPr>
+          <a:xfrm>
+            <a:off x="4325112" y="2971800"/>
+            <a:ext cx="3657600" cy="1737360"/>
+          </a:xfrm>
+          <a:prstGeom prst="roundRect">
+            <a:avLst/>
+          </a:prstGeom>
+          <a:solidFill>
+            <a:srgbClr val="FFFFFF"/>
+          </a:solidFill>
+          <a:ln w="12700">
+            <a:solidFill>
+              <a:srgbClr val="C9D6E4"/>
+            </a:solidFill>
+          </a:ln>
+          <a:effectLst/>
+        </p:spPr>
+        <p:style>
+          <a:lnRef idx="1">
+            <a:schemeClr val="accent1"/>
+          </a:lnRef>
+          <a:fillRef idx="3">
+            <a:schemeClr val="accent1"/>
+          </a:fillRef>
+          <a:effectRef idx="2">
+            <a:schemeClr val="accent1"/>
+          </a:effectRef>
+          <a:fontRef idx="minor">
+            <a:schemeClr val="lt1"/>
+          </a:fontRef>
+        </p:style>
+        <p:txBody>
+          <a:bodyPr rtlCol="0" anchor="t" wrap="square" lIns="127000" rIns="127000" tIns="76200" bIns="76200"/>
+          <a:lstStyle/>
+          <a:p>
+            <a:pPr algn="l"/>
+            <a:r>
+              <a:rPr sz="1500" b="1">
+                <a:solidFill>
+                  <a:srgbClr val="1E2761"/>
+                </a:solidFill>
+                <a:latin typeface="Microsoft YaHei"/>
+              </a:rPr>
+              <a:t>第二级 · ACE 引擎</a:t>
+            </a:r>
+          </a:p>
+          <a:p>
+            <a:pPr algn="l"/>
+            <a:r>
+              <a:rPr sz="1200" b="0">
+                <a:solidFill>
+                  <a:srgbClr val="1F2328"/>
+                </a:solidFill>
+                <a:latin typeface="Microsoft YaHei"/>
+              </a:rPr>
+              <a:t>部署优化器排除 DENIED 站点
+Pareto 新增「政治风险敞口」目标
+转移规划过滤政治不可用基地</a:t>
+            </a:r>
+          </a:p>
+        </p:txBody>
+      </p:sp>
+      <p:sp>
+        <p:nvSpPr>
+          <p:cNvPr id="10" name="Rounded Rectangle 9"/>
+          <p:cNvSpPr/>
+          <p:nvPr/>
+        </p:nvSpPr>
+        <p:spPr>
+          <a:xfrm>
+            <a:off x="8147304" y="2971800"/>
+            <a:ext cx="3657600" cy="1737360"/>
+          </a:xfrm>
+          <a:prstGeom prst="roundRect">
+            <a:avLst/>
+          </a:prstGeom>
+          <a:solidFill>
+            <a:srgbClr val="FFFFFF"/>
+          </a:solidFill>
+          <a:ln w="12700">
+            <a:solidFill>
+              <a:srgbClr val="C9D6E4"/>
+            </a:solidFill>
+          </a:ln>
+          <a:effectLst/>
+        </p:spPr>
+        <p:style>
+          <a:lnRef idx="1">
+            <a:schemeClr val="accent1"/>
+          </a:lnRef>
+          <a:fillRef idx="3">
+            <a:schemeClr val="accent1"/>
+          </a:fillRef>
+          <a:effectRef idx="2">
+            <a:schemeClr val="accent1"/>
+          </a:effectRef>
+          <a:fontRef idx="minor">
+            <a:schemeClr val="lt1"/>
+          </a:fontRef>
+        </p:style>
+        <p:txBody>
+          <a:bodyPr rtlCol="0" anchor="t" wrap="square" lIns="127000" rIns="127000" tIns="76200" bIns="76200"/>
+          <a:lstStyle/>
+          <a:p>
+            <a:pPr algn="l"/>
+            <a:r>
+              <a:rPr sz="1500" b="1">
+                <a:solidFill>
+                  <a:srgbClr val="1E2761"/>
+                </a:solidFill>
+                <a:latin typeface="Microsoft YaHei"/>
+              </a:rPr>
+              <a:t>第三级 · PMTEC 系统</a:t>
+            </a:r>
+          </a:p>
+          <a:p>
+            <a:pPr algn="l"/>
+            <a:r>
+              <a:rPr sz="1200" b="0">
+                <a:solidFill>
+                  <a:srgbClr val="1F2328"/>
+                </a:solidFill>
+                <a:latin typeface="Microsoft YaHei"/>
+              </a:rPr>
+              <a:t>指挥链 5+3 司令部建模
+RBAC 军种扩展 + JWT branch claim
+灰色地带事件驱动准入演化</a:t>
+            </a:r>
+          </a:p>
+        </p:txBody>
+      </p:sp>
+      <p:sp>
+        <p:nvSpPr>
+          <p:cNvPr id="11" name="TextBox 10"/>
+          <p:cNvSpPr txBox="1"/>
+          <p:nvPr/>
+        </p:nvSpPr>
+        <p:spPr>
+          <a:xfrm>
+            <a:off x="502920" y="4983480"/>
+            <a:ext cx="11155680" cy="822960"/>
+          </a:xfrm>
+          <a:prstGeom prst="rect">
+            <a:avLst/>
+          </a:prstGeom>
+          <a:noFill/>
+        </p:spPr>
+        <p:txBody>
+          <a:bodyPr wrap="square" lIns="25400" rIns="25400" tIns="25400" bIns="25400">
+            <a:spAutoFit/>
+          </a:bodyPr>
+          <a:lstStyle/>
+          <a:p>
+            <a:pPr algn="l"/>
+            <a:r>
+              <a:rPr sz="1300" b="0">
+                <a:solidFill>
+                  <a:srgbClr val="B0770B"/>
+                </a:solidFill>
+                <a:latin typeface="Microsoft YaHei"/>
+              </a:rPr>
+              <a:t>政治准入三态状态机：Full（全面准入）/ Restricted（有限准入，容量折损）/ Denied（准入被拒）</a:t>
+            </a:r>
+          </a:p>
+          <a:p>
+            <a:pPr algn="l"/>
+            <a:r>
+              <a:rPr sz="1300" b="0">
+                <a:solidFill>
+                  <a:srgbClr val="B0770B"/>
+                </a:solidFill>
+                <a:latin typeface="Microsoft YaHei"/>
+              </a:rPr>
+              <a:t>四类政治事件驱动演化：灰色地带 · 冲突升级 · 主权打击 · 再保证外交</a:t>
+            </a:r>
+          </a:p>
+        </p:txBody>
+      </p:sp>
+    </p:spTree>
+  </p:cSld>
+  <p:clrMapOvr>
+    <a:masterClrMapping/>
+  </p:clrMapOvr>
+</p:sld>
+</file>
+
+<file path=ppt/slides/slide15.xml><?xml version="1.0" encoding="utf-8"?>
+<p:sld xmlns:a="http://schemas.openxmlformats.org/drawingml/2006/main" xmlns:p="http://schemas.openxmlformats.org/presentationml/2006/main" xmlns:r="http://schemas.openxmlformats.org/officeDocument/2006/relationships">
+  <p:cSld>
+    <p:spTree>
+      <p:nvGrpSpPr>
+        <p:cNvPr id="1" name=""/>
+        <p:cNvGrpSpPr/>
+        <p:nvPr/>
+      </p:nvGrpSpPr>
+      <p:grpSpPr/>
+      <p:sp>
+        <p:nvSpPr>
+          <p:cNvPr id="2" name="TextBox 1"/>
+          <p:cNvSpPr txBox="1"/>
+          <p:nvPr/>
+        </p:nvSpPr>
+        <p:spPr>
+          <a:xfrm>
+            <a:off x="502920" y="292608"/>
+            <a:ext cx="11155680" cy="685800"/>
+          </a:xfrm>
+          <a:prstGeom prst="rect">
+            <a:avLst/>
+          </a:prstGeom>
+          <a:noFill/>
+        </p:spPr>
+        <p:txBody>
+          <a:bodyPr wrap="square" lIns="25400" rIns="25400" tIns="25400" bIns="25400">
+            <a:spAutoFit/>
+          </a:bodyPr>
+          <a:lstStyle/>
+          <a:p>
+            <a:pPr algn="l"/>
+            <a:r>
+              <a:rPr sz="2900" b="1">
+                <a:solidFill>
+                  <a:srgbClr val="1E2761"/>
+                </a:solidFill>
+                <a:latin typeface="Microsoft YaHei"/>
+              </a:rPr>
+              <a:t>P12 系统升级：219 维政治观测 · 实时态势 · 服务契约</a:t>
+            </a:r>
+          </a:p>
+        </p:txBody>
+      </p:sp>
+      <p:sp>
+        <p:nvSpPr>
+          <p:cNvPr id="3" name="TextBox 2"/>
+          <p:cNvSpPr txBox="1"/>
+          <p:nvPr/>
+        </p:nvSpPr>
+        <p:spPr>
+          <a:xfrm>
+            <a:off x="521207" y="932688"/>
+            <a:ext cx="11155680" cy="365760"/>
+          </a:xfrm>
+          <a:prstGeom prst="rect">
+            <a:avLst/>
+          </a:prstGeom>
+          <a:noFill/>
+        </p:spPr>
+        <p:txBody>
+          <a:bodyPr wrap="square" lIns="25400" rIns="25400" tIns="25400" bIns="25400">
+            <a:spAutoFit/>
+          </a:bodyPr>
+          <a:lstStyle/>
+          <a:p>
+            <a:pPr algn="l"/>
+            <a:r>
+              <a:rPr sz="1300" b="0">
+                <a:solidFill>
+                  <a:srgbClr val="57606A"/>
+                </a:solidFill>
+                <a:latin typeface="Microsoft YaHei"/>
+              </a:rPr>
+              <a:t>对手策略库扩展至 6 项（RAND 风格：多轴协同饱和 / 政治分化压制）</a:t>
+            </a:r>
+          </a:p>
+        </p:txBody>
+      </p:sp>
+      <p:sp>
+        <p:nvSpPr>
+          <p:cNvPr id="4" name="Rounded Rectangle 3"/>
+          <p:cNvSpPr/>
+          <p:nvPr/>
+        </p:nvSpPr>
+        <p:spPr>
+          <a:xfrm>
+            <a:off x="502920" y="1417320"/>
+            <a:ext cx="6035040" cy="960120"/>
+          </a:xfrm>
+          <a:prstGeom prst="roundRect">
+            <a:avLst/>
+          </a:prstGeom>
+          <a:solidFill>
+            <a:srgbClr val="FFFFFF"/>
+          </a:solidFill>
+          <a:ln w="12700">
+            <a:solidFill>
+              <a:srgbClr val="C9D6E4"/>
+            </a:solidFill>
+          </a:ln>
+          <a:effectLst/>
+        </p:spPr>
+        <p:style>
+          <a:lnRef idx="1">
+            <a:schemeClr val="accent1"/>
+          </a:lnRef>
+          <a:fillRef idx="3">
+            <a:schemeClr val="accent1"/>
+          </a:fillRef>
+          <a:effectRef idx="2">
+            <a:schemeClr val="accent1"/>
+          </a:effectRef>
+          <a:fontRef idx="minor">
+            <a:schemeClr val="lt1"/>
+          </a:fontRef>
+        </p:style>
+        <p:txBody>
+          <a:bodyPr rtlCol="0" anchor="t" wrap="square" lIns="127000" rIns="127000" tIns="76200" bIns="76200"/>
+          <a:lstStyle/>
+          <a:p>
+            <a:pPr algn="l"/>
+            <a:r>
+              <a:rPr sz="1400" b="1">
+                <a:solidFill>
+                  <a:srgbClr val="0969DA"/>
+                </a:solidFill>
+                <a:latin typeface="Microsoft YaHei"/>
+              </a:rPr>
+              <a:t>观测空间 182 → 219 维</a:t>
+            </a:r>
+          </a:p>
+          <a:p>
+            <a:pPr algn="l"/>
+            <a:r>
+              <a:rPr sz="1150" b="0">
+                <a:solidFill>
+                  <a:srgbClr val="1F2328"/>
+                </a:solidFill>
+                <a:latin typeface="Microsoft YaHei"/>
+              </a:rPr>
+              <a:t>36 盟友站点准入容量因子
++ 全局冲突升级度（每 ASDA 周期演化）</a:t>
+            </a:r>
+          </a:p>
+        </p:txBody>
+      </p:sp>
+      <p:sp>
+        <p:nvSpPr>
+          <p:cNvPr id="5" name="Rounded Rectangle 4"/>
+          <p:cNvSpPr/>
+          <p:nvPr/>
+        </p:nvSpPr>
+        <p:spPr>
+          <a:xfrm>
+            <a:off x="502920" y="2496312"/>
+            <a:ext cx="6035040" cy="960120"/>
+          </a:xfrm>
+          <a:prstGeom prst="roundRect">
+            <a:avLst/>
+          </a:prstGeom>
+          <a:solidFill>
+            <a:srgbClr val="FFFFFF"/>
+          </a:solidFill>
+          <a:ln w="12700">
+            <a:solidFill>
+              <a:srgbClr val="C9D6E4"/>
+            </a:solidFill>
+          </a:ln>
+          <a:effectLst/>
+        </p:spPr>
+        <p:style>
+          <a:lnRef idx="1">
+            <a:schemeClr val="accent1"/>
+          </a:lnRef>
+          <a:fillRef idx="3">
+            <a:schemeClr val="accent1"/>
+          </a:fillRef>
+          <a:effectRef idx="2">
+            <a:schemeClr val="accent1"/>
+          </a:effectRef>
+          <a:fontRef idx="minor">
+            <a:schemeClr val="lt1"/>
+          </a:fontRef>
+        </p:style>
+        <p:txBody>
+          <a:bodyPr rtlCol="0" anchor="t" wrap="square" lIns="127000" rIns="127000" tIns="76200" bIns="76200"/>
+          <a:lstStyle/>
+          <a:p>
+            <a:pPr algn="l"/>
+            <a:r>
+              <a:rPr sz="1400" b="1">
+                <a:solidFill>
+                  <a:srgbClr val="0969DA"/>
+                </a:solidFill>
+                <a:latin typeface="Microsoft YaHei"/>
+              </a:rPr>
+              <a:t>DQN 219 维重训练</a:t>
+            </a:r>
+          </a:p>
+          <a:p>
+            <a:pPr algn="l"/>
+            <a:r>
+              <a:rPr sz="1150" b="0">
+                <a:solidFill>
+                  <a:srgbClr val="1F2328"/>
+                </a:solidFill>
+                <a:latin typeface="Microsoft YaHei"/>
+              </a:rPr>
+              <a:t>Intel Arc XPU 加速 · 200K 步三阶段课程学习
+全新建网 + 阶段链式（94.0% → 65.4% → 82.2%）</a:t>
+            </a:r>
+          </a:p>
+        </p:txBody>
+      </p:sp>
+      <p:sp>
+        <p:nvSpPr>
+          <p:cNvPr id="6" name="Rounded Rectangle 5"/>
+          <p:cNvSpPr/>
+          <p:nvPr/>
+        </p:nvSpPr>
+        <p:spPr>
+          <a:xfrm>
+            <a:off x="502920" y="3575304"/>
+            <a:ext cx="6035040" cy="960120"/>
+          </a:xfrm>
+          <a:prstGeom prst="roundRect">
+            <a:avLst/>
+          </a:prstGeom>
+          <a:solidFill>
+            <a:srgbClr val="FFFFFF"/>
+          </a:solidFill>
+          <a:ln w="12700">
+            <a:solidFill>
+              <a:srgbClr val="C9D6E4"/>
+            </a:solidFill>
+          </a:ln>
+          <a:effectLst/>
+        </p:spPr>
+        <p:style>
+          <a:lnRef idx="1">
+            <a:schemeClr val="accent1"/>
+          </a:lnRef>
+          <a:fillRef idx="3">
+            <a:schemeClr val="accent1"/>
+          </a:fillRef>
+          <a:effectRef idx="2">
+            <a:schemeClr val="accent1"/>
+          </a:effectRef>
+          <a:fontRef idx="minor">
+            <a:schemeClr val="lt1"/>
+          </a:fontRef>
+        </p:style>
+        <p:txBody>
+          <a:bodyPr rtlCol="0" anchor="t" wrap="square" lIns="127000" rIns="127000" tIns="76200" bIns="76200"/>
+          <a:lstStyle/>
+          <a:p>
+            <a:pPr algn="l"/>
+            <a:r>
+              <a:rPr sz="1400" b="1">
+                <a:solidFill>
+                  <a:srgbClr val="0969DA"/>
+                </a:solidFill>
+                <a:latin typeface="Microsoft YaHei"/>
+              </a:rPr>
+              <a:t>实时态势与回放</a:t>
+            </a:r>
+          </a:p>
+          <a:p>
+            <a:pPr algn="l"/>
+            <a:r>
+              <a:rPr sz="1150" b="0">
+                <a:solidFill>
+                  <a:srgbClr val="1F2328"/>
+                </a:solidFill>
+                <a:latin typeface="Microsoft YaHei"/>
+              </a:rPr>
+              <a:t>WebSocket 10 并发 · 暂停/恢复/逐周期回溯
+SPEAR 四泳道时间轴（政治准入泳道）</a:t>
+            </a:r>
+          </a:p>
+        </p:txBody>
+      </p:sp>
+      <p:sp>
+        <p:nvSpPr>
+          <p:cNvPr id="7" name="Rounded Rectangle 6"/>
+          <p:cNvSpPr/>
+          <p:nvPr/>
+        </p:nvSpPr>
+        <p:spPr>
+          <a:xfrm>
+            <a:off x="502920" y="4654296"/>
+            <a:ext cx="6035040" cy="960120"/>
+          </a:xfrm>
+          <a:prstGeom prst="roundRect">
+            <a:avLst/>
+          </a:prstGeom>
+          <a:solidFill>
+            <a:srgbClr val="FFFFFF"/>
+          </a:solidFill>
+          <a:ln w="12700">
+            <a:solidFill>
+              <a:srgbClr val="C9D6E4"/>
+            </a:solidFill>
+          </a:ln>
+          <a:effectLst/>
+        </p:spPr>
+        <p:style>
+          <a:lnRef idx="1">
+            <a:schemeClr val="accent1"/>
+          </a:lnRef>
+          <a:fillRef idx="3">
+            <a:schemeClr val="accent1"/>
+          </a:fillRef>
+          <a:effectRef idx="2">
+            <a:schemeClr val="accent1"/>
+          </a:effectRef>
+          <a:fontRef idx="minor">
+            <a:schemeClr val="lt1"/>
+          </a:fontRef>
+        </p:style>
+        <p:txBody>
+          <a:bodyPr rtlCol="0" anchor="t" wrap="square" lIns="127000" rIns="127000" tIns="76200" bIns="76200"/>
+          <a:lstStyle/>
+          <a:p>
+            <a:pPr algn="l"/>
+            <a:r>
+              <a:rPr sz="1400" b="1">
+                <a:solidFill>
+                  <a:srgbClr val="0969DA"/>
+                </a:solidFill>
+                <a:latin typeface="Microsoft YaHei"/>
+              </a:rPr>
+              <a:t>平台化与契约</a:t>
+            </a:r>
+          </a:p>
+          <a:p>
+            <a:pPr algn="l"/>
+            <a:r>
+              <a:rPr sz="1150" b="0">
+                <a:solidFill>
+                  <a:srgbClr val="1F2328"/>
+                </a:solidFill>
+                <a:latin typeface="Microsoft YaHei"/>
+              </a:rPr>
+              <a:t>Maven 契约补全四大 DTB 服务
+REST + gRPC 双栈 · 指挥链/政治准入端点</a:t>
+            </a:r>
+          </a:p>
+        </p:txBody>
+      </p:sp>
+      <p:sp>
+        <p:nvSpPr>
+          <p:cNvPr id="8" name="Rounded Rectangle 7"/>
+          <p:cNvSpPr/>
+          <p:nvPr/>
+        </p:nvSpPr>
+        <p:spPr>
+          <a:xfrm>
+            <a:off x="6766560" y="1417320"/>
+            <a:ext cx="4892040" cy="4224528"/>
+          </a:xfrm>
+          <a:prstGeom prst="roundRect">
+            <a:avLst/>
+          </a:prstGeom>
+          <a:solidFill>
+            <a:srgbClr val="F2F6FA"/>
+          </a:solidFill>
+          <a:ln w="12700">
+            <a:solidFill>
+              <a:srgbClr val="C9D6E4"/>
+            </a:solidFill>
+          </a:ln>
+          <a:effectLst/>
+        </p:spPr>
+        <p:style>
+          <a:lnRef idx="1">
+            <a:schemeClr val="accent1"/>
+          </a:lnRef>
+          <a:fillRef idx="3">
+            <a:schemeClr val="accent1"/>
+          </a:fillRef>
+          <a:effectRef idx="2">
+            <a:schemeClr val="accent1"/>
+          </a:effectRef>
+          <a:fontRef idx="minor">
+            <a:schemeClr val="lt1"/>
+          </a:fontRef>
+        </p:style>
+        <p:txBody>
+          <a:bodyPr rtlCol="0" anchor="t" wrap="square" lIns="127000" rIns="127000" tIns="76200" bIns="76200"/>
+          <a:lstStyle/>
+          <a:p>
+            <a:pPr algn="l"/>
+            <a:r>
+              <a:rPr sz="1500" b="1">
+                <a:solidFill>
+                  <a:srgbClr val="1E2761"/>
+                </a:solidFill>
+                <a:latin typeface="Microsoft YaHei"/>
+              </a:rPr>
+              <a:t>对手策略库（6 项）</a:t>
+            </a:r>
+          </a:p>
+          <a:p>
+            <a:pPr algn="l"/>
+            <a:r>
+              <a:rPr sz="1200" b="0">
+                <a:solidFill>
+                  <a:srgbClr val="1F2328"/>
+                </a:solidFill>
+                <a:latin typeface="Microsoft YaHei"/>
+              </a:rPr>
+              <a:t>1. 饱和攻击        8-12 弹混编压制</a:t>
+            </a:r>
+          </a:p>
+          <a:p>
+            <a:pPr algn="l"/>
+            <a:r>
+              <a:rPr sz="1200" b="0">
+                <a:solidFill>
+                  <a:srgbClr val="1F2328"/>
+                </a:solidFill>
+                <a:latin typeface="Microsoft YaHei"/>
+              </a:rPr>
+              <a:t>2. 隐身突防        高超音速 + 极端天气</a:t>
+            </a:r>
+          </a:p>
+          <a:p>
+            <a:pPr algn="l"/>
+            <a:r>
+              <a:rPr sz="1200" b="0">
+                <a:solidFill>
+                  <a:srgbClr val="1F2328"/>
+                </a:solidFill>
+                <a:latin typeface="Microsoft YaHei"/>
+              </a:rPr>
+              <a:t>3. 电子战          重干扰 + 网攻致盲</a:t>
+            </a:r>
+          </a:p>
+          <a:p>
+            <a:pPr algn="l"/>
+            <a:r>
+              <a:rPr sz="1200" b="0">
+                <a:solidFill>
+                  <a:srgbClr val="1F2328"/>
+                </a:solidFill>
+                <a:latin typeface="Microsoft YaHei"/>
+              </a:rPr>
+              <a:t>4. 诱饵群          低价值弹耗尽拦截资源</a:t>
+            </a:r>
+          </a:p>
+          <a:p>
+            <a:pPr algn="l"/>
+            <a:r>
+              <a:rPr sz="1200" b="1">
+                <a:solidFill>
+                  <a:srgbClr val="B0770B"/>
+                </a:solidFill>
+                <a:latin typeface="Microsoft YaHei"/>
+              </a:rPr>
+              <a:t>5. 多轴协同饱和    单波 10+ 基地分散打击
+    （覆盖第二岛链纵深新增节点）</a:t>
+            </a:r>
+          </a:p>
+          <a:p>
+            <a:pPr algn="l"/>
+            <a:r>
+              <a:rPr sz="1200" b="1">
+                <a:solidFill>
+                  <a:srgbClr val="B0770B"/>
+                </a:solidFill>
+                <a:latin typeface="Microsoft YaHei"/>
+              </a:rPr>
+              <a:t>6. 政治分化压制    持续打击 + 重 EW/网攻
+    触发准入降级（RAND 对手分化策略）</a:t>
+            </a:r>
+          </a:p>
+        </p:txBody>
+      </p:sp>
+    </p:spTree>
+  </p:cSld>
+  <p:clrMapOvr>
+    <a:masterClrMapping/>
+  </p:clrMapOvr>
+</p:sld>
+</file>
+
+<file path=ppt/slides/slide16.xml><?xml version="1.0" encoding="utf-8"?>
+<p:sld xmlns:a="http://schemas.openxmlformats.org/drawingml/2006/main" xmlns:p="http://schemas.openxmlformats.org/presentationml/2006/main" xmlns:r="http://schemas.openxmlformats.org/officeDocument/2006/relationships">
+  <p:cSld>
+    <p:spTree>
+      <p:nvGrpSpPr>
+        <p:cNvPr id="1" name=""/>
+        <p:cNvGrpSpPr/>
+        <p:nvPr/>
+      </p:nvGrpSpPr>
+      <p:grpSpPr/>
+      <p:sp>
+        <p:nvSpPr>
+          <p:cNvPr id="2" name="TextBox 1"/>
+          <p:cNvSpPr txBox="1"/>
+          <p:nvPr/>
+        </p:nvSpPr>
+        <p:spPr>
+          <a:xfrm>
+            <a:off x="502920" y="292608"/>
+            <a:ext cx="11155680" cy="685800"/>
+          </a:xfrm>
+          <a:prstGeom prst="rect">
+            <a:avLst/>
+          </a:prstGeom>
+          <a:noFill/>
+        </p:spPr>
+        <p:txBody>
+          <a:bodyPr wrap="square" lIns="25400" rIns="25400" tIns="25400" bIns="25400">
+            <a:spAutoFit/>
+          </a:bodyPr>
+          <a:lstStyle/>
+          <a:p>
+            <a:pPr algn="l"/>
+            <a:r>
+              <a:rPr sz="2900" b="1">
+                <a:solidFill>
+                  <a:srgbClr val="1E2761"/>
+                </a:solidFill>
+                <a:latin typeface="Microsoft YaHei"/>
+              </a:rPr>
+              <a:t>重验证：政治不确定性下的体系韧性</a:t>
+            </a:r>
+          </a:p>
+        </p:txBody>
+      </p:sp>
+      <p:sp>
+        <p:nvSpPr>
+          <p:cNvPr id="3" name="TextBox 2"/>
+          <p:cNvSpPr txBox="1"/>
+          <p:nvPr/>
+        </p:nvSpPr>
+        <p:spPr>
+          <a:xfrm>
+            <a:off x="521207" y="932688"/>
+            <a:ext cx="11155680" cy="365760"/>
+          </a:xfrm>
+          <a:prstGeom prst="rect">
+            <a:avLst/>
+          </a:prstGeom>
+          <a:noFill/>
+        </p:spPr>
+        <p:txBody>
+          <a:bodyPr wrap="square" lIns="25400" rIns="25400" tIns="25400" bIns="25400">
+            <a:spAutoFit/>
+          </a:bodyPr>
+          <a:lstStyle/>
+          <a:p>
+            <a:pPr algn="l"/>
+            <a:r>
+              <a:rPr sz="1300" b="0">
+                <a:solidFill>
+                  <a:srgbClr val="57606A"/>
+                </a:solidFill>
+                <a:latin typeface="Microsoft YaHei"/>
+              </a:rPr>
+              <a:t>Monte Carlo 三场景对照 + 六策略全量 150 episodes（Wilson 95% CI）</a:t>
+            </a:r>
+          </a:p>
+        </p:txBody>
+      </p:sp>
+      <p:sp>
+        <p:nvSpPr>
+          <p:cNvPr id="4" name="Rounded Rectangle 3"/>
+          <p:cNvSpPr/>
+          <p:nvPr/>
+        </p:nvSpPr>
+        <p:spPr>
+          <a:xfrm>
+            <a:off x="502920" y="1371600"/>
+            <a:ext cx="3657600" cy="1828800"/>
+          </a:xfrm>
+          <a:prstGeom prst="roundRect">
+            <a:avLst/>
+          </a:prstGeom>
+          <a:solidFill>
+            <a:srgbClr val="FFFFFF"/>
+          </a:solidFill>
+          <a:ln w="12700">
+            <a:solidFill>
+              <a:srgbClr val="C9D6E4"/>
+            </a:solidFill>
+          </a:ln>
+          <a:effectLst/>
+        </p:spPr>
+        <p:style>
+          <a:lnRef idx="1">
+            <a:schemeClr val="accent1"/>
+          </a:lnRef>
+          <a:fillRef idx="3">
+            <a:schemeClr val="accent1"/>
+          </a:fillRef>
+          <a:effectRef idx="2">
+            <a:schemeClr val="accent1"/>
+          </a:effectRef>
+          <a:fontRef idx="minor">
+            <a:schemeClr val="lt1"/>
+          </a:fontRef>
+        </p:style>
+        <p:txBody>
+          <a:bodyPr rtlCol="0" anchor="ctr" wrap="square"/>
+          <a:lstStyle/>
+          <a:p>
+            <a:pPr algn="ctr"/>
+            <a:r>
+              <a:rPr sz="4400" b="1">
+                <a:solidFill>
+                  <a:srgbClr val="57606A"/>
+                </a:solidFill>
+                <a:latin typeface="Consolas"/>
+              </a:rPr>
+              <a:t>76.2%</a:t>
+            </a:r>
+          </a:p>
+          <a:p>
+            <a:pPr algn="ctr"/>
+            <a:r>
+              <a:rPr sz="1200">
+                <a:solidFill>
+                  <a:srgbClr val="1F2328"/>
+                </a:solidFill>
+                <a:latin typeface="Microsoft YaHei"/>
+              </a:rPr>
+              <a:t>P6 基线
+原 22 站点 · 182 维</a:t>
+            </a:r>
+          </a:p>
+        </p:txBody>
+      </p:sp>
+      <p:sp>
+        <p:nvSpPr>
+          <p:cNvPr id="5" name="Rounded Rectangle 4"/>
+          <p:cNvSpPr/>
+          <p:nvPr/>
+        </p:nvSpPr>
+        <p:spPr>
+          <a:xfrm>
+            <a:off x="4325112" y="1371600"/>
+            <a:ext cx="3657600" cy="1828800"/>
+          </a:xfrm>
+          <a:prstGeom prst="roundRect">
+            <a:avLst/>
+          </a:prstGeom>
+          <a:solidFill>
+            <a:srgbClr val="FFFFFF"/>
+          </a:solidFill>
+          <a:ln w="12700">
+            <a:solidFill>
+              <a:srgbClr val="C9D6E4"/>
+            </a:solidFill>
+          </a:ln>
+          <a:effectLst/>
+        </p:spPr>
+        <p:style>
+          <a:lnRef idx="1">
+            <a:schemeClr val="accent1"/>
+          </a:lnRef>
+          <a:fillRef idx="3">
+            <a:schemeClr val="accent1"/>
+          </a:fillRef>
+          <a:effectRef idx="2">
+            <a:schemeClr val="accent1"/>
+          </a:effectRef>
+          <a:fontRef idx="minor">
+            <a:schemeClr val="lt1"/>
+          </a:fontRef>
+        </p:style>
+        <p:txBody>
+          <a:bodyPr rtlCol="0" anchor="ctr" wrap="square"/>
+          <a:lstStyle/>
+          <a:p>
+            <a:pPr algn="ctr"/>
+            <a:r>
+              <a:rPr sz="4400" b="1">
+                <a:solidFill>
+                  <a:srgbClr val="0969DA"/>
+                </a:solidFill>
+                <a:latin typeface="Consolas"/>
+              </a:rPr>
+              <a:t>79.0%</a:t>
+            </a:r>
+          </a:p>
+          <a:p>
+            <a:pPr algn="ctr"/>
+            <a:r>
+              <a:rPr sz="1200">
+                <a:solidFill>
+                  <a:srgbClr val="1F2328"/>
+                </a:solidFill>
+                <a:latin typeface="Microsoft YaHei"/>
+              </a:rPr>
+              <a:t>v2 权威数据
+模型不变 · 净效应 +2.8pp</a:t>
+            </a:r>
+          </a:p>
+        </p:txBody>
+      </p:sp>
+      <p:sp>
+        <p:nvSpPr>
+          <p:cNvPr id="6" name="Rounded Rectangle 5"/>
+          <p:cNvSpPr/>
+          <p:nvPr/>
+        </p:nvSpPr>
+        <p:spPr>
+          <a:xfrm>
+            <a:off x="8147304" y="1371600"/>
+            <a:ext cx="3657600" cy="1828800"/>
+          </a:xfrm>
+          <a:prstGeom prst="roundRect">
+            <a:avLst/>
+          </a:prstGeom>
+          <a:solidFill>
+            <a:srgbClr val="FFFFFF"/>
+          </a:solidFill>
+          <a:ln w="12700">
+            <a:solidFill>
+              <a:srgbClr val="C9D6E4"/>
+            </a:solidFill>
+          </a:ln>
+          <a:effectLst/>
+        </p:spPr>
+        <p:style>
+          <a:lnRef idx="1">
+            <a:schemeClr val="accent1"/>
+          </a:lnRef>
+          <a:fillRef idx="3">
+            <a:schemeClr val="accent1"/>
+          </a:fillRef>
+          <a:effectRef idx="2">
+            <a:schemeClr val="accent1"/>
+          </a:effectRef>
+          <a:fontRef idx="minor">
+            <a:schemeClr val="lt1"/>
+          </a:fontRef>
+        </p:style>
+        <p:txBody>
+          <a:bodyPr rtlCol="0" anchor="ctr" wrap="square"/>
+          <a:lstStyle/>
+          <a:p>
+            <a:pPr algn="ctr"/>
+            <a:r>
+              <a:rPr sz="4400" b="1">
+                <a:solidFill>
+                  <a:srgbClr val="1A7F37"/>
+                </a:solidFill>
+                <a:latin typeface="Consolas"/>
+              </a:rPr>
+              <a:t>79.5%</a:t>
+            </a:r>
+          </a:p>
+          <a:p>
+            <a:pPr algn="ctr"/>
+            <a:r>
+              <a:rPr sz="1200">
+                <a:solidFill>
+                  <a:srgbClr val="1F2328"/>
+                </a:solidFill>
+                <a:latin typeface="Microsoft YaHei"/>
+              </a:rPr>
+              <a:t>政治准入
+219 维 P12 模型</a:t>
+            </a:r>
+          </a:p>
+        </p:txBody>
+      </p:sp>
+      <p:sp>
+        <p:nvSpPr>
+          <p:cNvPr id="7" name="Rounded Rectangle 6"/>
+          <p:cNvSpPr/>
+          <p:nvPr/>
+        </p:nvSpPr>
+        <p:spPr>
+          <a:xfrm>
+            <a:off x="502920" y="3383280"/>
+            <a:ext cx="11201400" cy="685800"/>
+          </a:xfrm>
+          <a:prstGeom prst="roundRect">
+            <a:avLst/>
+          </a:prstGeom>
+          <a:solidFill>
+            <a:srgbClr val="E8F3EC"/>
+          </a:solidFill>
+          <a:ln w="12700">
+            <a:solidFill>
+              <a:srgbClr val="1A7F37"/>
+            </a:solidFill>
+          </a:ln>
+          <a:effectLst/>
+        </p:spPr>
+        <p:style>
+          <a:lnRef idx="1">
+            <a:schemeClr val="accent1"/>
+          </a:lnRef>
+          <a:fillRef idx="3">
+            <a:schemeClr val="accent1"/>
+          </a:fillRef>
+          <a:effectRef idx="2">
+            <a:schemeClr val="accent1"/>
+          </a:effectRef>
+          <a:fontRef idx="minor">
+            <a:schemeClr val="lt1"/>
+          </a:fontRef>
+        </p:style>
+        <p:txBody>
+          <a:bodyPr rtlCol="0" anchor="t" wrap="square" lIns="127000" rIns="127000" tIns="76200" bIns="76200"/>
+          <a:lstStyle/>
+          <a:p>
+            <a:pPr algn="l"/>
+            <a:r>
+              <a:rPr sz="1500" b="1">
+                <a:solidFill>
+                  <a:srgbClr val="1A7F37"/>
+                </a:solidFill>
+                <a:latin typeface="Microsoft YaHei"/>
+              </a:rPr>
+              <a:t>六策略全量验证：总体拦截率 79.1%（95% CI 78.0 - 80.2）· 全部策略 ≥ 77.6% · 均过 70% 竞赛门槛</a:t>
+            </a:r>
+          </a:p>
+        </p:txBody>
+      </p:sp>
+      <p:sp>
+        <p:nvSpPr>
+          <p:cNvPr id="8" name="Rounded Rectangle 7"/>
+          <p:cNvSpPr/>
+          <p:nvPr/>
+        </p:nvSpPr>
+        <p:spPr>
+          <a:xfrm>
+            <a:off x="502920" y="4251960"/>
+            <a:ext cx="5532120" cy="841248"/>
+          </a:xfrm>
+          <a:prstGeom prst="roundRect">
+            <a:avLst/>
+          </a:prstGeom>
+          <a:solidFill>
+            <a:srgbClr val="F2F6FA"/>
+          </a:solidFill>
+          <a:ln w="12700">
+            <a:solidFill>
+              <a:srgbClr val="C9D6E4"/>
+            </a:solidFill>
+          </a:ln>
+          <a:effectLst/>
+        </p:spPr>
+        <p:style>
+          <a:lnRef idx="1">
+            <a:schemeClr val="accent1"/>
+          </a:lnRef>
+          <a:fillRef idx="3">
+            <a:schemeClr val="accent1"/>
+          </a:fillRef>
+          <a:effectRef idx="2">
+            <a:schemeClr val="accent1"/>
+          </a:effectRef>
+          <a:fontRef idx="minor">
+            <a:schemeClr val="lt1"/>
+          </a:fontRef>
+        </p:style>
+        <p:txBody>
+          <a:bodyPr rtlCol="0" anchor="t" wrap="square" lIns="127000" rIns="127000" tIns="76200" bIns="76200"/>
+          <a:lstStyle/>
+          <a:p>
+            <a:pPr algn="l"/>
+            <a:r>
+              <a:rPr sz="1300" b="1">
+                <a:solidFill>
+                  <a:srgbClr val="1E2761"/>
+                </a:solidFill>
+                <a:latin typeface="Microsoft YaHei"/>
+              </a:rPr>
+              <a:t>1. 权威数据提升韧性</a:t>
+            </a:r>
+          </a:p>
+          <a:p>
+            <a:pPr algn="l"/>
+            <a:r>
+              <a:rPr sz="1100" b="0">
+                <a:solidFill>
+                  <a:srgbClr val="1F2328"/>
+                </a:solidFill>
+                <a:latin typeface="Microsoft YaHei"/>
+              </a:rPr>
+              <a:t>Tier 分层纵深提升分布式拦截冗余（+2.8pp，模型不变对照）</a:t>
+            </a:r>
+          </a:p>
+        </p:txBody>
+      </p:sp>
+      <p:sp>
+        <p:nvSpPr>
+          <p:cNvPr id="9" name="Rounded Rectangle 8"/>
+          <p:cNvSpPr/>
+          <p:nvPr/>
+        </p:nvSpPr>
+        <p:spPr>
+          <a:xfrm>
+            <a:off x="6217920" y="4251960"/>
+            <a:ext cx="5532120" cy="841248"/>
+          </a:xfrm>
+          <a:prstGeom prst="roundRect">
+            <a:avLst/>
+          </a:prstGeom>
+          <a:solidFill>
+            <a:srgbClr val="F2F6FA"/>
+          </a:solidFill>
+          <a:ln w="12700">
+            <a:solidFill>
+              <a:srgbClr val="C9D6E4"/>
+            </a:solidFill>
+          </a:ln>
+          <a:effectLst/>
+        </p:spPr>
+        <p:style>
+          <a:lnRef idx="1">
+            <a:schemeClr val="accent1"/>
+          </a:lnRef>
+          <a:fillRef idx="3">
+            <a:schemeClr val="accent1"/>
+          </a:fillRef>
+          <a:effectRef idx="2">
+            <a:schemeClr val="accent1"/>
+          </a:effectRef>
+          <a:fontRef idx="minor">
+            <a:schemeClr val="lt1"/>
+          </a:fontRef>
+        </p:style>
+        <p:txBody>
+          <a:bodyPr rtlCol="0" anchor="t" wrap="square" lIns="127000" rIns="127000" tIns="76200" bIns="76200"/>
+          <a:lstStyle/>
+          <a:p>
+            <a:pPr algn="l"/>
+            <a:r>
+              <a:rPr sz="1300" b="1">
+                <a:solidFill>
+                  <a:srgbClr val="1E2761"/>
+                </a:solidFill>
+                <a:latin typeface="Microsoft YaHei"/>
+              </a:rPr>
+              <a:t>2. 政治不确定性可被学习</a:t>
+            </a:r>
+          </a:p>
+          <a:p>
+            <a:pPr algn="l"/>
+            <a:r>
+              <a:rPr sz="1100" b="0">
+                <a:solidFill>
+                  <a:srgbClr val="1F2328"/>
+                </a:solidFill>
+                <a:latin typeface="Microsoft YaHei"/>
+              </a:rPr>
+              <a:t>准入演化场景拦截率不降反稳——219 维模型学会规避 Denied 站点</a:t>
+            </a:r>
+          </a:p>
+        </p:txBody>
+      </p:sp>
+      <p:sp>
+        <p:nvSpPr>
+          <p:cNvPr id="10" name="Rounded Rectangle 9"/>
+          <p:cNvSpPr/>
+          <p:nvPr/>
+        </p:nvSpPr>
+        <p:spPr>
+          <a:xfrm>
+            <a:off x="502920" y="5212080"/>
+            <a:ext cx="5532120" cy="841248"/>
+          </a:xfrm>
+          <a:prstGeom prst="roundRect">
+            <a:avLst/>
+          </a:prstGeom>
+          <a:solidFill>
+            <a:srgbClr val="F2F6FA"/>
+          </a:solidFill>
+          <a:ln w="12700">
+            <a:solidFill>
+              <a:srgbClr val="C9D6E4"/>
+            </a:solidFill>
+          </a:ln>
+          <a:effectLst/>
+        </p:spPr>
+        <p:style>
+          <a:lnRef idx="1">
+            <a:schemeClr val="accent1"/>
+          </a:lnRef>
+          <a:fillRef idx="3">
+            <a:schemeClr val="accent1"/>
+          </a:fillRef>
+          <a:effectRef idx="2">
+            <a:schemeClr val="accent1"/>
+          </a:effectRef>
+          <a:fontRef idx="minor">
+            <a:schemeClr val="lt1"/>
+          </a:fontRef>
+        </p:style>
+        <p:txBody>
+          <a:bodyPr rtlCol="0" anchor="t" wrap="square" lIns="127000" rIns="127000" tIns="76200" bIns="76200"/>
+          <a:lstStyle/>
+          <a:p>
+            <a:pPr algn="l"/>
+            <a:r>
+              <a:rPr sz="1300" b="1">
+                <a:solidFill>
+                  <a:srgbClr val="1E2761"/>
+                </a:solidFill>
+                <a:latin typeface="Microsoft YaHei"/>
+              </a:rPr>
+              <a:t>3. 结构性缓冲存在</a:t>
+            </a:r>
+          </a:p>
+          <a:p>
+            <a:pPr algn="l"/>
+            <a:r>
+              <a:rPr sz="1100" b="0">
+                <a:solidFill>
+                  <a:srgbClr val="1F2328"/>
+                </a:solidFill>
+                <a:latin typeface="Microsoft YaHei"/>
+              </a:rPr>
+              <a:t>敏感性 N=200：最差采样可用基地率仍达 97.0%（以容量折损为主）</a:t>
+            </a:r>
+          </a:p>
+        </p:txBody>
+      </p:sp>
+      <p:sp>
+        <p:nvSpPr>
+          <p:cNvPr id="11" name="Rounded Rectangle 10"/>
+          <p:cNvSpPr/>
+          <p:nvPr/>
+        </p:nvSpPr>
+        <p:spPr>
+          <a:xfrm>
+            <a:off x="6217920" y="5212080"/>
+            <a:ext cx="5532120" cy="841248"/>
+          </a:xfrm>
+          <a:prstGeom prst="roundRect">
+            <a:avLst/>
+          </a:prstGeom>
+          <a:solidFill>
+            <a:srgbClr val="F2F6FA"/>
+          </a:solidFill>
+          <a:ln w="12700">
+            <a:solidFill>
+              <a:srgbClr val="C9D6E4"/>
+            </a:solidFill>
+          </a:ln>
+          <a:effectLst/>
+        </p:spPr>
+        <p:style>
+          <a:lnRef idx="1">
+            <a:schemeClr val="accent1"/>
+          </a:lnRef>
+          <a:fillRef idx="3">
+            <a:schemeClr val="accent1"/>
+          </a:fillRef>
+          <a:effectRef idx="2">
+            <a:schemeClr val="accent1"/>
+          </a:effectRef>
+          <a:fontRef idx="minor">
+            <a:schemeClr val="lt1"/>
+          </a:fontRef>
+        </p:style>
+        <p:txBody>
+          <a:bodyPr rtlCol="0" anchor="t" wrap="square" lIns="127000" rIns="127000" tIns="76200" bIns="76200"/>
+          <a:lstStyle/>
+          <a:p>
+            <a:pPr algn="l"/>
+            <a:r>
+              <a:rPr sz="1300" b="1">
+                <a:solidFill>
+                  <a:srgbClr val="1E2761"/>
+                </a:solidFill>
+                <a:latin typeface="Microsoft YaHei"/>
+              </a:rPr>
+              <a:t>4. 最弱项明确</a:t>
+            </a:r>
+          </a:p>
+          <a:p>
+            <a:pPr algn="l"/>
+            <a:r>
+              <a:rPr sz="1100" b="0">
+                <a:solidFill>
+                  <a:srgbClr val="1F2328"/>
+                </a:solidFill>
+                <a:latin typeface="Microsoft YaHei"/>
+              </a:rPr>
+              <a:t>电子战 / 政治分化策略 77-78% 为后续优化方向</a:t>
+            </a:r>
+          </a:p>
+        </p:txBody>
+      </p:sp>
+    </p:spTree>
+  </p:cSld>
+  <p:clrMapOvr>
+    <a:masterClrMapping/>
+  </p:clrMapOvr>
+</p:sld>
+</file>
+
+<file path=ppt/slides/slide17.xml><?xml version="1.0" encoding="utf-8"?>
+<p:sld xmlns:a="http://schemas.openxmlformats.org/drawingml/2006/main" xmlns:p="http://schemas.openxmlformats.org/presentationml/2006/main" xmlns:r="http://schemas.openxmlformats.org/officeDocument/2006/relationships">
+  <p:cSld>
     <p:bg>
       <p:bgPr>
         <a:blipFill dpi="0" rotWithShape="1">
@@ -8779,7 +10497,7 @@
                 <a:ea typeface="Noto Sans SC"/>
                 <a:cs typeface="Noto Sans SC"/>
               </a:rPr>
-              <a:t>github.com/yigenfeng0707-netizen/pmtec-dtc2026 194个文件 分支main</a:t>
+              <a:t>代码以离线包形式提交（私有仓库存档，评审按比赛规定方式获取） 全量源码 · 离线包随参赛材料一并提交</a:t>
             </a:r>
           </a:p>
         </p:txBody>
@@ -8830,7 +10548,7 @@
                 <a:ea typeface="Noto Sans SC"/>
                 <a:cs typeface="Noto Sans SC"/>
               </a:rPr>
-              <a:t>GitHub仓库</a:t>
+              <a:t>代码交付方式</a:t>
             </a:r>
           </a:p>
         </p:txBody>
@@ -9490,7 +11208,7 @@
 </p:sld>
 </file>
 
-<file path=ppt/slides/slide15.xml><?xml version="1.0" encoding="utf-8"?>
+<file path=ppt/slides/slide18.xml><?xml version="1.0" encoding="utf-8"?>
 <p:sld xmlns:a="http://schemas.openxmlformats.org/drawingml/2006/main" xmlns:r="http://schemas.openxmlformats.org/officeDocument/2006/relationships" xmlns:p="http://schemas.openxmlformats.org/presentationml/2006/main">
   <p:cSld>
     <p:bg>
@@ -9627,1724 +11345,6 @@
       <bd:templateData xmlns="" xmlns:bd="http://schemas.baidu.com/office/drawing/2023/templateData">eyJtZCI6IiIsInRwbGlkIjoiNjkiLCJ0cGxOYW1lIjoiZW5kXzY5ZGlhbW9uZCIsImVkaXRlZCI6ImZhbHNlIn0=</bd:templateData>
     </p:ext>
   </p:extLst>
-</p:sld>
-</file>
-
-<file path=ppt/slides/slide16.xml><?xml version="1.0" encoding="utf-8"?>
-<p:sld xmlns:a="http://schemas.openxmlformats.org/drawingml/2006/main" xmlns:p="http://schemas.openxmlformats.org/presentationml/2006/main" xmlns:r="http://schemas.openxmlformats.org/officeDocument/2006/relationships">
-  <p:cSld>
-    <p:spTree>
-      <p:nvGrpSpPr>
-        <p:cNvPr id="1" name=""/>
-        <p:cNvGrpSpPr/>
-        <p:nvPr/>
-      </p:nvGrpSpPr>
-      <p:grpSpPr/>
-      <p:sp>
-        <p:nvSpPr>
-          <p:cNvPr id="2" name="TextBox 1"/>
-          <p:cNvSpPr txBox="1"/>
-          <p:nvPr/>
-        </p:nvSpPr>
-        <p:spPr>
-          <a:xfrm>
-            <a:off x="502920" y="292608"/>
-            <a:ext cx="11155680" cy="685800"/>
-          </a:xfrm>
-          <a:prstGeom prst="rect">
-            <a:avLst/>
-          </a:prstGeom>
-          <a:noFill/>
-        </p:spPr>
-        <p:txBody>
-          <a:bodyPr wrap="square" lIns="25400" rIns="25400" tIns="25400" bIns="25400">
-            <a:spAutoFit/>
-          </a:bodyPr>
-          <a:lstStyle/>
-          <a:p>
-            <a:pPr algn="l"/>
-            <a:r>
-              <a:rPr sz="2900" b="1">
-                <a:solidFill>
-                  <a:srgbClr val="1E2761"/>
-                </a:solidFill>
-                <a:latin typeface="Microsoft YaHei"/>
-              </a:rPr>
-              <a:t>权威数据升级（P9-P11）：22 → 67 实体 · 政治准入 · 指挥链</a:t>
-            </a:r>
-          </a:p>
-        </p:txBody>
-      </p:sp>
-      <p:sp>
-        <p:nvSpPr>
-          <p:cNvPr id="3" name="TextBox 2"/>
-          <p:cNvSpPr txBox="1"/>
-          <p:nvPr/>
-        </p:nvSpPr>
-        <p:spPr>
-          <a:xfrm>
-            <a:off x="521207" y="932688"/>
-            <a:ext cx="11155680" cy="365760"/>
-          </a:xfrm>
-          <a:prstGeom prst="rect">
-            <a:avLst/>
-          </a:prstGeom>
-          <a:noFill/>
-        </p:spPr>
-        <p:txBody>
-          <a:bodyPr wrap="square" lIns="25400" rIns="25400" tIns="25400" bIns="25400">
-            <a:spAutoFit/>
-          </a:bodyPr>
-          <a:lstStyle/>
-          <a:p>
-            <a:pPr algn="l"/>
-            <a:r>
-              <a:rPr sz="1300" b="0">
-                <a:solidFill>
-                  <a:srgbClr val="57606A"/>
-                </a:solidFill>
-                <a:latin typeface="Microsoft YaHei"/>
-              </a:rPr>
-              <a:t>全部基地数据可溯源至权威公开报告 —— 「每一颗坐标都有出处」</a:t>
-            </a:r>
-          </a:p>
-        </p:txBody>
-      </p:sp>
-      <p:sp>
-        <p:nvSpPr>
-          <p:cNvPr id="4" name="Rounded Rectangle 3"/>
-          <p:cNvSpPr/>
-          <p:nvPr/>
-        </p:nvSpPr>
-        <p:spPr>
-          <a:xfrm>
-            <a:off x="502920" y="1417320"/>
-            <a:ext cx="2697480" cy="1234440"/>
-          </a:xfrm>
-          <a:prstGeom prst="roundRect">
-            <a:avLst/>
-          </a:prstGeom>
-          <a:solidFill>
-            <a:srgbClr val="F2F6FA"/>
-          </a:solidFill>
-          <a:ln w="12700">
-            <a:solidFill>
-              <a:srgbClr val="C9D6E4"/>
-            </a:solidFill>
-          </a:ln>
-          <a:effectLst/>
-        </p:spPr>
-        <p:style>
-          <a:lnRef idx="1">
-            <a:schemeClr val="accent1"/>
-          </a:lnRef>
-          <a:fillRef idx="3">
-            <a:schemeClr val="accent1"/>
-          </a:fillRef>
-          <a:effectRef idx="2">
-            <a:schemeClr val="accent1"/>
-          </a:effectRef>
-          <a:fontRef idx="minor">
-            <a:schemeClr val="lt1"/>
-          </a:fontRef>
-        </p:style>
-        <p:txBody>
-          <a:bodyPr rtlCol="0" anchor="t" wrap="square" lIns="127000" rIns="127000" tIns="76200" bIns="76200"/>
-          <a:lstStyle/>
-          <a:p>
-            <a:pPr algn="l"/>
-            <a:r>
-              <a:rPr sz="1500" b="1">
-                <a:solidFill>
-                  <a:srgbClr val="0969DA"/>
-                </a:solidFill>
-                <a:latin typeface="Microsoft YaHei"/>
-              </a:rPr>
-              <a:t>CRS R47589</a:t>
-            </a:r>
-          </a:p>
-          <a:p>
-            <a:pPr algn="l"/>
-            <a:r>
-              <a:rPr sz="1100" b="0">
-                <a:solidFill>
-                  <a:srgbClr val="1F2328"/>
-                </a:solidFill>
-                <a:latin typeface="Microsoft YaHei"/>
-              </a:rPr>
-              <a:t>Table A-1 全量 66 站点清单
-+ Tinian 特殊保留 = 67 实体</a:t>
-            </a:r>
-          </a:p>
-        </p:txBody>
-      </p:sp>
-      <p:sp>
-        <p:nvSpPr>
-          <p:cNvPr id="5" name="Rounded Rectangle 4"/>
-          <p:cNvSpPr/>
-          <p:nvPr/>
-        </p:nvSpPr>
-        <p:spPr>
-          <a:xfrm>
-            <a:off x="3364991" y="1417320"/>
-            <a:ext cx="2697480" cy="1234440"/>
-          </a:xfrm>
-          <a:prstGeom prst="roundRect">
-            <a:avLst/>
-          </a:prstGeom>
-          <a:solidFill>
-            <a:srgbClr val="F2F6FA"/>
-          </a:solidFill>
-          <a:ln w="12700">
-            <a:solidFill>
-              <a:srgbClr val="C9D6E4"/>
-            </a:solidFill>
-          </a:ln>
-          <a:effectLst/>
-        </p:spPr>
-        <p:style>
-          <a:lnRef idx="1">
-            <a:schemeClr val="accent1"/>
-          </a:lnRef>
-          <a:fillRef idx="3">
-            <a:schemeClr val="accent1"/>
-          </a:fillRef>
-          <a:effectRef idx="2">
-            <a:schemeClr val="accent1"/>
-          </a:effectRef>
-          <a:fontRef idx="minor">
-            <a:schemeClr val="lt1"/>
-          </a:fontRef>
-        </p:style>
-        <p:txBody>
-          <a:bodyPr rtlCol="0" anchor="t" wrap="square" lIns="127000" rIns="127000" tIns="76200" bIns="76200"/>
-          <a:lstStyle/>
-          <a:p>
-            <a:pPr algn="l"/>
-            <a:r>
-              <a:rPr sz="1500" b="1">
-                <a:solidFill>
-                  <a:srgbClr val="0969DA"/>
-                </a:solidFill>
-                <a:latin typeface="Microsoft YaHei"/>
-              </a:rPr>
-              <a:t>DoD FY2024 BSR</a:t>
-            </a:r>
-          </a:p>
-          <a:p>
-            <a:pPr algn="l"/>
-            <a:r>
-              <a:rPr sz="1100" b="0">
-                <a:solidFill>
-                  <a:srgbClr val="1F2328"/>
-                </a:solidFill>
-                <a:latin typeface="Microsoft YaHei"/>
-              </a:rPr>
-              <a:t>PRV 2.23 万亿 · 四分位分级
-建筑/土地权威数据</a:t>
-            </a:r>
-          </a:p>
-        </p:txBody>
-      </p:sp>
-      <p:sp>
-        <p:nvSpPr>
-          <p:cNvPr id="6" name="Rounded Rectangle 5"/>
-          <p:cNvSpPr/>
-          <p:nvPr/>
-        </p:nvSpPr>
-        <p:spPr>
-          <a:xfrm>
-            <a:off x="6227064" y="1417320"/>
-            <a:ext cx="2697480" cy="1234440"/>
-          </a:xfrm>
-          <a:prstGeom prst="roundRect">
-            <a:avLst/>
-          </a:prstGeom>
-          <a:solidFill>
-            <a:srgbClr val="F2F6FA"/>
-          </a:solidFill>
-          <a:ln w="12700">
-            <a:solidFill>
-              <a:srgbClr val="C9D6E4"/>
-            </a:solidFill>
-          </a:ln>
-          <a:effectLst/>
-        </p:spPr>
-        <p:style>
-          <a:lnRef idx="1">
-            <a:schemeClr val="accent1"/>
-          </a:lnRef>
-          <a:fillRef idx="3">
-            <a:schemeClr val="accent1"/>
-          </a:fillRef>
-          <a:effectRef idx="2">
-            <a:schemeClr val="accent1"/>
-          </a:effectRef>
-          <a:fontRef idx="minor">
-            <a:schemeClr val="lt1"/>
-          </a:fontRef>
-        </p:style>
-        <p:txBody>
-          <a:bodyPr rtlCol="0" anchor="t" wrap="square" lIns="127000" rIns="127000" tIns="76200" bIns="76200"/>
-          <a:lstStyle/>
-          <a:p>
-            <a:pPr algn="l"/>
-            <a:r>
-              <a:rPr sz="1500" b="1">
-                <a:solidFill>
-                  <a:srgbClr val="0969DA"/>
-                </a:solidFill>
-                <a:latin typeface="Microsoft YaHei"/>
-              </a:rPr>
-              <a:t>RAND RRA967-2</a:t>
-            </a:r>
-          </a:p>
-          <a:p>
-            <a:pPr algn="l"/>
-            <a:r>
-              <a:rPr sz="1100" b="0">
-                <a:solidFill>
-                  <a:srgbClr val="1F2328"/>
-                </a:solidFill>
-                <a:latin typeface="Microsoft YaHei"/>
-              </a:rPr>
-              <a:t>盟友政治意愿不确定性
-准入建模为随机变量</a:t>
-            </a:r>
-          </a:p>
-        </p:txBody>
-      </p:sp>
-      <p:sp>
-        <p:nvSpPr>
-          <p:cNvPr id="7" name="Rounded Rectangle 6"/>
-          <p:cNvSpPr/>
-          <p:nvPr/>
-        </p:nvSpPr>
-        <p:spPr>
-          <a:xfrm>
-            <a:off x="9089136" y="1417320"/>
-            <a:ext cx="2697480" cy="1234440"/>
-          </a:xfrm>
-          <a:prstGeom prst="roundRect">
-            <a:avLst/>
-          </a:prstGeom>
-          <a:solidFill>
-            <a:srgbClr val="F2F6FA"/>
-          </a:solidFill>
-          <a:ln w="12700">
-            <a:solidFill>
-              <a:srgbClr val="C9D6E4"/>
-            </a:solidFill>
-          </a:ln>
-          <a:effectLst/>
-        </p:spPr>
-        <p:style>
-          <a:lnRef idx="1">
-            <a:schemeClr val="accent1"/>
-          </a:lnRef>
-          <a:fillRef idx="3">
-            <a:schemeClr val="accent1"/>
-          </a:fillRef>
-          <a:effectRef idx="2">
-            <a:schemeClr val="accent1"/>
-          </a:effectRef>
-          <a:fontRef idx="minor">
-            <a:schemeClr val="lt1"/>
-          </a:fontRef>
-        </p:style>
-        <p:txBody>
-          <a:bodyPr rtlCol="0" anchor="t" wrap="square" lIns="127000" rIns="127000" tIns="76200" bIns="76200"/>
-          <a:lstStyle/>
-          <a:p>
-            <a:pPr algn="l"/>
-            <a:r>
-              <a:rPr sz="1500" b="1">
-                <a:solidFill>
-                  <a:srgbClr val="0969DA"/>
-                </a:solidFill>
-                <a:latin typeface="Microsoft YaHei"/>
-              </a:rPr>
-              <a:t>CRS IF12175</a:t>
-            </a:r>
-          </a:p>
-          <a:p>
-            <a:pPr algn="l"/>
-            <a:r>
-              <a:rPr sz="1100" b="0">
-                <a:solidFill>
-                  <a:srgbClr val="1F2328"/>
-                </a:solidFill>
-                <a:latin typeface="Microsoft YaHei"/>
-              </a:rPr>
-              <a:t>INDOPACOM 架构
-5 军种组成 + 3 下属联合</a:t>
-            </a:r>
-          </a:p>
-        </p:txBody>
-      </p:sp>
-      <p:sp>
-        <p:nvSpPr>
-          <p:cNvPr id="8" name="Rounded Rectangle 7"/>
-          <p:cNvSpPr/>
-          <p:nvPr/>
-        </p:nvSpPr>
-        <p:spPr>
-          <a:xfrm>
-            <a:off x="502920" y="2971800"/>
-            <a:ext cx="3657600" cy="1737360"/>
-          </a:xfrm>
-          <a:prstGeom prst="roundRect">
-            <a:avLst/>
-          </a:prstGeom>
-          <a:solidFill>
-            <a:srgbClr val="FFFFFF"/>
-          </a:solidFill>
-          <a:ln w="12700">
-            <a:solidFill>
-              <a:srgbClr val="C9D6E4"/>
-            </a:solidFill>
-          </a:ln>
-          <a:effectLst/>
-        </p:spPr>
-        <p:style>
-          <a:lnRef idx="1">
-            <a:schemeClr val="accent1"/>
-          </a:lnRef>
-          <a:fillRef idx="3">
-            <a:schemeClr val="accent1"/>
-          </a:fillRef>
-          <a:effectRef idx="2">
-            <a:schemeClr val="accent1"/>
-          </a:effectRef>
-          <a:fontRef idx="minor">
-            <a:schemeClr val="lt1"/>
-          </a:fontRef>
-        </p:style>
-        <p:txBody>
-          <a:bodyPr rtlCol="0" anchor="t" wrap="square" lIns="127000" rIns="127000" tIns="76200" bIns="76200"/>
-          <a:lstStyle/>
-          <a:p>
-            <a:pPr algn="l"/>
-            <a:r>
-              <a:rPr sz="1500" b="1">
-                <a:solidFill>
-                  <a:srgbClr val="1E2761"/>
-                </a:solidFill>
-                <a:latin typeface="Microsoft YaHei"/>
-              </a:rPr>
-              <a:t>第一级 · 基地标绘</a:t>
-            </a:r>
-          </a:p>
-          <a:p>
-            <a:pPr algn="l"/>
-            <a:r>
-              <a:rPr sz="1200" b="0">
-                <a:solidFill>
-                  <a:srgbClr val="1F2328"/>
-                </a:solidFill>
-                <a:latin typeface="Microsoft YaHei"/>
-              </a:rPr>
-              <a:t>67 实体 / 33 字段档案
-Tier 四级分层 · QGIS + Leaflet 重生成
-总索引可溯源 CRS 编号</a:t>
-            </a:r>
-          </a:p>
-        </p:txBody>
-      </p:sp>
-      <p:sp>
-        <p:nvSpPr>
-          <p:cNvPr id="9" name="Rounded Rectangle 8"/>
-          <p:cNvSpPr/>
-          <p:nvPr/>
-        </p:nvSpPr>
-        <p:spPr>
-          <a:xfrm>
-            <a:off x="4325112" y="2971800"/>
-            <a:ext cx="3657600" cy="1737360"/>
-          </a:xfrm>
-          <a:prstGeom prst="roundRect">
-            <a:avLst/>
-          </a:prstGeom>
-          <a:solidFill>
-            <a:srgbClr val="FFFFFF"/>
-          </a:solidFill>
-          <a:ln w="12700">
-            <a:solidFill>
-              <a:srgbClr val="C9D6E4"/>
-            </a:solidFill>
-          </a:ln>
-          <a:effectLst/>
-        </p:spPr>
-        <p:style>
-          <a:lnRef idx="1">
-            <a:schemeClr val="accent1"/>
-          </a:lnRef>
-          <a:fillRef idx="3">
-            <a:schemeClr val="accent1"/>
-          </a:fillRef>
-          <a:effectRef idx="2">
-            <a:schemeClr val="accent1"/>
-          </a:effectRef>
-          <a:fontRef idx="minor">
-            <a:schemeClr val="lt1"/>
-          </a:fontRef>
-        </p:style>
-        <p:txBody>
-          <a:bodyPr rtlCol="0" anchor="t" wrap="square" lIns="127000" rIns="127000" tIns="76200" bIns="76200"/>
-          <a:lstStyle/>
-          <a:p>
-            <a:pPr algn="l"/>
-            <a:r>
-              <a:rPr sz="1500" b="1">
-                <a:solidFill>
-                  <a:srgbClr val="1E2761"/>
-                </a:solidFill>
-                <a:latin typeface="Microsoft YaHei"/>
-              </a:rPr>
-              <a:t>第二级 · ACE 引擎</a:t>
-            </a:r>
-          </a:p>
-          <a:p>
-            <a:pPr algn="l"/>
-            <a:r>
-              <a:rPr sz="1200" b="0">
-                <a:solidFill>
-                  <a:srgbClr val="1F2328"/>
-                </a:solidFill>
-                <a:latin typeface="Microsoft YaHei"/>
-              </a:rPr>
-              <a:t>部署优化器排除 DENIED 站点
-Pareto 新增「政治风险敞口」目标
-转移规划过滤政治不可用基地</a:t>
-            </a:r>
-          </a:p>
-        </p:txBody>
-      </p:sp>
-      <p:sp>
-        <p:nvSpPr>
-          <p:cNvPr id="10" name="Rounded Rectangle 9"/>
-          <p:cNvSpPr/>
-          <p:nvPr/>
-        </p:nvSpPr>
-        <p:spPr>
-          <a:xfrm>
-            <a:off x="8147304" y="2971800"/>
-            <a:ext cx="3657600" cy="1737360"/>
-          </a:xfrm>
-          <a:prstGeom prst="roundRect">
-            <a:avLst/>
-          </a:prstGeom>
-          <a:solidFill>
-            <a:srgbClr val="FFFFFF"/>
-          </a:solidFill>
-          <a:ln w="12700">
-            <a:solidFill>
-              <a:srgbClr val="C9D6E4"/>
-            </a:solidFill>
-          </a:ln>
-          <a:effectLst/>
-        </p:spPr>
-        <p:style>
-          <a:lnRef idx="1">
-            <a:schemeClr val="accent1"/>
-          </a:lnRef>
-          <a:fillRef idx="3">
-            <a:schemeClr val="accent1"/>
-          </a:fillRef>
-          <a:effectRef idx="2">
-            <a:schemeClr val="accent1"/>
-          </a:effectRef>
-          <a:fontRef idx="minor">
-            <a:schemeClr val="lt1"/>
-          </a:fontRef>
-        </p:style>
-        <p:txBody>
-          <a:bodyPr rtlCol="0" anchor="t" wrap="square" lIns="127000" rIns="127000" tIns="76200" bIns="76200"/>
-          <a:lstStyle/>
-          <a:p>
-            <a:pPr algn="l"/>
-            <a:r>
-              <a:rPr sz="1500" b="1">
-                <a:solidFill>
-                  <a:srgbClr val="1E2761"/>
-                </a:solidFill>
-                <a:latin typeface="Microsoft YaHei"/>
-              </a:rPr>
-              <a:t>第三级 · PMTEC 系统</a:t>
-            </a:r>
-          </a:p>
-          <a:p>
-            <a:pPr algn="l"/>
-            <a:r>
-              <a:rPr sz="1200" b="0">
-                <a:solidFill>
-                  <a:srgbClr val="1F2328"/>
-                </a:solidFill>
-                <a:latin typeface="Microsoft YaHei"/>
-              </a:rPr>
-              <a:t>指挥链 5+3 司令部建模
-RBAC 军种扩展 + JWT branch claim
-灰色地带事件驱动准入演化</a:t>
-            </a:r>
-          </a:p>
-        </p:txBody>
-      </p:sp>
-      <p:sp>
-        <p:nvSpPr>
-          <p:cNvPr id="11" name="TextBox 10"/>
-          <p:cNvSpPr txBox="1"/>
-          <p:nvPr/>
-        </p:nvSpPr>
-        <p:spPr>
-          <a:xfrm>
-            <a:off x="502920" y="4983480"/>
-            <a:ext cx="11155680" cy="822960"/>
-          </a:xfrm>
-          <a:prstGeom prst="rect">
-            <a:avLst/>
-          </a:prstGeom>
-          <a:noFill/>
-        </p:spPr>
-        <p:txBody>
-          <a:bodyPr wrap="square" lIns="25400" rIns="25400" tIns="25400" bIns="25400">
-            <a:spAutoFit/>
-          </a:bodyPr>
-          <a:lstStyle/>
-          <a:p>
-            <a:pPr algn="l"/>
-            <a:r>
-              <a:rPr sz="1300" b="0">
-                <a:solidFill>
-                  <a:srgbClr val="B0770B"/>
-                </a:solidFill>
-                <a:latin typeface="Microsoft YaHei"/>
-              </a:rPr>
-              <a:t>政治准入三态状态机：Full（全面准入）/ Restricted（有限准入，容量折损）/ Denied（准入被拒）</a:t>
-            </a:r>
-          </a:p>
-          <a:p>
-            <a:pPr algn="l"/>
-            <a:r>
-              <a:rPr sz="1300" b="0">
-                <a:solidFill>
-                  <a:srgbClr val="B0770B"/>
-                </a:solidFill>
-                <a:latin typeface="Microsoft YaHei"/>
-              </a:rPr>
-              <a:t>四类政治事件驱动演化：灰色地带 · 冲突升级 · 主权打击 · 再保证外交</a:t>
-            </a:r>
-          </a:p>
-        </p:txBody>
-      </p:sp>
-    </p:spTree>
-  </p:cSld>
-  <p:clrMapOvr>
-    <a:masterClrMapping/>
-  </p:clrMapOvr>
-</p:sld>
-</file>
-
-<file path=ppt/slides/slide17.xml><?xml version="1.0" encoding="utf-8"?>
-<p:sld xmlns:a="http://schemas.openxmlformats.org/drawingml/2006/main" xmlns:p="http://schemas.openxmlformats.org/presentationml/2006/main" xmlns:r="http://schemas.openxmlformats.org/officeDocument/2006/relationships">
-  <p:cSld>
-    <p:spTree>
-      <p:nvGrpSpPr>
-        <p:cNvPr id="1" name=""/>
-        <p:cNvGrpSpPr/>
-        <p:nvPr/>
-      </p:nvGrpSpPr>
-      <p:grpSpPr/>
-      <p:sp>
-        <p:nvSpPr>
-          <p:cNvPr id="2" name="TextBox 1"/>
-          <p:cNvSpPr txBox="1"/>
-          <p:nvPr/>
-        </p:nvSpPr>
-        <p:spPr>
-          <a:xfrm>
-            <a:off x="502920" y="292608"/>
-            <a:ext cx="11155680" cy="685800"/>
-          </a:xfrm>
-          <a:prstGeom prst="rect">
-            <a:avLst/>
-          </a:prstGeom>
-          <a:noFill/>
-        </p:spPr>
-        <p:txBody>
-          <a:bodyPr wrap="square" lIns="25400" rIns="25400" tIns="25400" bIns="25400">
-            <a:spAutoFit/>
-          </a:bodyPr>
-          <a:lstStyle/>
-          <a:p>
-            <a:pPr algn="l"/>
-            <a:r>
-              <a:rPr sz="2900" b="1">
-                <a:solidFill>
-                  <a:srgbClr val="1E2761"/>
-                </a:solidFill>
-                <a:latin typeface="Microsoft YaHei"/>
-              </a:rPr>
-              <a:t>P12 系统升级：219 维政治观测 · 实时态势 · 服务契约</a:t>
-            </a:r>
-          </a:p>
-        </p:txBody>
-      </p:sp>
-      <p:sp>
-        <p:nvSpPr>
-          <p:cNvPr id="3" name="TextBox 2"/>
-          <p:cNvSpPr txBox="1"/>
-          <p:nvPr/>
-        </p:nvSpPr>
-        <p:spPr>
-          <a:xfrm>
-            <a:off x="521207" y="932688"/>
-            <a:ext cx="11155680" cy="365760"/>
-          </a:xfrm>
-          <a:prstGeom prst="rect">
-            <a:avLst/>
-          </a:prstGeom>
-          <a:noFill/>
-        </p:spPr>
-        <p:txBody>
-          <a:bodyPr wrap="square" lIns="25400" rIns="25400" tIns="25400" bIns="25400">
-            <a:spAutoFit/>
-          </a:bodyPr>
-          <a:lstStyle/>
-          <a:p>
-            <a:pPr algn="l"/>
-            <a:r>
-              <a:rPr sz="1300" b="0">
-                <a:solidFill>
-                  <a:srgbClr val="57606A"/>
-                </a:solidFill>
-                <a:latin typeface="Microsoft YaHei"/>
-              </a:rPr>
-              <a:t>对手策略库扩展至 6 项（RAND 风格：多轴协同饱和 / 政治分化压制）</a:t>
-            </a:r>
-          </a:p>
-        </p:txBody>
-      </p:sp>
-      <p:sp>
-        <p:nvSpPr>
-          <p:cNvPr id="4" name="Rounded Rectangle 3"/>
-          <p:cNvSpPr/>
-          <p:nvPr/>
-        </p:nvSpPr>
-        <p:spPr>
-          <a:xfrm>
-            <a:off x="502920" y="1417320"/>
-            <a:ext cx="6035040" cy="960120"/>
-          </a:xfrm>
-          <a:prstGeom prst="roundRect">
-            <a:avLst/>
-          </a:prstGeom>
-          <a:solidFill>
-            <a:srgbClr val="FFFFFF"/>
-          </a:solidFill>
-          <a:ln w="12700">
-            <a:solidFill>
-              <a:srgbClr val="C9D6E4"/>
-            </a:solidFill>
-          </a:ln>
-          <a:effectLst/>
-        </p:spPr>
-        <p:style>
-          <a:lnRef idx="1">
-            <a:schemeClr val="accent1"/>
-          </a:lnRef>
-          <a:fillRef idx="3">
-            <a:schemeClr val="accent1"/>
-          </a:fillRef>
-          <a:effectRef idx="2">
-            <a:schemeClr val="accent1"/>
-          </a:effectRef>
-          <a:fontRef idx="minor">
-            <a:schemeClr val="lt1"/>
-          </a:fontRef>
-        </p:style>
-        <p:txBody>
-          <a:bodyPr rtlCol="0" anchor="t" wrap="square" lIns="127000" rIns="127000" tIns="76200" bIns="76200"/>
-          <a:lstStyle/>
-          <a:p>
-            <a:pPr algn="l"/>
-            <a:r>
-              <a:rPr sz="1400" b="1">
-                <a:solidFill>
-                  <a:srgbClr val="0969DA"/>
-                </a:solidFill>
-                <a:latin typeface="Microsoft YaHei"/>
-              </a:rPr>
-              <a:t>观测空间 182 → 219 维</a:t>
-            </a:r>
-          </a:p>
-          <a:p>
-            <a:pPr algn="l"/>
-            <a:r>
-              <a:rPr sz="1150" b="0">
-                <a:solidFill>
-                  <a:srgbClr val="1F2328"/>
-                </a:solidFill>
-                <a:latin typeface="Microsoft YaHei"/>
-              </a:rPr>
-              <a:t>36 盟友站点准入容量因子
-+ 全局冲突升级度（每 ASDA 周期演化）</a:t>
-            </a:r>
-          </a:p>
-        </p:txBody>
-      </p:sp>
-      <p:sp>
-        <p:nvSpPr>
-          <p:cNvPr id="5" name="Rounded Rectangle 4"/>
-          <p:cNvSpPr/>
-          <p:nvPr/>
-        </p:nvSpPr>
-        <p:spPr>
-          <a:xfrm>
-            <a:off x="502920" y="2496312"/>
-            <a:ext cx="6035040" cy="960120"/>
-          </a:xfrm>
-          <a:prstGeom prst="roundRect">
-            <a:avLst/>
-          </a:prstGeom>
-          <a:solidFill>
-            <a:srgbClr val="FFFFFF"/>
-          </a:solidFill>
-          <a:ln w="12700">
-            <a:solidFill>
-              <a:srgbClr val="C9D6E4"/>
-            </a:solidFill>
-          </a:ln>
-          <a:effectLst/>
-        </p:spPr>
-        <p:style>
-          <a:lnRef idx="1">
-            <a:schemeClr val="accent1"/>
-          </a:lnRef>
-          <a:fillRef idx="3">
-            <a:schemeClr val="accent1"/>
-          </a:fillRef>
-          <a:effectRef idx="2">
-            <a:schemeClr val="accent1"/>
-          </a:effectRef>
-          <a:fontRef idx="minor">
-            <a:schemeClr val="lt1"/>
-          </a:fontRef>
-        </p:style>
-        <p:txBody>
-          <a:bodyPr rtlCol="0" anchor="t" wrap="square" lIns="127000" rIns="127000" tIns="76200" bIns="76200"/>
-          <a:lstStyle/>
-          <a:p>
-            <a:pPr algn="l"/>
-            <a:r>
-              <a:rPr sz="1400" b="1">
-                <a:solidFill>
-                  <a:srgbClr val="0969DA"/>
-                </a:solidFill>
-                <a:latin typeface="Microsoft YaHei"/>
-              </a:rPr>
-              <a:t>DQN 219 维重训练</a:t>
-            </a:r>
-          </a:p>
-          <a:p>
-            <a:pPr algn="l"/>
-            <a:r>
-              <a:rPr sz="1150" b="0">
-                <a:solidFill>
-                  <a:srgbClr val="1F2328"/>
-                </a:solidFill>
-                <a:latin typeface="Microsoft YaHei"/>
-              </a:rPr>
-              <a:t>Intel Arc XPU 加速 · 200K 步三阶段课程学习
-全新建网 + 阶段链式（94.0% → 65.4% → 82.2%）</a:t>
-            </a:r>
-          </a:p>
-        </p:txBody>
-      </p:sp>
-      <p:sp>
-        <p:nvSpPr>
-          <p:cNvPr id="6" name="Rounded Rectangle 5"/>
-          <p:cNvSpPr/>
-          <p:nvPr/>
-        </p:nvSpPr>
-        <p:spPr>
-          <a:xfrm>
-            <a:off x="502920" y="3575304"/>
-            <a:ext cx="6035040" cy="960120"/>
-          </a:xfrm>
-          <a:prstGeom prst="roundRect">
-            <a:avLst/>
-          </a:prstGeom>
-          <a:solidFill>
-            <a:srgbClr val="FFFFFF"/>
-          </a:solidFill>
-          <a:ln w="12700">
-            <a:solidFill>
-              <a:srgbClr val="C9D6E4"/>
-            </a:solidFill>
-          </a:ln>
-          <a:effectLst/>
-        </p:spPr>
-        <p:style>
-          <a:lnRef idx="1">
-            <a:schemeClr val="accent1"/>
-          </a:lnRef>
-          <a:fillRef idx="3">
-            <a:schemeClr val="accent1"/>
-          </a:fillRef>
-          <a:effectRef idx="2">
-            <a:schemeClr val="accent1"/>
-          </a:effectRef>
-          <a:fontRef idx="minor">
-            <a:schemeClr val="lt1"/>
-          </a:fontRef>
-        </p:style>
-        <p:txBody>
-          <a:bodyPr rtlCol="0" anchor="t" wrap="square" lIns="127000" rIns="127000" tIns="76200" bIns="76200"/>
-          <a:lstStyle/>
-          <a:p>
-            <a:pPr algn="l"/>
-            <a:r>
-              <a:rPr sz="1400" b="1">
-                <a:solidFill>
-                  <a:srgbClr val="0969DA"/>
-                </a:solidFill>
-                <a:latin typeface="Microsoft YaHei"/>
-              </a:rPr>
-              <a:t>实时态势与回放</a:t>
-            </a:r>
-          </a:p>
-          <a:p>
-            <a:pPr algn="l"/>
-            <a:r>
-              <a:rPr sz="1150" b="0">
-                <a:solidFill>
-                  <a:srgbClr val="1F2328"/>
-                </a:solidFill>
-                <a:latin typeface="Microsoft YaHei"/>
-              </a:rPr>
-              <a:t>WebSocket 10 并发 · 暂停/恢复/逐周期回溯
-SPEAR 四泳道时间轴（政治准入泳道）</a:t>
-            </a:r>
-          </a:p>
-        </p:txBody>
-      </p:sp>
-      <p:sp>
-        <p:nvSpPr>
-          <p:cNvPr id="7" name="Rounded Rectangle 6"/>
-          <p:cNvSpPr/>
-          <p:nvPr/>
-        </p:nvSpPr>
-        <p:spPr>
-          <a:xfrm>
-            <a:off x="502920" y="4654296"/>
-            <a:ext cx="6035040" cy="960120"/>
-          </a:xfrm>
-          <a:prstGeom prst="roundRect">
-            <a:avLst/>
-          </a:prstGeom>
-          <a:solidFill>
-            <a:srgbClr val="FFFFFF"/>
-          </a:solidFill>
-          <a:ln w="12700">
-            <a:solidFill>
-              <a:srgbClr val="C9D6E4"/>
-            </a:solidFill>
-          </a:ln>
-          <a:effectLst/>
-        </p:spPr>
-        <p:style>
-          <a:lnRef idx="1">
-            <a:schemeClr val="accent1"/>
-          </a:lnRef>
-          <a:fillRef idx="3">
-            <a:schemeClr val="accent1"/>
-          </a:fillRef>
-          <a:effectRef idx="2">
-            <a:schemeClr val="accent1"/>
-          </a:effectRef>
-          <a:fontRef idx="minor">
-            <a:schemeClr val="lt1"/>
-          </a:fontRef>
-        </p:style>
-        <p:txBody>
-          <a:bodyPr rtlCol="0" anchor="t" wrap="square" lIns="127000" rIns="127000" tIns="76200" bIns="76200"/>
-          <a:lstStyle/>
-          <a:p>
-            <a:pPr algn="l"/>
-            <a:r>
-              <a:rPr sz="1400" b="1">
-                <a:solidFill>
-                  <a:srgbClr val="0969DA"/>
-                </a:solidFill>
-                <a:latin typeface="Microsoft YaHei"/>
-              </a:rPr>
-              <a:t>平台化与契约</a:t>
-            </a:r>
-          </a:p>
-          <a:p>
-            <a:pPr algn="l"/>
-            <a:r>
-              <a:rPr sz="1150" b="0">
-                <a:solidFill>
-                  <a:srgbClr val="1F2328"/>
-                </a:solidFill>
-                <a:latin typeface="Microsoft YaHei"/>
-              </a:rPr>
-              <a:t>Maven 契约补全四大 DTB 服务
-REST + gRPC 双栈 · 指挥链/政治准入端点</a:t>
-            </a:r>
-          </a:p>
-        </p:txBody>
-      </p:sp>
-      <p:sp>
-        <p:nvSpPr>
-          <p:cNvPr id="8" name="Rounded Rectangle 7"/>
-          <p:cNvSpPr/>
-          <p:nvPr/>
-        </p:nvSpPr>
-        <p:spPr>
-          <a:xfrm>
-            <a:off x="6766560" y="1417320"/>
-            <a:ext cx="4892040" cy="4224528"/>
-          </a:xfrm>
-          <a:prstGeom prst="roundRect">
-            <a:avLst/>
-          </a:prstGeom>
-          <a:solidFill>
-            <a:srgbClr val="F2F6FA"/>
-          </a:solidFill>
-          <a:ln w="12700">
-            <a:solidFill>
-              <a:srgbClr val="C9D6E4"/>
-            </a:solidFill>
-          </a:ln>
-          <a:effectLst/>
-        </p:spPr>
-        <p:style>
-          <a:lnRef idx="1">
-            <a:schemeClr val="accent1"/>
-          </a:lnRef>
-          <a:fillRef idx="3">
-            <a:schemeClr val="accent1"/>
-          </a:fillRef>
-          <a:effectRef idx="2">
-            <a:schemeClr val="accent1"/>
-          </a:effectRef>
-          <a:fontRef idx="minor">
-            <a:schemeClr val="lt1"/>
-          </a:fontRef>
-        </p:style>
-        <p:txBody>
-          <a:bodyPr rtlCol="0" anchor="t" wrap="square" lIns="127000" rIns="127000" tIns="76200" bIns="76200"/>
-          <a:lstStyle/>
-          <a:p>
-            <a:pPr algn="l"/>
-            <a:r>
-              <a:rPr sz="1500" b="1">
-                <a:solidFill>
-                  <a:srgbClr val="1E2761"/>
-                </a:solidFill>
-                <a:latin typeface="Microsoft YaHei"/>
-              </a:rPr>
-              <a:t>对手策略库（6 项）</a:t>
-            </a:r>
-          </a:p>
-          <a:p>
-            <a:pPr algn="l"/>
-            <a:r>
-              <a:rPr sz="1200" b="0">
-                <a:solidFill>
-                  <a:srgbClr val="1F2328"/>
-                </a:solidFill>
-                <a:latin typeface="Microsoft YaHei"/>
-              </a:rPr>
-              <a:t>1. 饱和攻击        8-12 弹混编压制</a:t>
-            </a:r>
-          </a:p>
-          <a:p>
-            <a:pPr algn="l"/>
-            <a:r>
-              <a:rPr sz="1200" b="0">
-                <a:solidFill>
-                  <a:srgbClr val="1F2328"/>
-                </a:solidFill>
-                <a:latin typeface="Microsoft YaHei"/>
-              </a:rPr>
-              <a:t>2. 隐身突防        高超音速 + 极端天气</a:t>
-            </a:r>
-          </a:p>
-          <a:p>
-            <a:pPr algn="l"/>
-            <a:r>
-              <a:rPr sz="1200" b="0">
-                <a:solidFill>
-                  <a:srgbClr val="1F2328"/>
-                </a:solidFill>
-                <a:latin typeface="Microsoft YaHei"/>
-              </a:rPr>
-              <a:t>3. 电子战          重干扰 + 网攻致盲</a:t>
-            </a:r>
-          </a:p>
-          <a:p>
-            <a:pPr algn="l"/>
-            <a:r>
-              <a:rPr sz="1200" b="0">
-                <a:solidFill>
-                  <a:srgbClr val="1F2328"/>
-                </a:solidFill>
-                <a:latin typeface="Microsoft YaHei"/>
-              </a:rPr>
-              <a:t>4. 诱饵群          低价值弹耗尽拦截资源</a:t>
-            </a:r>
-          </a:p>
-          <a:p>
-            <a:pPr algn="l"/>
-            <a:r>
-              <a:rPr sz="1200" b="1">
-                <a:solidFill>
-                  <a:srgbClr val="B0770B"/>
-                </a:solidFill>
-                <a:latin typeface="Microsoft YaHei"/>
-              </a:rPr>
-              <a:t>5. 多轴协同饱和    单波 10+ 基地分散打击
-    （覆盖第二岛链纵深新增节点）</a:t>
-            </a:r>
-          </a:p>
-          <a:p>
-            <a:pPr algn="l"/>
-            <a:r>
-              <a:rPr sz="1200" b="1">
-                <a:solidFill>
-                  <a:srgbClr val="B0770B"/>
-                </a:solidFill>
-                <a:latin typeface="Microsoft YaHei"/>
-              </a:rPr>
-              <a:t>6. 政治分化压制    持续打击 + 重 EW/网攻
-    触发准入降级（RAND 对手分化策略）</a:t>
-            </a:r>
-          </a:p>
-        </p:txBody>
-      </p:sp>
-    </p:spTree>
-  </p:cSld>
-  <p:clrMapOvr>
-    <a:masterClrMapping/>
-  </p:clrMapOvr>
-</p:sld>
-</file>
-
-<file path=ppt/slides/slide18.xml><?xml version="1.0" encoding="utf-8"?>
-<p:sld xmlns:a="http://schemas.openxmlformats.org/drawingml/2006/main" xmlns:p="http://schemas.openxmlformats.org/presentationml/2006/main" xmlns:r="http://schemas.openxmlformats.org/officeDocument/2006/relationships">
-  <p:cSld>
-    <p:spTree>
-      <p:nvGrpSpPr>
-        <p:cNvPr id="1" name=""/>
-        <p:cNvGrpSpPr/>
-        <p:nvPr/>
-      </p:nvGrpSpPr>
-      <p:grpSpPr/>
-      <p:sp>
-        <p:nvSpPr>
-          <p:cNvPr id="2" name="TextBox 1"/>
-          <p:cNvSpPr txBox="1"/>
-          <p:nvPr/>
-        </p:nvSpPr>
-        <p:spPr>
-          <a:xfrm>
-            <a:off x="502920" y="292608"/>
-            <a:ext cx="11155680" cy="685800"/>
-          </a:xfrm>
-          <a:prstGeom prst="rect">
-            <a:avLst/>
-          </a:prstGeom>
-          <a:noFill/>
-        </p:spPr>
-        <p:txBody>
-          <a:bodyPr wrap="square" lIns="25400" rIns="25400" tIns="25400" bIns="25400">
-            <a:spAutoFit/>
-          </a:bodyPr>
-          <a:lstStyle/>
-          <a:p>
-            <a:pPr algn="l"/>
-            <a:r>
-              <a:rPr sz="2900" b="1">
-                <a:solidFill>
-                  <a:srgbClr val="1E2761"/>
-                </a:solidFill>
-                <a:latin typeface="Microsoft YaHei"/>
-              </a:rPr>
-              <a:t>重验证：政治不确定性下的体系韧性</a:t>
-            </a:r>
-          </a:p>
-        </p:txBody>
-      </p:sp>
-      <p:sp>
-        <p:nvSpPr>
-          <p:cNvPr id="3" name="TextBox 2"/>
-          <p:cNvSpPr txBox="1"/>
-          <p:nvPr/>
-        </p:nvSpPr>
-        <p:spPr>
-          <a:xfrm>
-            <a:off x="521207" y="932688"/>
-            <a:ext cx="11155680" cy="365760"/>
-          </a:xfrm>
-          <a:prstGeom prst="rect">
-            <a:avLst/>
-          </a:prstGeom>
-          <a:noFill/>
-        </p:spPr>
-        <p:txBody>
-          <a:bodyPr wrap="square" lIns="25400" rIns="25400" tIns="25400" bIns="25400">
-            <a:spAutoFit/>
-          </a:bodyPr>
-          <a:lstStyle/>
-          <a:p>
-            <a:pPr algn="l"/>
-            <a:r>
-              <a:rPr sz="1300" b="0">
-                <a:solidFill>
-                  <a:srgbClr val="57606A"/>
-                </a:solidFill>
-                <a:latin typeface="Microsoft YaHei"/>
-              </a:rPr>
-              <a:t>Monte Carlo 三场景对照 + 六策略全量 150 episodes（Wilson 95% CI）</a:t>
-            </a:r>
-          </a:p>
-        </p:txBody>
-      </p:sp>
-      <p:sp>
-        <p:nvSpPr>
-          <p:cNvPr id="4" name="Rounded Rectangle 3"/>
-          <p:cNvSpPr/>
-          <p:nvPr/>
-        </p:nvSpPr>
-        <p:spPr>
-          <a:xfrm>
-            <a:off x="502920" y="1371600"/>
-            <a:ext cx="3657600" cy="1828800"/>
-          </a:xfrm>
-          <a:prstGeom prst="roundRect">
-            <a:avLst/>
-          </a:prstGeom>
-          <a:solidFill>
-            <a:srgbClr val="FFFFFF"/>
-          </a:solidFill>
-          <a:ln w="12700">
-            <a:solidFill>
-              <a:srgbClr val="C9D6E4"/>
-            </a:solidFill>
-          </a:ln>
-          <a:effectLst/>
-        </p:spPr>
-        <p:style>
-          <a:lnRef idx="1">
-            <a:schemeClr val="accent1"/>
-          </a:lnRef>
-          <a:fillRef idx="3">
-            <a:schemeClr val="accent1"/>
-          </a:fillRef>
-          <a:effectRef idx="2">
-            <a:schemeClr val="accent1"/>
-          </a:effectRef>
-          <a:fontRef idx="minor">
-            <a:schemeClr val="lt1"/>
-          </a:fontRef>
-        </p:style>
-        <p:txBody>
-          <a:bodyPr rtlCol="0" anchor="ctr" wrap="square"/>
-          <a:lstStyle/>
-          <a:p>
-            <a:pPr algn="ctr"/>
-            <a:r>
-              <a:rPr sz="4400" b="1">
-                <a:solidFill>
-                  <a:srgbClr val="57606A"/>
-                </a:solidFill>
-                <a:latin typeface="Consolas"/>
-              </a:rPr>
-              <a:t>76.2%</a:t>
-            </a:r>
-          </a:p>
-          <a:p>
-            <a:pPr algn="ctr"/>
-            <a:r>
-              <a:rPr sz="1200">
-                <a:solidFill>
-                  <a:srgbClr val="1F2328"/>
-                </a:solidFill>
-                <a:latin typeface="Microsoft YaHei"/>
-              </a:rPr>
-              <a:t>P6 基线
-原 22 站点 · 182 维</a:t>
-            </a:r>
-          </a:p>
-        </p:txBody>
-      </p:sp>
-      <p:sp>
-        <p:nvSpPr>
-          <p:cNvPr id="5" name="Rounded Rectangle 4"/>
-          <p:cNvSpPr/>
-          <p:nvPr/>
-        </p:nvSpPr>
-        <p:spPr>
-          <a:xfrm>
-            <a:off x="4325112" y="1371600"/>
-            <a:ext cx="3657600" cy="1828800"/>
-          </a:xfrm>
-          <a:prstGeom prst="roundRect">
-            <a:avLst/>
-          </a:prstGeom>
-          <a:solidFill>
-            <a:srgbClr val="FFFFFF"/>
-          </a:solidFill>
-          <a:ln w="12700">
-            <a:solidFill>
-              <a:srgbClr val="C9D6E4"/>
-            </a:solidFill>
-          </a:ln>
-          <a:effectLst/>
-        </p:spPr>
-        <p:style>
-          <a:lnRef idx="1">
-            <a:schemeClr val="accent1"/>
-          </a:lnRef>
-          <a:fillRef idx="3">
-            <a:schemeClr val="accent1"/>
-          </a:fillRef>
-          <a:effectRef idx="2">
-            <a:schemeClr val="accent1"/>
-          </a:effectRef>
-          <a:fontRef idx="minor">
-            <a:schemeClr val="lt1"/>
-          </a:fontRef>
-        </p:style>
-        <p:txBody>
-          <a:bodyPr rtlCol="0" anchor="ctr" wrap="square"/>
-          <a:lstStyle/>
-          <a:p>
-            <a:pPr algn="ctr"/>
-            <a:r>
-              <a:rPr sz="4400" b="1">
-                <a:solidFill>
-                  <a:srgbClr val="0969DA"/>
-                </a:solidFill>
-                <a:latin typeface="Consolas"/>
-              </a:rPr>
-              <a:t>79.0%</a:t>
-            </a:r>
-          </a:p>
-          <a:p>
-            <a:pPr algn="ctr"/>
-            <a:r>
-              <a:rPr sz="1200">
-                <a:solidFill>
-                  <a:srgbClr val="1F2328"/>
-                </a:solidFill>
-                <a:latin typeface="Microsoft YaHei"/>
-              </a:rPr>
-              <a:t>v2 权威数据
-模型不变 · 净效应 +2.8pp</a:t>
-            </a:r>
-          </a:p>
-        </p:txBody>
-      </p:sp>
-      <p:sp>
-        <p:nvSpPr>
-          <p:cNvPr id="6" name="Rounded Rectangle 5"/>
-          <p:cNvSpPr/>
-          <p:nvPr/>
-        </p:nvSpPr>
-        <p:spPr>
-          <a:xfrm>
-            <a:off x="8147304" y="1371600"/>
-            <a:ext cx="3657600" cy="1828800"/>
-          </a:xfrm>
-          <a:prstGeom prst="roundRect">
-            <a:avLst/>
-          </a:prstGeom>
-          <a:solidFill>
-            <a:srgbClr val="FFFFFF"/>
-          </a:solidFill>
-          <a:ln w="12700">
-            <a:solidFill>
-              <a:srgbClr val="C9D6E4"/>
-            </a:solidFill>
-          </a:ln>
-          <a:effectLst/>
-        </p:spPr>
-        <p:style>
-          <a:lnRef idx="1">
-            <a:schemeClr val="accent1"/>
-          </a:lnRef>
-          <a:fillRef idx="3">
-            <a:schemeClr val="accent1"/>
-          </a:fillRef>
-          <a:effectRef idx="2">
-            <a:schemeClr val="accent1"/>
-          </a:effectRef>
-          <a:fontRef idx="minor">
-            <a:schemeClr val="lt1"/>
-          </a:fontRef>
-        </p:style>
-        <p:txBody>
-          <a:bodyPr rtlCol="0" anchor="ctr" wrap="square"/>
-          <a:lstStyle/>
-          <a:p>
-            <a:pPr algn="ctr"/>
-            <a:r>
-              <a:rPr sz="4400" b="1">
-                <a:solidFill>
-                  <a:srgbClr val="1A7F37"/>
-                </a:solidFill>
-                <a:latin typeface="Consolas"/>
-              </a:rPr>
-              <a:t>79.5%</a:t>
-            </a:r>
-          </a:p>
-          <a:p>
-            <a:pPr algn="ctr"/>
-            <a:r>
-              <a:rPr sz="1200">
-                <a:solidFill>
-                  <a:srgbClr val="1F2328"/>
-                </a:solidFill>
-                <a:latin typeface="Microsoft YaHei"/>
-              </a:rPr>
-              <a:t>政治准入
-219 维 P12 模型</a:t>
-            </a:r>
-          </a:p>
-        </p:txBody>
-      </p:sp>
-      <p:sp>
-        <p:nvSpPr>
-          <p:cNvPr id="7" name="Rounded Rectangle 6"/>
-          <p:cNvSpPr/>
-          <p:nvPr/>
-        </p:nvSpPr>
-        <p:spPr>
-          <a:xfrm>
-            <a:off x="502920" y="3383280"/>
-            <a:ext cx="11201400" cy="685800"/>
-          </a:xfrm>
-          <a:prstGeom prst="roundRect">
-            <a:avLst/>
-          </a:prstGeom>
-          <a:solidFill>
-            <a:srgbClr val="E8F3EC"/>
-          </a:solidFill>
-          <a:ln w="12700">
-            <a:solidFill>
-              <a:srgbClr val="1A7F37"/>
-            </a:solidFill>
-          </a:ln>
-          <a:effectLst/>
-        </p:spPr>
-        <p:style>
-          <a:lnRef idx="1">
-            <a:schemeClr val="accent1"/>
-          </a:lnRef>
-          <a:fillRef idx="3">
-            <a:schemeClr val="accent1"/>
-          </a:fillRef>
-          <a:effectRef idx="2">
-            <a:schemeClr val="accent1"/>
-          </a:effectRef>
-          <a:fontRef idx="minor">
-            <a:schemeClr val="lt1"/>
-          </a:fontRef>
-        </p:style>
-        <p:txBody>
-          <a:bodyPr rtlCol="0" anchor="t" wrap="square" lIns="127000" rIns="127000" tIns="76200" bIns="76200"/>
-          <a:lstStyle/>
-          <a:p>
-            <a:pPr algn="l"/>
-            <a:r>
-              <a:rPr sz="1500" b="1">
-                <a:solidFill>
-                  <a:srgbClr val="1A7F37"/>
-                </a:solidFill>
-                <a:latin typeface="Microsoft YaHei"/>
-              </a:rPr>
-              <a:t>六策略全量验证：总体拦截率 79.1%（95% CI 78.0 - 80.2）· 全部策略 ≥ 77.6% · 均过 70% 竞赛门槛</a:t>
-            </a:r>
-          </a:p>
-        </p:txBody>
-      </p:sp>
-      <p:sp>
-        <p:nvSpPr>
-          <p:cNvPr id="8" name="Rounded Rectangle 7"/>
-          <p:cNvSpPr/>
-          <p:nvPr/>
-        </p:nvSpPr>
-        <p:spPr>
-          <a:xfrm>
-            <a:off x="502920" y="4251960"/>
-            <a:ext cx="5532120" cy="841248"/>
-          </a:xfrm>
-          <a:prstGeom prst="roundRect">
-            <a:avLst/>
-          </a:prstGeom>
-          <a:solidFill>
-            <a:srgbClr val="F2F6FA"/>
-          </a:solidFill>
-          <a:ln w="12700">
-            <a:solidFill>
-              <a:srgbClr val="C9D6E4"/>
-            </a:solidFill>
-          </a:ln>
-          <a:effectLst/>
-        </p:spPr>
-        <p:style>
-          <a:lnRef idx="1">
-            <a:schemeClr val="accent1"/>
-          </a:lnRef>
-          <a:fillRef idx="3">
-            <a:schemeClr val="accent1"/>
-          </a:fillRef>
-          <a:effectRef idx="2">
-            <a:schemeClr val="accent1"/>
-          </a:effectRef>
-          <a:fontRef idx="minor">
-            <a:schemeClr val="lt1"/>
-          </a:fontRef>
-        </p:style>
-        <p:txBody>
-          <a:bodyPr rtlCol="0" anchor="t" wrap="square" lIns="127000" rIns="127000" tIns="76200" bIns="76200"/>
-          <a:lstStyle/>
-          <a:p>
-            <a:pPr algn="l"/>
-            <a:r>
-              <a:rPr sz="1300" b="1">
-                <a:solidFill>
-                  <a:srgbClr val="1E2761"/>
-                </a:solidFill>
-                <a:latin typeface="Microsoft YaHei"/>
-              </a:rPr>
-              <a:t>1. 权威数据提升韧性</a:t>
-            </a:r>
-          </a:p>
-          <a:p>
-            <a:pPr algn="l"/>
-            <a:r>
-              <a:rPr sz="1100" b="0">
-                <a:solidFill>
-                  <a:srgbClr val="1F2328"/>
-                </a:solidFill>
-                <a:latin typeface="Microsoft YaHei"/>
-              </a:rPr>
-              <a:t>Tier 分层纵深提升分布式拦截冗余（+2.8pp，模型不变对照）</a:t>
-            </a:r>
-          </a:p>
-        </p:txBody>
-      </p:sp>
-      <p:sp>
-        <p:nvSpPr>
-          <p:cNvPr id="9" name="Rounded Rectangle 8"/>
-          <p:cNvSpPr/>
-          <p:nvPr/>
-        </p:nvSpPr>
-        <p:spPr>
-          <a:xfrm>
-            <a:off x="6217920" y="4251960"/>
-            <a:ext cx="5532120" cy="841248"/>
-          </a:xfrm>
-          <a:prstGeom prst="roundRect">
-            <a:avLst/>
-          </a:prstGeom>
-          <a:solidFill>
-            <a:srgbClr val="F2F6FA"/>
-          </a:solidFill>
-          <a:ln w="12700">
-            <a:solidFill>
-              <a:srgbClr val="C9D6E4"/>
-            </a:solidFill>
-          </a:ln>
-          <a:effectLst/>
-        </p:spPr>
-        <p:style>
-          <a:lnRef idx="1">
-            <a:schemeClr val="accent1"/>
-          </a:lnRef>
-          <a:fillRef idx="3">
-            <a:schemeClr val="accent1"/>
-          </a:fillRef>
-          <a:effectRef idx="2">
-            <a:schemeClr val="accent1"/>
-          </a:effectRef>
-          <a:fontRef idx="minor">
-            <a:schemeClr val="lt1"/>
-          </a:fontRef>
-        </p:style>
-        <p:txBody>
-          <a:bodyPr rtlCol="0" anchor="t" wrap="square" lIns="127000" rIns="127000" tIns="76200" bIns="76200"/>
-          <a:lstStyle/>
-          <a:p>
-            <a:pPr algn="l"/>
-            <a:r>
-              <a:rPr sz="1300" b="1">
-                <a:solidFill>
-                  <a:srgbClr val="1E2761"/>
-                </a:solidFill>
-                <a:latin typeface="Microsoft YaHei"/>
-              </a:rPr>
-              <a:t>2. 政治不确定性可被学习</a:t>
-            </a:r>
-          </a:p>
-          <a:p>
-            <a:pPr algn="l"/>
-            <a:r>
-              <a:rPr sz="1100" b="0">
-                <a:solidFill>
-                  <a:srgbClr val="1F2328"/>
-                </a:solidFill>
-                <a:latin typeface="Microsoft YaHei"/>
-              </a:rPr>
-              <a:t>准入演化场景拦截率不降反稳——219 维模型学会规避 Denied 站点</a:t>
-            </a:r>
-          </a:p>
-        </p:txBody>
-      </p:sp>
-      <p:sp>
-        <p:nvSpPr>
-          <p:cNvPr id="10" name="Rounded Rectangle 9"/>
-          <p:cNvSpPr/>
-          <p:nvPr/>
-        </p:nvSpPr>
-        <p:spPr>
-          <a:xfrm>
-            <a:off x="502920" y="5212080"/>
-            <a:ext cx="5532120" cy="841248"/>
-          </a:xfrm>
-          <a:prstGeom prst="roundRect">
-            <a:avLst/>
-          </a:prstGeom>
-          <a:solidFill>
-            <a:srgbClr val="F2F6FA"/>
-          </a:solidFill>
-          <a:ln w="12700">
-            <a:solidFill>
-              <a:srgbClr val="C9D6E4"/>
-            </a:solidFill>
-          </a:ln>
-          <a:effectLst/>
-        </p:spPr>
-        <p:style>
-          <a:lnRef idx="1">
-            <a:schemeClr val="accent1"/>
-          </a:lnRef>
-          <a:fillRef idx="3">
-            <a:schemeClr val="accent1"/>
-          </a:fillRef>
-          <a:effectRef idx="2">
-            <a:schemeClr val="accent1"/>
-          </a:effectRef>
-          <a:fontRef idx="minor">
-            <a:schemeClr val="lt1"/>
-          </a:fontRef>
-        </p:style>
-        <p:txBody>
-          <a:bodyPr rtlCol="0" anchor="t" wrap="square" lIns="127000" rIns="127000" tIns="76200" bIns="76200"/>
-          <a:lstStyle/>
-          <a:p>
-            <a:pPr algn="l"/>
-            <a:r>
-              <a:rPr sz="1300" b="1">
-                <a:solidFill>
-                  <a:srgbClr val="1E2761"/>
-                </a:solidFill>
-                <a:latin typeface="Microsoft YaHei"/>
-              </a:rPr>
-              <a:t>3. 结构性缓冲存在</a:t>
-            </a:r>
-          </a:p>
-          <a:p>
-            <a:pPr algn="l"/>
-            <a:r>
-              <a:rPr sz="1100" b="0">
-                <a:solidFill>
-                  <a:srgbClr val="1F2328"/>
-                </a:solidFill>
-                <a:latin typeface="Microsoft YaHei"/>
-              </a:rPr>
-              <a:t>敏感性 N=200：最差采样可用基地率仍达 97.0%（以容量折损为主）</a:t>
-            </a:r>
-          </a:p>
-        </p:txBody>
-      </p:sp>
-      <p:sp>
-        <p:nvSpPr>
-          <p:cNvPr id="11" name="Rounded Rectangle 10"/>
-          <p:cNvSpPr/>
-          <p:nvPr/>
-        </p:nvSpPr>
-        <p:spPr>
-          <a:xfrm>
-            <a:off x="6217920" y="5212080"/>
-            <a:ext cx="5532120" cy="841248"/>
-          </a:xfrm>
-          <a:prstGeom prst="roundRect">
-            <a:avLst/>
-          </a:prstGeom>
-          <a:solidFill>
-            <a:srgbClr val="F2F6FA"/>
-          </a:solidFill>
-          <a:ln w="12700">
-            <a:solidFill>
-              <a:srgbClr val="C9D6E4"/>
-            </a:solidFill>
-          </a:ln>
-          <a:effectLst/>
-        </p:spPr>
-        <p:style>
-          <a:lnRef idx="1">
-            <a:schemeClr val="accent1"/>
-          </a:lnRef>
-          <a:fillRef idx="3">
-            <a:schemeClr val="accent1"/>
-          </a:fillRef>
-          <a:effectRef idx="2">
-            <a:schemeClr val="accent1"/>
-          </a:effectRef>
-          <a:fontRef idx="minor">
-            <a:schemeClr val="lt1"/>
-          </a:fontRef>
-        </p:style>
-        <p:txBody>
-          <a:bodyPr rtlCol="0" anchor="t" wrap="square" lIns="127000" rIns="127000" tIns="76200" bIns="76200"/>
-          <a:lstStyle/>
-          <a:p>
-            <a:pPr algn="l"/>
-            <a:r>
-              <a:rPr sz="1300" b="1">
-                <a:solidFill>
-                  <a:srgbClr val="1E2761"/>
-                </a:solidFill>
-                <a:latin typeface="Microsoft YaHei"/>
-              </a:rPr>
-              <a:t>4. 最弱项明确</a:t>
-            </a:r>
-          </a:p>
-          <a:p>
-            <a:pPr algn="l"/>
-            <a:r>
-              <a:rPr sz="1100" b="0">
-                <a:solidFill>
-                  <a:srgbClr val="1F2328"/>
-                </a:solidFill>
-                <a:latin typeface="Microsoft YaHei"/>
-              </a:rPr>
-              <a:t>电子战 / 政治分化策略 77-78% 为后续优化方向</a:t>
-            </a:r>
-          </a:p>
-        </p:txBody>
-      </p:sp>
-    </p:spTree>
-  </p:cSld>
-  <p:clrMapOvr>
-    <a:masterClrMapping/>
-  </p:clrMapOvr>
 </p:sld>
 </file>
 

--- a/DTC2026赛道二参赛作品-含个人简介.pptx
+++ b/DTC2026赛道二参赛作品-含个人简介.pptx
@@ -10151,7 +10151,7 @@
                 </a:solidFill>
                 <a:latin typeface="Microsoft YaHei"/>
               </a:rPr>
-              <a:t>敏感性 N=200：最差采样可用基地率仍达 97.0%（以容量折损为主）</a:t>
+              <a:t>敏感性 N=10000：最差采样可用基地率仍达 95.5%（以容量折损为主）</a:t>
             </a:r>
           </a:p>
         </p:txBody>

--- a/DTC2026赛道二参赛作品-含个人简介.pptx
+++ b/DTC2026赛道二参赛作品-含个人简介.pptx
@@ -10151,7 +10151,7 @@
                 </a:solidFill>
                 <a:latin typeface="Microsoft YaHei"/>
               </a:rPr>
-              <a:t>敏感性 N=10000：最差采样可用基地率仍达 95.5%（以容量折损为主）</a:t>
+              <a:t>敏感性 N=100000：最差采样可用基地率仍达 95.5%（以容量折损为主）</a:t>
             </a:r>
           </a:p>
         </p:txBody>
